--- a/lecons/F3/32_FORM4_LESSON28_Depositional_Features_Wind.pptx
+++ b/lecons/F3/32_FORM4_LESSON28_Depositional_Features_Wind.pptx
@@ -50,9 +50,10 @@
     <p:sldId id="298" r:id="rId44"/>
     <p:sldId id="299" r:id="rId45"/>
     <p:sldId id="300" r:id="rId46"/>
+    <p:sldId id="301" r:id="rId47"/>
   </p:sldIdLst>
   <p:notesMasterIdLst>
-    <p:notesMasterId r:id="rId47"/>
+    <p:notesMasterId r:id="rId48"/>
   </p:notesMasterIdLst>
   <p:sldSz cx="12192000" cy="6858000"/>
   <p:notesSz cx="6858000" cy="12192000"/>
@@ -2394,7 +2395,7 @@
           <a:p>
             <a:r>
               <a:rPr lang="en-US" dirty="0"/>
-              <a:t>Let us copy Wind Deposition. The wind drops sand for the following reasons. On this slide we have Meaning and Slower wind. Write each point on a new line, with the key term first, and explain it in your own words when we revise. When you finish, we go to the next slide.</a:t>
+              <a:t>Let us copy the definitions. The key terms of this lesson are defined as follows. On this slide we have Wind deposition. Write each point on a new line, with the key term first, and explain it in your own words when we revise.</a:t>
             </a:r>
             <a:endParaRPr lang="en-US" dirty="0"/>
           </a:p>
@@ -2570,7 +2571,7 @@
           <a:p>
             <a:r>
               <a:rPr lang="en-US" dirty="0"/>
-              <a:t>We continue with Wind Deposition. On this slide we have Obstacles and Rain. Write each point on a new line, with the key term first, and explain it in your own words when we revise.</a:t>
+              <a:t>Let us copy Causes of Wind Deposition. The wind drops sand for the following reasons. On this slide we have Slower wind and Obstacles. Write each point on a new line, with the key term first, and explain it in your own words when we revise. When you finish, we go to the next slide.</a:t>
             </a:r>
             <a:endParaRPr lang="en-US" dirty="0"/>
           </a:p>
@@ -2658,7 +2659,7 @@
           <a:p>
             <a:r>
               <a:rPr lang="en-US" dirty="0"/>
-              <a:t>Let us copy Depositional Features. Wind deposition forms the following features. On this slide we have Sand dune and Barchan. Write each point on a new line, with the key term first, and explain it in your own words when we revise. When you finish, we go to the next slide.</a:t>
+              <a:t>We continue with Causes of Wind Deposition. On this slide we have Rain. Write each point on a new line, with the key term first, and explain it in your own words when we revise.</a:t>
             </a:r>
             <a:endParaRPr lang="en-US" dirty="0"/>
           </a:p>
@@ -2746,7 +2747,7 @@
           <a:p>
             <a:r>
               <a:rPr lang="en-US" dirty="0"/>
-              <a:t>We continue with Depositional Features. On this slide we have Seif dune and Loess. Write each point on a new line, with the key term first, and explain it in your own words when we revise.</a:t>
+              <a:t>Let us copy Depositional Features. Wind deposition forms the following features. On this slide we have Sand dune and Barchan. Write each point on a new line, with the key term first, and explain it in your own words when we revise. When you finish, we go to the next slide.</a:t>
             </a:r>
             <a:endParaRPr lang="en-US" dirty="0"/>
           </a:p>
@@ -2834,7 +2835,7 @@
           <a:p>
             <a:r>
               <a:rPr lang="en-US" dirty="0"/>
-              <a:t>Now draw this illustration in your notebook: how a dune moves. Give it a title and label it clearly.</a:t>
+              <a:t>We continue with Depositional Features. On this slide we have Seif dune and Loess. Write each point on a new line, with the key term first, and explain it in your own words when we revise.</a:t>
             </a:r>
             <a:endParaRPr lang="en-US" dirty="0"/>
           </a:p>
@@ -2922,7 +2923,7 @@
           <a:p>
             <a:r>
               <a:rPr lang="en-US" dirty="0"/>
-              <a:t>Now let us check what you have understood. Question 1: Why does the wind drop its sand behind a wall? Answer in your exercise book.</a:t>
+              <a:t>Now draw this illustration in your notebook: how a dune moves. Give it a title and label it clearly.</a:t>
             </a:r>
             <a:endParaRPr lang="en-US" dirty="0"/>
           </a:p>
@@ -3010,7 +3011,7 @@
           <a:p>
             <a:r>
               <a:rPr lang="en-US" dirty="0"/>
-              <a:t>The expected answer is: the wall slows the wind. If you got it right, well done.</a:t>
+              <a:t>Now let us check what you have understood. Question 1: Why does the wind drop its sand behind a wall? Answer in your exercise book.</a:t>
             </a:r>
             <a:endParaRPr lang="en-US" dirty="0"/>
           </a:p>
@@ -3098,7 +3099,7 @@
           <a:p>
             <a:r>
               <a:rPr lang="en-US" dirty="0"/>
-              <a:t>Now let us check what you have understood. Question 2: What is a barchan? Answer in your exercise book.</a:t>
+              <a:t>The expected answer is: the wall slows the wind. If you got it right, well done.</a:t>
             </a:r>
             <a:endParaRPr lang="en-US" dirty="0"/>
           </a:p>
@@ -3186,7 +3187,7 @@
           <a:p>
             <a:r>
               <a:rPr lang="en-US" dirty="0"/>
-              <a:t>The expected answer is: a dune shaped like a crescent. If you got it right, well done.</a:t>
+              <a:t>Now let us check what you have understood. Question 2: What is a barchan? Answer in your exercise book.</a:t>
             </a:r>
             <a:endParaRPr lang="en-US" dirty="0"/>
           </a:p>
@@ -3274,7 +3275,7 @@
           <a:p>
             <a:r>
               <a:rPr lang="en-US" dirty="0"/>
-              <a:t>For those who need more practice, fill in the blanks in your exercise book. The answers are: number 1, dune; number 2, barchan; number 3, seif.</a:t>
+              <a:t>The expected answer is: a dune shaped like a crescent. If you got it right, well done.</a:t>
             </a:r>
             <a:endParaRPr lang="en-US" dirty="0"/>
           </a:p>
@@ -3362,7 +3363,7 @@
           <a:p>
             <a:r>
               <a:rPr lang="en-US" dirty="0"/>
-              <a:t>For your homework: Ask an elder in your family how people in your area cope with the heat, the dust and the shortage of water during the dry season. Write down two ways. We shall correct it at the beginning of our next lesson.</a:t>
+              <a:t>For those who need more practice, fill in the blanks in your exercise book. The answers are: number 1, dune; number 2, barchan; number 3, seif.</a:t>
             </a:r>
             <a:endParaRPr lang="en-US" dirty="0"/>
           </a:p>
@@ -3538,7 +3539,7 @@
           <a:p>
             <a:r>
               <a:rPr lang="en-US" dirty="0"/>
-              <a:t>Our next lesson will be on Lesson 29: Man in the Hot Desert Environments. Thank you for your attention, and see you next time.</a:t>
+              <a:t>For your homework: Ask an elder in your family how people in your area cope with the heat, the dust and the shortage of water during the dry season. Write down two ways. We shall correct it at the beginning of our next lesson.</a:t>
             </a:r>
             <a:endParaRPr lang="en-US" dirty="0"/>
           </a:p>
@@ -3626,7 +3627,7 @@
           <a:p>
             <a:r>
               <a:rPr lang="en-US" dirty="0"/>
-              <a:t>Let us play the bilingual game. I say a word in English, and you give me the French word. Then we do the reverse.</a:t>
+              <a:t>Our next lesson will be on Lesson 29: Man in the Hot Desert Environments. Thank you for your attention, and see you next time.</a:t>
             </a:r>
             <a:endParaRPr lang="en-US" dirty="0"/>
           </a:p>
@@ -3714,7 +3715,7 @@
           <a:p>
             <a:r>
               <a:rPr lang="en-US" dirty="0"/>
-              <a:t>I record this information in the official logbook of the class after the lesson.</a:t>
+              <a:t>Let us play the bilingual game. I say a word in English, and you give me the French word. Then we do the reverse.</a:t>
             </a:r>
             <a:endParaRPr lang="en-US" dirty="0"/>
           </a:p>
@@ -3802,7 +3803,7 @@
           <a:p>
             <a:r>
               <a:rPr lang="en-US" dirty="0"/>
-              <a:t>I complete the second page of the logbook: the matter taught, the evaluation, the homework and the attendance.</a:t>
+              <a:t>I record this information in the official logbook of the class after the lesson.</a:t>
             </a:r>
             <a:endParaRPr lang="en-US" dirty="0"/>
           </a:p>
@@ -3890,7 +3891,7 @@
           <a:p>
             <a:r>
               <a:rPr lang="en-US" dirty="0"/>
-              <a:t>This slide is for me, the teacher: it gives the timing of the lesson and what to do if the projector is not available.</a:t>
+              <a:t>I complete the second page of the logbook: the matter taught, the evaluation, the homework and the attendance.</a:t>
             </a:r>
             <a:endParaRPr lang="en-US" dirty="0"/>
           </a:p>
@@ -3978,7 +3979,7 @@
           <a:p>
             <a:r>
               <a:rPr lang="en-US" dirty="0"/>
-              <a:t>These are the references and picture credits used to prepare this lesson.</a:t>
+              <a:t>This slide is for me, the teacher: it gives the timing of the lesson and what to do if the projector is not available.</a:t>
             </a:r>
             <a:endParaRPr lang="en-US" dirty="0"/>
           </a:p>
@@ -4002,6 +4003,94 @@
             <a:fld id="{F7021451-1387-4CA6-816F-3879F97B5CBC}" type="slidenum">
               <a:rPr lang="en-US"/>
               <a:t>45</a:t>
+            </a:fld>
+            <a:endParaRPr lang="en-US"/>
+          </a:p>
+        </p:txBody>
+      </p:sp>
+    </p:spTree>
+    <p:extLst>
+      <p:ext uri="{BB962C8B-B14F-4D97-AF65-F5344CB8AC3E}">
+        <p14:creationId xmlns:p14="http://schemas.microsoft.com/office/powerpoint/2010/main" val="1024086991"/>
+      </p:ext>
+    </p:extLst>
+  </p:cSld>
+  <p:clrMapOvr>
+    <a:masterClrMapping/>
+  </p:clrMapOvr>
+</p:notes>
+</file>
+
+<file path=ppt/notesSlides/notesSlide46.xml><?xml version="1.0" encoding="utf-8"?>
+<p:notes xmlns:a="http://schemas.openxmlformats.org/drawingml/2006/main" xmlns:r="http://schemas.openxmlformats.org/officeDocument/2006/relationships" xmlns:p="http://schemas.openxmlformats.org/presentationml/2006/main">
+  <p:cSld>
+    <p:spTree>
+      <p:nvGrpSpPr>
+        <p:cNvPr id="1" name=""/>
+        <p:cNvGrpSpPr/>
+        <p:nvPr/>
+      </p:nvGrpSpPr>
+      <p:grpSpPr>
+        <a:xfrm>
+          <a:off x="0" y="0"/>
+          <a:ext cx="0" cy="0"/>
+          <a:chOff x="0" y="0"/>
+          <a:chExt cx="0" cy="0"/>
+        </a:xfrm>
+      </p:grpSpPr>
+      <p:sp>
+        <p:nvSpPr>
+          <p:cNvPr id="2" name="Slide Image Placeholder 1"/>
+          <p:cNvSpPr>
+            <a:spLocks noGrp="1" noRot="1" noChangeAspect="1"/>
+          </p:cNvSpPr>
+          <p:nvPr>
+            <p:ph type="sldImg"/>
+          </p:nvPr>
+        </p:nvSpPr>
+        <p:spPr/>
+      </p:sp>
+      <p:sp>
+        <p:nvSpPr>
+          <p:cNvPr id="3" name="Notes Placeholder 2"/>
+          <p:cNvSpPr>
+            <a:spLocks noGrp="1"/>
+          </p:cNvSpPr>
+          <p:nvPr>
+            <p:ph type="body" idx="1"/>
+          </p:nvPr>
+        </p:nvSpPr>
+        <p:spPr/>
+        <p:txBody>
+          <a:bodyPr/>
+          <a:lstStyle/>
+          <a:p>
+            <a:r>
+              <a:rPr lang="en-US" dirty="0"/>
+              <a:t>These are the references and picture credits used to prepare this lesson.</a:t>
+            </a:r>
+            <a:endParaRPr lang="en-US" dirty="0"/>
+          </a:p>
+        </p:txBody>
+      </p:sp>
+      <p:sp>
+        <p:nvSpPr>
+          <p:cNvPr id="4" name="Slide Number Placeholder 3"/>
+          <p:cNvSpPr>
+            <a:spLocks noGrp="1"/>
+          </p:cNvSpPr>
+          <p:nvPr>
+            <p:ph type="sldNum" sz="quarter" idx="10"/>
+          </p:nvPr>
+        </p:nvSpPr>
+        <p:spPr/>
+        <p:txBody>
+          <a:bodyPr/>
+          <a:lstStyle/>
+          <a:p>
+            <a:fld id="{F7021451-1387-4CA6-816F-3879F97B5CBC}" type="slidenum">
+              <a:rPr lang="en-US"/>
+              <a:t>46</a:t>
             </a:fld>
             <a:endParaRPr lang="en-US"/>
           </a:p>
@@ -10579,7 +10668,7 @@
         <p:spPr>
           <a:xfrm>
             <a:off x="0" y="658368"/>
-            <a:ext cx="3840480" cy="5833872"/>
+            <a:ext cx="5120640" cy="5833872"/>
           </a:xfrm>
           <a:prstGeom prst="rect">
             <a:avLst/>
@@ -10594,8 +10683,8 @@
         </p:nvSpPr>
         <p:spPr>
           <a:xfrm>
-            <a:off x="4069080" y="1005840"/>
-            <a:ext cx="7802575" cy="731520"/>
+            <a:off x="5349240" y="1005840"/>
+            <a:ext cx="6522415" cy="731520"/>
           </a:xfrm>
           <a:prstGeom prst="rect">
             <a:avLst/>
@@ -10621,7 +10710,7 @@
                 <a:ea typeface="Times New Roman" pitchFamily="34" charset="-122"/>
                 <a:cs typeface="Times New Roman" pitchFamily="34" charset="-120"/>
               </a:rPr>
-              <a:t>1. Wind Deposition</a:t>
+              <a:t>DEFINITIONS</a:t>
             </a:r>
             <a:endParaRPr lang="en-US" sz="3600" dirty="0"/>
           </a:p>
@@ -10635,8 +10724,8 @@
         </p:nvSpPr>
         <p:spPr>
           <a:xfrm>
-            <a:off x="4069080" y="1783080"/>
-            <a:ext cx="7802575" cy="4663440"/>
+            <a:off x="5349240" y="1783080"/>
+            <a:ext cx="6522415" cy="4663440"/>
           </a:xfrm>
           <a:prstGeom prst="rect">
             <a:avLst/>
@@ -10663,7 +10752,7 @@
                 <a:ea typeface="Times New Roman" pitchFamily="34" charset="-122"/>
                 <a:cs typeface="Times New Roman" pitchFamily="34" charset="-120"/>
               </a:rPr>
-              <a:t>The wind drops sand for the following reasons:</a:t>
+              <a:t>The key terms of this lesson are defined as follows:</a:t>
             </a:r>
             <a:endParaRPr lang="en-US" sz="4000" dirty="0"/>
           </a:p>
@@ -10683,7 +10772,7 @@
                 <a:ea typeface="Times New Roman" pitchFamily="34" charset="-122"/>
                 <a:cs typeface="Times New Roman" pitchFamily="34" charset="-120"/>
               </a:rPr>
-              <a:t>Meaning: </a:t>
+              <a:t>Wind deposition: </a:t>
             </a:r>
             <a:pPr algn="l" indent="0" marL="0">
               <a:spcAft>
@@ -10700,44 +10789,7 @@
                 <a:ea typeface="Times New Roman" pitchFamily="34" charset="-122"/>
                 <a:cs typeface="Times New Roman" pitchFamily="34" charset="-120"/>
               </a:rPr>
-              <a:t>Wind deposition is the dropping of sand and dust carried by the wind.</a:t>
-            </a:r>
-            <a:endParaRPr lang="en-US" sz="4000" dirty="0"/>
-          </a:p>
-          <a:p>
-            <a:pPr algn="l" indent="0" marL="0">
-              <a:spcAft>
-                <a:spcPts val="800"/>
-              </a:spcAft>
-              <a:buNone/>
-            </a:pPr>
-            <a:r>
-              <a:rPr lang="en-US" sz="4000" b="1" dirty="0">
-                <a:solidFill>
-                  <a:srgbClr val="111111"/>
-                </a:solidFill>
-                <a:latin typeface="Times New Roman" pitchFamily="34" charset="0"/>
-                <a:ea typeface="Times New Roman" pitchFamily="34" charset="-122"/>
-                <a:cs typeface="Times New Roman" pitchFamily="34" charset="-120"/>
-              </a:rPr>
-              <a:t>Slower wind: </a:t>
-            </a:r>
-            <a:pPr algn="l" indent="0" marL="0">
-              <a:spcAft>
-                <a:spcPts val="800"/>
-              </a:spcAft>
-              <a:buNone/>
-            </a:pPr>
-            <a:r>
-              <a:rPr lang="en-US" sz="4000" dirty="0">
-                <a:solidFill>
-                  <a:srgbClr val="111111"/>
-                </a:solidFill>
-                <a:latin typeface="Times New Roman" pitchFamily="34" charset="0"/>
-                <a:ea typeface="Times New Roman" pitchFamily="34" charset="-122"/>
-                <a:cs typeface="Times New Roman" pitchFamily="34" charset="-120"/>
-              </a:rPr>
-              <a:t>The wind drops sand when it loses its force.</a:t>
+              <a:t>It is the dropping of sand and dust carried by the wind.</a:t>
             </a:r>
             <a:endParaRPr lang="en-US" sz="4000" dirty="0"/>
           </a:p>
@@ -11881,7 +11933,7 @@
         <p:spPr>
           <a:xfrm>
             <a:off x="0" y="658368"/>
-            <a:ext cx="5120640" cy="5833872"/>
+            <a:ext cx="3840480" cy="5833872"/>
           </a:xfrm>
           <a:prstGeom prst="rect">
             <a:avLst/>
@@ -11896,8 +11948,8 @@
         </p:nvSpPr>
         <p:spPr>
           <a:xfrm>
-            <a:off x="5349240" y="1005840"/>
-            <a:ext cx="6522415" cy="731520"/>
+            <a:off x="4069080" y="1005840"/>
+            <a:ext cx="7802575" cy="731520"/>
           </a:xfrm>
           <a:prstGeom prst="rect">
             <a:avLst/>
@@ -11923,7 +11975,7 @@
                 <a:ea typeface="Times New Roman" pitchFamily="34" charset="-122"/>
                 <a:cs typeface="Times New Roman" pitchFamily="34" charset="-120"/>
               </a:rPr>
-              <a:t>1. Wind Deposition (continued)</a:t>
+              <a:t>1. Causes of Wind Deposition</a:t>
             </a:r>
             <a:endParaRPr lang="en-US" sz="3600" dirty="0"/>
           </a:p>
@@ -11937,8 +11989,8 @@
         </p:nvSpPr>
         <p:spPr>
           <a:xfrm>
-            <a:off x="5349240" y="1783080"/>
-            <a:ext cx="6522415" cy="4663440"/>
+            <a:off x="4069080" y="1783080"/>
+            <a:ext cx="7802575" cy="4663440"/>
           </a:xfrm>
           <a:prstGeom prst="rect">
             <a:avLst/>
@@ -11957,7 +12009,7 @@
               <a:buNone/>
             </a:pPr>
             <a:r>
-              <a:rPr lang="en-US" sz="4000" b="1" dirty="0">
+              <a:rPr lang="en-US" sz="4000" i="1" dirty="0">
                 <a:solidFill>
                   <a:srgbClr val="111111"/>
                 </a:solidFill>
@@ -11965,8 +12017,11 @@
                 <a:ea typeface="Times New Roman" pitchFamily="34" charset="-122"/>
                 <a:cs typeface="Times New Roman" pitchFamily="34" charset="-120"/>
               </a:rPr>
-              <a:t>Obstacles: </a:t>
-            </a:r>
+              <a:t>The wind drops sand for the following reasons:</a:t>
+            </a:r>
+            <a:endParaRPr lang="en-US" sz="4000" dirty="0"/>
+          </a:p>
+          <a:p>
             <a:pPr algn="l" indent="0" marL="0">
               <a:spcAft>
                 <a:spcPts val="800"/>
@@ -11974,7 +12029,7 @@
               <a:buNone/>
             </a:pPr>
             <a:r>
-              <a:rPr lang="en-US" sz="4000" dirty="0">
+              <a:rPr lang="en-US" sz="4000" b="1" dirty="0">
                 <a:solidFill>
                   <a:srgbClr val="111111"/>
                 </a:solidFill>
@@ -11982,11 +12037,8 @@
                 <a:ea typeface="Times New Roman" pitchFamily="34" charset="-122"/>
                 <a:cs typeface="Times New Roman" pitchFamily="34" charset="-120"/>
               </a:rPr>
-              <a:t>Walls, stones and bushes slow the wind and make it drop sand.</a:t>
-            </a:r>
-            <a:endParaRPr lang="en-US" sz="4000" dirty="0"/>
-          </a:p>
-          <a:p>
+              <a:t>Slower wind: </a:t>
+            </a:r>
             <a:pPr algn="l" indent="0" marL="0">
               <a:spcAft>
                 <a:spcPts val="800"/>
@@ -11994,7 +12046,7 @@
               <a:buNone/>
             </a:pPr>
             <a:r>
-              <a:rPr lang="en-US" sz="4000" b="1" dirty="0">
+              <a:rPr lang="en-US" sz="4000" dirty="0">
                 <a:solidFill>
                   <a:srgbClr val="111111"/>
                 </a:solidFill>
@@ -12002,8 +12054,11 @@
                 <a:ea typeface="Times New Roman" pitchFamily="34" charset="-122"/>
                 <a:cs typeface="Times New Roman" pitchFamily="34" charset="-120"/>
               </a:rPr>
-              <a:t>Rain: </a:t>
-            </a:r>
+              <a:t>The wind drops sand when it loses its force.</a:t>
+            </a:r>
+            <a:endParaRPr lang="en-US" sz="4000" dirty="0"/>
+          </a:p>
+          <a:p>
             <a:pPr algn="l" indent="0" marL="0">
               <a:spcAft>
                 <a:spcPts val="800"/>
@@ -12011,7 +12066,7 @@
               <a:buNone/>
             </a:pPr>
             <a:r>
-              <a:rPr lang="en-US" sz="4000" dirty="0">
+              <a:rPr lang="en-US" sz="4000" b="1" dirty="0">
                 <a:solidFill>
                   <a:srgbClr val="111111"/>
                 </a:solidFill>
@@ -12019,7 +12074,24 @@
                 <a:ea typeface="Times New Roman" pitchFamily="34" charset="-122"/>
                 <a:cs typeface="Times New Roman" pitchFamily="34" charset="-120"/>
               </a:rPr>
-              <a:t>Wet sand becomes heavy and stops moving.</a:t>
+              <a:t>Obstacles: </a:t>
+            </a:r>
+            <a:pPr algn="l" indent="0" marL="0">
+              <a:spcAft>
+                <a:spcPts val="800"/>
+              </a:spcAft>
+              <a:buNone/>
+            </a:pPr>
+            <a:r>
+              <a:rPr lang="en-US" sz="4000" dirty="0">
+                <a:solidFill>
+                  <a:srgbClr val="111111"/>
+                </a:solidFill>
+                <a:latin typeface="Times New Roman" pitchFamily="34" charset="0"/>
+                <a:ea typeface="Times New Roman" pitchFamily="34" charset="-122"/>
+                <a:cs typeface="Times New Roman" pitchFamily="34" charset="-120"/>
+              </a:rPr>
+              <a:t>Walls, stones and bushes slow the wind and make it drop sand.</a:t>
             </a:r>
             <a:endParaRPr lang="en-US" sz="4000" dirty="0"/>
           </a:p>
@@ -12154,7 +12226,7 @@
         <p:spPr>
           <a:xfrm>
             <a:off x="0" y="658368"/>
-            <a:ext cx="1463040" cy="5833872"/>
+            <a:ext cx="5120640" cy="5833872"/>
           </a:xfrm>
           <a:prstGeom prst="rect">
             <a:avLst/>
@@ -12169,8 +12241,8 @@
         </p:nvSpPr>
         <p:spPr>
           <a:xfrm>
-            <a:off x="1691640" y="1005840"/>
-            <a:ext cx="10180015" cy="731520"/>
+            <a:off x="5349240" y="1005840"/>
+            <a:ext cx="6522415" cy="731520"/>
           </a:xfrm>
           <a:prstGeom prst="rect">
             <a:avLst/>
@@ -12196,7 +12268,7 @@
                 <a:ea typeface="Times New Roman" pitchFamily="34" charset="-122"/>
                 <a:cs typeface="Times New Roman" pitchFamily="34" charset="-120"/>
               </a:rPr>
-              <a:t>2. Depositional Features</a:t>
+              <a:t>1. Causes of Wind Deposition (continued)</a:t>
             </a:r>
             <a:endParaRPr lang="en-US" sz="3600" dirty="0"/>
           </a:p>
@@ -12210,8 +12282,8 @@
         </p:nvSpPr>
         <p:spPr>
           <a:xfrm>
-            <a:off x="1691640" y="1783080"/>
-            <a:ext cx="10180015" cy="4663440"/>
+            <a:off x="5349240" y="1783080"/>
+            <a:ext cx="6522415" cy="4663440"/>
           </a:xfrm>
           <a:prstGeom prst="rect">
             <a:avLst/>
@@ -12230,7 +12302,7 @@
               <a:buNone/>
             </a:pPr>
             <a:r>
-              <a:rPr lang="en-US" sz="4000" i="1" dirty="0">
+              <a:rPr lang="en-US" sz="4000" b="1" dirty="0">
                 <a:solidFill>
                   <a:srgbClr val="111111"/>
                 </a:solidFill>
@@ -12238,11 +12310,8 @@
                 <a:ea typeface="Times New Roman" pitchFamily="34" charset="-122"/>
                 <a:cs typeface="Times New Roman" pitchFamily="34" charset="-120"/>
               </a:rPr>
-              <a:t>Wind deposition forms the following features:</a:t>
-            </a:r>
-            <a:endParaRPr lang="en-US" sz="4000" dirty="0"/>
-          </a:p>
-          <a:p>
+              <a:t>Rain: </a:t>
+            </a:r>
             <a:pPr algn="l" indent="0" marL="0">
               <a:spcAft>
                 <a:spcPts val="800"/>
@@ -12250,7 +12319,7 @@
               <a:buNone/>
             </a:pPr>
             <a:r>
-              <a:rPr lang="en-US" sz="4000" b="1" dirty="0">
+              <a:rPr lang="en-US" sz="4000" dirty="0">
                 <a:solidFill>
                   <a:srgbClr val="111111"/>
                 </a:solidFill>
@@ -12258,61 +12327,7 @@
                 <a:ea typeface="Times New Roman" pitchFamily="34" charset="-122"/>
                 <a:cs typeface="Times New Roman" pitchFamily="34" charset="-120"/>
               </a:rPr>
-              <a:t>Sand dune: </a:t>
-            </a:r>
-            <a:pPr algn="l" indent="0" marL="0">
-              <a:spcAft>
-                <a:spcPts val="800"/>
-              </a:spcAft>
-              <a:buNone/>
-            </a:pPr>
-            <a:r>
-              <a:rPr lang="en-US" sz="4000" dirty="0">
-                <a:solidFill>
-                  <a:srgbClr val="111111"/>
-                </a:solidFill>
-                <a:latin typeface="Times New Roman" pitchFamily="34" charset="0"/>
-                <a:ea typeface="Times New Roman" pitchFamily="34" charset="-122"/>
-                <a:cs typeface="Times New Roman" pitchFamily="34" charset="-120"/>
-              </a:rPr>
-              <a:t>It is a hill of sand with a gentle windward slope and a steep slip face.</a:t>
-            </a:r>
-            <a:endParaRPr lang="en-US" sz="4000" dirty="0"/>
-          </a:p>
-          <a:p>
-            <a:pPr algn="l" indent="0" marL="0">
-              <a:spcAft>
-                <a:spcPts val="800"/>
-              </a:spcAft>
-              <a:buNone/>
-            </a:pPr>
-            <a:r>
-              <a:rPr lang="en-US" sz="4000" b="1" dirty="0">
-                <a:solidFill>
-                  <a:srgbClr val="111111"/>
-                </a:solidFill>
-                <a:latin typeface="Times New Roman" pitchFamily="34" charset="0"/>
-                <a:ea typeface="Times New Roman" pitchFamily="34" charset="-122"/>
-                <a:cs typeface="Times New Roman" pitchFamily="34" charset="-120"/>
-              </a:rPr>
-              <a:t>Barchan: </a:t>
-            </a:r>
-            <a:pPr algn="l" indent="0" marL="0">
-              <a:spcAft>
-                <a:spcPts val="800"/>
-              </a:spcAft>
-              <a:buNone/>
-            </a:pPr>
-            <a:r>
-              <a:rPr lang="en-US" sz="4000" dirty="0">
-                <a:solidFill>
-                  <a:srgbClr val="111111"/>
-                </a:solidFill>
-                <a:latin typeface="Times New Roman" pitchFamily="34" charset="0"/>
-                <a:ea typeface="Times New Roman" pitchFamily="34" charset="-122"/>
-                <a:cs typeface="Times New Roman" pitchFamily="34" charset="-120"/>
-              </a:rPr>
-              <a:t>It is a crescent-shaped dune whose horns point in the direction of the wind.</a:t>
+              <a:t>Wet sand becomes heavy and stops moving.</a:t>
             </a:r>
             <a:endParaRPr lang="en-US" sz="4000" dirty="0"/>
           </a:p>
@@ -12447,7 +12462,7 @@
         <p:spPr>
           <a:xfrm>
             <a:off x="0" y="658368"/>
-            <a:ext cx="5120640" cy="5833872"/>
+            <a:ext cx="1463040" cy="5833872"/>
           </a:xfrm>
           <a:prstGeom prst="rect">
             <a:avLst/>
@@ -12462,8 +12477,8 @@
         </p:nvSpPr>
         <p:spPr>
           <a:xfrm>
-            <a:off x="5349240" y="1005840"/>
-            <a:ext cx="6522415" cy="731520"/>
+            <a:off x="1691640" y="1005840"/>
+            <a:ext cx="10180015" cy="731520"/>
           </a:xfrm>
           <a:prstGeom prst="rect">
             <a:avLst/>
@@ -12489,7 +12504,7 @@
                 <a:ea typeface="Times New Roman" pitchFamily="34" charset="-122"/>
                 <a:cs typeface="Times New Roman" pitchFamily="34" charset="-120"/>
               </a:rPr>
-              <a:t>2. Depositional Features (continued)</a:t>
+              <a:t>2. Depositional Features</a:t>
             </a:r>
             <a:endParaRPr lang="en-US" sz="3600" dirty="0"/>
           </a:p>
@@ -12503,8 +12518,8 @@
         </p:nvSpPr>
         <p:spPr>
           <a:xfrm>
-            <a:off x="5349240" y="1783080"/>
-            <a:ext cx="6522415" cy="4663440"/>
+            <a:off x="1691640" y="1783080"/>
+            <a:ext cx="10180015" cy="4663440"/>
           </a:xfrm>
           <a:prstGeom prst="rect">
             <a:avLst/>
@@ -12523,7 +12538,7 @@
               <a:buNone/>
             </a:pPr>
             <a:r>
-              <a:rPr lang="en-US" sz="4000" b="1" dirty="0">
+              <a:rPr lang="en-US" sz="4000" i="1" dirty="0">
                 <a:solidFill>
                   <a:srgbClr val="111111"/>
                 </a:solidFill>
@@ -12531,8 +12546,11 @@
                 <a:ea typeface="Times New Roman" pitchFamily="34" charset="-122"/>
                 <a:cs typeface="Times New Roman" pitchFamily="34" charset="-120"/>
               </a:rPr>
-              <a:t>Seif dune: </a:t>
-            </a:r>
+              <a:t>Wind deposition forms the following features:</a:t>
+            </a:r>
+            <a:endParaRPr lang="en-US" sz="4000" dirty="0"/>
+          </a:p>
+          <a:p>
             <a:pPr algn="l" indent="0" marL="0">
               <a:spcAft>
                 <a:spcPts val="800"/>
@@ -12540,7 +12558,7 @@
               <a:buNone/>
             </a:pPr>
             <a:r>
-              <a:rPr lang="en-US" sz="4000" dirty="0">
+              <a:rPr lang="en-US" sz="4000" b="1" dirty="0">
                 <a:solidFill>
                   <a:srgbClr val="111111"/>
                 </a:solidFill>
@@ -12548,11 +12566,8 @@
                 <a:ea typeface="Times New Roman" pitchFamily="34" charset="-122"/>
                 <a:cs typeface="Times New Roman" pitchFamily="34" charset="-120"/>
               </a:rPr>
-              <a:t>It is a long, straight ridge of sand lying parallel to the wind.</a:t>
-            </a:r>
-            <a:endParaRPr lang="en-US" sz="4000" dirty="0"/>
-          </a:p>
-          <a:p>
+              <a:t>Sand dune: </a:t>
+            </a:r>
             <a:pPr algn="l" indent="0" marL="0">
               <a:spcAft>
                 <a:spcPts val="800"/>
@@ -12560,7 +12575,7 @@
               <a:buNone/>
             </a:pPr>
             <a:r>
-              <a:rPr lang="en-US" sz="4000" b="1" dirty="0">
+              <a:rPr lang="en-US" sz="4000" dirty="0">
                 <a:solidFill>
                   <a:srgbClr val="111111"/>
                 </a:solidFill>
@@ -12568,8 +12583,11 @@
                 <a:ea typeface="Times New Roman" pitchFamily="34" charset="-122"/>
                 <a:cs typeface="Times New Roman" pitchFamily="34" charset="-120"/>
               </a:rPr>
-              <a:t>Loess: </a:t>
-            </a:r>
+              <a:t>It is a hill of sand with a gentle windward slope and a steep slip face.</a:t>
+            </a:r>
+            <a:endParaRPr lang="en-US" sz="4000" dirty="0"/>
+          </a:p>
+          <a:p>
             <a:pPr algn="l" indent="0" marL="0">
               <a:spcAft>
                 <a:spcPts val="800"/>
@@ -12577,7 +12595,7 @@
               <a:buNone/>
             </a:pPr>
             <a:r>
-              <a:rPr lang="en-US" sz="4000" dirty="0">
+              <a:rPr lang="en-US" sz="4000" b="1" dirty="0">
                 <a:solidFill>
                   <a:srgbClr val="111111"/>
                 </a:solidFill>
@@ -12585,7 +12603,24 @@
                 <a:ea typeface="Times New Roman" pitchFamily="34" charset="-122"/>
                 <a:cs typeface="Times New Roman" pitchFamily="34" charset="-120"/>
               </a:rPr>
-              <a:t>It is a thick layer of fine dust deposited far from the desert.</a:t>
+              <a:t>Barchan: </a:t>
+            </a:r>
+            <a:pPr algn="l" indent="0" marL="0">
+              <a:spcAft>
+                <a:spcPts val="800"/>
+              </a:spcAft>
+              <a:buNone/>
+            </a:pPr>
+            <a:r>
+              <a:rPr lang="en-US" sz="4000" dirty="0">
+                <a:solidFill>
+                  <a:srgbClr val="111111"/>
+                </a:solidFill>
+                <a:latin typeface="Times New Roman" pitchFamily="34" charset="0"/>
+                <a:ea typeface="Times New Roman" pitchFamily="34" charset="-122"/>
+                <a:cs typeface="Times New Roman" pitchFamily="34" charset="-120"/>
+              </a:rPr>
+              <a:t>It is a crescent-shaped dune whose horns point in the direction of the wind.</a:t>
             </a:r>
             <a:endParaRPr lang="en-US" sz="4000" dirty="0"/>
           </a:p>
@@ -12703,48 +12738,9 @@
           </a:p>
         </p:txBody>
       </p:sp>
-      <p:sp>
-        <p:nvSpPr>
-          <p:cNvPr id="3" name="Text 1"/>
-          <p:cNvSpPr/>
-          <p:nvPr/>
-        </p:nvSpPr>
-        <p:spPr>
-          <a:xfrm>
-            <a:off x="457200" y="1005840"/>
-            <a:ext cx="11277295" cy="731520"/>
-          </a:xfrm>
-          <a:prstGeom prst="rect">
-            <a:avLst/>
-          </a:prstGeom>
-          <a:noFill/>
-          <a:ln/>
-        </p:spPr>
-        <p:txBody>
-          <a:bodyPr wrap="square" lIns="0" tIns="0" rIns="0" bIns="0" rtlCol="0" anchor="ctr"/>
-          <a:lstStyle/>
-          <a:p>
-            <a:pPr algn="ctr" indent="0" marL="0">
-              <a:buNone/>
-            </a:pPr>
-            <a:r>
-              <a:rPr lang="en-US" sz="3600" b="1" dirty="0">
-                <a:solidFill>
-                  <a:srgbClr val="990011"/>
-                </a:solidFill>
-                <a:latin typeface="Times New Roman" pitchFamily="34" charset="0"/>
-                <a:ea typeface="Times New Roman" pitchFamily="34" charset="-122"/>
-                <a:cs typeface="Times New Roman" pitchFamily="34" charset="-120"/>
-              </a:rPr>
-              <a:t>2. Depositional Features</a:t>
-            </a:r>
-            <a:endParaRPr lang="en-US" sz="3600" dirty="0"/>
-          </a:p>
-        </p:txBody>
-      </p:sp>
       <p:pic>
         <p:nvPicPr>
-          <p:cNvPr id="4" name="Image 0" descr="/home/claude/f4/img/v2/dune_move_last.png">    </p:cNvPr>
+          <p:cNvPr id="3" name="Image 0" descr="/home/claude/f4/img/minesec_sheet.png">    </p:cNvPr>
           <p:cNvPicPr>
             <a:picLocks noChangeAspect="1"/>
           </p:cNvPicPr>
@@ -12758,8 +12754,8 @@
         </p:blipFill>
         <p:spPr>
           <a:xfrm>
-            <a:off x="629930" y="1783080"/>
-            <a:ext cx="10931835" cy="4270248"/>
+            <a:off x="0" y="658368"/>
+            <a:ext cx="5120640" cy="5833872"/>
           </a:xfrm>
           <a:prstGeom prst="rect">
             <a:avLst/>
@@ -12768,14 +12764,14 @@
       </p:pic>
       <p:sp>
         <p:nvSpPr>
-          <p:cNvPr id="5" name="Text 2"/>
+          <p:cNvPr id="4" name="Text 1"/>
           <p:cNvSpPr/>
           <p:nvPr/>
         </p:nvSpPr>
         <p:spPr>
           <a:xfrm>
-            <a:off x="457200" y="6089904"/>
-            <a:ext cx="11277295" cy="347472"/>
+            <a:off x="5349240" y="1005840"/>
+            <a:ext cx="6522415" cy="731520"/>
           </a:xfrm>
           <a:prstGeom prst="rect">
             <a:avLst/>
@@ -12784,24 +12780,122 @@
           <a:ln/>
         </p:spPr>
         <p:txBody>
-          <a:bodyPr wrap="square" lIns="0" tIns="0" rIns="0" bIns="0" rtlCol="0" anchor="ctr"/>
+          <a:bodyPr wrap="square" lIns="0" tIns="0" rIns="0" bIns="0" rtlCol="0" anchor="ctr">
+            <a:normAutofit/>
+          </a:bodyPr>
           <a:lstStyle/>
           <a:p>
             <a:pPr algn="ctr" indent="0" marL="0">
               <a:buNone/>
             </a:pPr>
             <a:r>
-              <a:rPr lang="en-US" sz="1800" i="1" dirty="0">
-                <a:solidFill>
-                  <a:srgbClr val="555555"/>
+              <a:rPr lang="en-US" sz="3600" b="1" dirty="0">
+                <a:solidFill>
+                  <a:srgbClr val="990011"/>
                 </a:solidFill>
                 <a:latin typeface="Times New Roman" pitchFamily="34" charset="0"/>
                 <a:ea typeface="Times New Roman" pitchFamily="34" charset="-122"/>
                 <a:cs typeface="Times New Roman" pitchFamily="34" charset="-120"/>
               </a:rPr>
-              <a:t>Illustration: how a dune moves</a:t>
-            </a:r>
-            <a:endParaRPr lang="en-US" sz="1800" dirty="0"/>
+              <a:t>2. Depositional Features (continued)</a:t>
+            </a:r>
+            <a:endParaRPr lang="en-US" sz="3600" dirty="0"/>
+          </a:p>
+        </p:txBody>
+      </p:sp>
+      <p:sp>
+        <p:nvSpPr>
+          <p:cNvPr id="5" name="Text 2"/>
+          <p:cNvSpPr/>
+          <p:nvPr/>
+        </p:nvSpPr>
+        <p:spPr>
+          <a:xfrm>
+            <a:off x="5349240" y="1783080"/>
+            <a:ext cx="6522415" cy="4663440"/>
+          </a:xfrm>
+          <a:prstGeom prst="rect">
+            <a:avLst/>
+          </a:prstGeom>
+          <a:noFill/>
+          <a:ln/>
+        </p:spPr>
+        <p:txBody>
+          <a:bodyPr wrap="square" lIns="0" tIns="0" rIns="0" bIns="0" rtlCol="0" anchor="t"/>
+          <a:lstStyle/>
+          <a:p>
+            <a:pPr algn="l" indent="0" marL="0">
+              <a:spcAft>
+                <a:spcPts val="800"/>
+              </a:spcAft>
+              <a:buNone/>
+            </a:pPr>
+            <a:r>
+              <a:rPr lang="en-US" sz="4000" b="1" dirty="0">
+                <a:solidFill>
+                  <a:srgbClr val="111111"/>
+                </a:solidFill>
+                <a:latin typeface="Times New Roman" pitchFamily="34" charset="0"/>
+                <a:ea typeface="Times New Roman" pitchFamily="34" charset="-122"/>
+                <a:cs typeface="Times New Roman" pitchFamily="34" charset="-120"/>
+              </a:rPr>
+              <a:t>Seif dune: </a:t>
+            </a:r>
+            <a:pPr algn="l" indent="0" marL="0">
+              <a:spcAft>
+                <a:spcPts val="800"/>
+              </a:spcAft>
+              <a:buNone/>
+            </a:pPr>
+            <a:r>
+              <a:rPr lang="en-US" sz="4000" dirty="0">
+                <a:solidFill>
+                  <a:srgbClr val="111111"/>
+                </a:solidFill>
+                <a:latin typeface="Times New Roman" pitchFamily="34" charset="0"/>
+                <a:ea typeface="Times New Roman" pitchFamily="34" charset="-122"/>
+                <a:cs typeface="Times New Roman" pitchFamily="34" charset="-120"/>
+              </a:rPr>
+              <a:t>It is a long, straight ridge of sand lying parallel to the wind.</a:t>
+            </a:r>
+            <a:endParaRPr lang="en-US" sz="4000" dirty="0"/>
+          </a:p>
+          <a:p>
+            <a:pPr algn="l" indent="0" marL="0">
+              <a:spcAft>
+                <a:spcPts val="800"/>
+              </a:spcAft>
+              <a:buNone/>
+            </a:pPr>
+            <a:r>
+              <a:rPr lang="en-US" sz="4000" b="1" dirty="0">
+                <a:solidFill>
+                  <a:srgbClr val="111111"/>
+                </a:solidFill>
+                <a:latin typeface="Times New Roman" pitchFamily="34" charset="0"/>
+                <a:ea typeface="Times New Roman" pitchFamily="34" charset="-122"/>
+                <a:cs typeface="Times New Roman" pitchFamily="34" charset="-120"/>
+              </a:rPr>
+              <a:t>Loess: </a:t>
+            </a:r>
+            <a:pPr algn="l" indent="0" marL="0">
+              <a:spcAft>
+                <a:spcPts val="800"/>
+              </a:spcAft>
+              <a:buNone/>
+            </a:pPr>
+            <a:r>
+              <a:rPr lang="en-US" sz="4000" dirty="0">
+                <a:solidFill>
+                  <a:srgbClr val="111111"/>
+                </a:solidFill>
+                <a:latin typeface="Times New Roman" pitchFamily="34" charset="0"/>
+                <a:ea typeface="Times New Roman" pitchFamily="34" charset="-122"/>
+                <a:cs typeface="Times New Roman" pitchFamily="34" charset="-120"/>
+              </a:rPr>
+              <a:t>It is a thick layer of fine dust deposited far from the desert.</a:t>
+            </a:r>
+            <a:endParaRPr lang="en-US" sz="4000" dirty="0"/>
           </a:p>
         </p:txBody>
       </p:sp>
@@ -12911,15 +13005,54 @@
                 <a:ea typeface="Calibri" pitchFamily="34" charset="-122"/>
                 <a:cs typeface="Calibri" pitchFamily="34" charset="-120"/>
               </a:rPr>
-              <a:t>FORMATIVE EVALUATION</a:t>
+              <a:t>BOARD SUMMARY</a:t>
             </a:r>
             <a:endParaRPr lang="en-US" sz="1400" dirty="0"/>
+          </a:p>
+        </p:txBody>
+      </p:sp>
+      <p:sp>
+        <p:nvSpPr>
+          <p:cNvPr id="3" name="Text 1"/>
+          <p:cNvSpPr/>
+          <p:nvPr/>
+        </p:nvSpPr>
+        <p:spPr>
+          <a:xfrm>
+            <a:off x="457200" y="1005840"/>
+            <a:ext cx="11277295" cy="731520"/>
+          </a:xfrm>
+          <a:prstGeom prst="rect">
+            <a:avLst/>
+          </a:prstGeom>
+          <a:noFill/>
+          <a:ln/>
+        </p:spPr>
+        <p:txBody>
+          <a:bodyPr wrap="square" lIns="0" tIns="0" rIns="0" bIns="0" rtlCol="0" anchor="ctr"/>
+          <a:lstStyle/>
+          <a:p>
+            <a:pPr algn="ctr" indent="0" marL="0">
+              <a:buNone/>
+            </a:pPr>
+            <a:r>
+              <a:rPr lang="en-US" sz="3600" b="1" dirty="0">
+                <a:solidFill>
+                  <a:srgbClr val="990011"/>
+                </a:solidFill>
+                <a:latin typeface="Times New Roman" pitchFamily="34" charset="0"/>
+                <a:ea typeface="Times New Roman" pitchFamily="34" charset="-122"/>
+                <a:cs typeface="Times New Roman" pitchFamily="34" charset="-120"/>
+              </a:rPr>
+              <a:t>2. Depositional Features</a:t>
+            </a:r>
+            <a:endParaRPr lang="en-US" sz="3600" dirty="0"/>
           </a:p>
         </p:txBody>
       </p:sp>
       <p:pic>
         <p:nvPicPr>
-          <p:cNvPr id="3" name="Image 0" descr="/home/claude/f4/img/minesec_sheet.png">    </p:cNvPr>
+          <p:cNvPr id="4" name="Image 0" descr="/home/claude/f4/img/v2/dune_move_last.png">    </p:cNvPr>
           <p:cNvPicPr>
             <a:picLocks noChangeAspect="1"/>
           </p:cNvPicPr>
@@ -12933,8 +13066,8 @@
         </p:blipFill>
         <p:spPr>
           <a:xfrm>
-            <a:off x="0" y="658368"/>
-            <a:ext cx="5120640" cy="5833872"/>
+            <a:off x="629930" y="1783080"/>
+            <a:ext cx="10931835" cy="4270248"/>
           </a:xfrm>
           <a:prstGeom prst="rect">
             <a:avLst/>
@@ -12943,14 +13076,14 @@
       </p:pic>
       <p:sp>
         <p:nvSpPr>
-          <p:cNvPr id="4" name="Text 1"/>
+          <p:cNvPr id="5" name="Text 2"/>
           <p:cNvSpPr/>
           <p:nvPr/>
         </p:nvSpPr>
         <p:spPr>
           <a:xfrm>
-            <a:off x="5349240" y="1005840"/>
-            <a:ext cx="6522415" cy="731520"/>
+            <a:off x="457200" y="6089904"/>
+            <a:ext cx="11277295" cy="347472"/>
           </a:xfrm>
           <a:prstGeom prst="rect">
             <a:avLst/>
@@ -12959,68 +13092,24 @@
           <a:ln/>
         </p:spPr>
         <p:txBody>
-          <a:bodyPr wrap="square" lIns="0" tIns="0" rIns="0" bIns="0" rtlCol="0" anchor="ctr">
-            <a:normAutofit/>
-          </a:bodyPr>
+          <a:bodyPr wrap="square" lIns="0" tIns="0" rIns="0" bIns="0" rtlCol="0" anchor="ctr"/>
           <a:lstStyle/>
           <a:p>
             <a:pPr algn="ctr" indent="0" marL="0">
               <a:buNone/>
             </a:pPr>
             <a:r>
-              <a:rPr lang="en-US" sz="3600" b="1" dirty="0">
-                <a:solidFill>
-                  <a:srgbClr val="990011"/>
+              <a:rPr lang="en-US" sz="1800" i="1" dirty="0">
+                <a:solidFill>
+                  <a:srgbClr val="555555"/>
                 </a:solidFill>
                 <a:latin typeface="Times New Roman" pitchFamily="34" charset="0"/>
                 <a:ea typeface="Times New Roman" pitchFamily="34" charset="-122"/>
                 <a:cs typeface="Times New Roman" pitchFamily="34" charset="-120"/>
               </a:rPr>
-              <a:t>Evaluation 1</a:t>
-            </a:r>
-            <a:endParaRPr lang="en-US" sz="3600" dirty="0"/>
-          </a:p>
-        </p:txBody>
-      </p:sp>
-      <p:sp>
-        <p:nvSpPr>
-          <p:cNvPr id="5" name="Text 2"/>
-          <p:cNvSpPr/>
-          <p:nvPr/>
-        </p:nvSpPr>
-        <p:spPr>
-          <a:xfrm>
-            <a:off x="5349240" y="1783080"/>
-            <a:ext cx="6522415" cy="4663440"/>
-          </a:xfrm>
-          <a:prstGeom prst="rect">
-            <a:avLst/>
-          </a:prstGeom>
-          <a:noFill/>
-          <a:ln/>
-        </p:spPr>
-        <p:txBody>
-          <a:bodyPr wrap="square" lIns="0" tIns="0" rIns="0" bIns="0" rtlCol="0" anchor="t"/>
-          <a:lstStyle/>
-          <a:p>
-            <a:pPr algn="l" indent="0" marL="0">
-              <a:spcAft>
-                <a:spcPts val="800"/>
-              </a:spcAft>
-              <a:buNone/>
-            </a:pPr>
-            <a:r>
-              <a:rPr lang="en-US" sz="4000" dirty="0">
-                <a:solidFill>
-                  <a:srgbClr val="111111"/>
-                </a:solidFill>
-                <a:latin typeface="Times New Roman" pitchFamily="34" charset="0"/>
-                <a:ea typeface="Times New Roman" pitchFamily="34" charset="-122"/>
-                <a:cs typeface="Times New Roman" pitchFamily="34" charset="-120"/>
-              </a:rPr>
-              <a:t>Why does the wind drop its sand behind a wall?</a:t>
-            </a:r>
-            <a:endParaRPr lang="en-US" sz="4000" dirty="0"/>
+              <a:t>Illustration: how a dune moves</a:t>
+            </a:r>
+            <a:endParaRPr lang="en-US" sz="1800" dirty="0"/>
           </a:p>
         </p:txBody>
       </p:sp>
@@ -13195,7 +13284,7 @@
                 <a:ea typeface="Times New Roman" pitchFamily="34" charset="-122"/>
                 <a:cs typeface="Times New Roman" pitchFamily="34" charset="-120"/>
               </a:rPr>
-              <a:t>Expected Answer</a:t>
+              <a:t>Evaluation 1</a:t>
             </a:r>
             <a:endParaRPr lang="en-US" sz="3600" dirty="0"/>
           </a:p>
@@ -13237,7 +13326,7 @@
                 <a:ea typeface="Times New Roman" pitchFamily="34" charset="-122"/>
                 <a:cs typeface="Times New Roman" pitchFamily="34" charset="-120"/>
               </a:rPr>
-              <a:t>The wall slows the wind.</a:t>
+              <a:t>Why does the wind drop its sand behind a wall?</a:t>
             </a:r>
             <a:endParaRPr lang="en-US" sz="4000" dirty="0"/>
           </a:p>
@@ -13414,7 +13503,7 @@
                 <a:ea typeface="Times New Roman" pitchFamily="34" charset="-122"/>
                 <a:cs typeface="Times New Roman" pitchFamily="34" charset="-120"/>
               </a:rPr>
-              <a:t>Evaluation 2</a:t>
+              <a:t>Expected Answer</a:t>
             </a:r>
             <a:endParaRPr lang="en-US" sz="3600" dirty="0"/>
           </a:p>
@@ -13456,7 +13545,7 @@
                 <a:ea typeface="Times New Roman" pitchFamily="34" charset="-122"/>
                 <a:cs typeface="Times New Roman" pitchFamily="34" charset="-120"/>
               </a:rPr>
-              <a:t>What is a barchan?</a:t>
+              <a:t>The wall slows the wind.</a:t>
             </a:r>
             <a:endParaRPr lang="en-US" sz="4000" dirty="0"/>
           </a:p>
@@ -13633,7 +13722,7 @@
                 <a:ea typeface="Times New Roman" pitchFamily="34" charset="-122"/>
                 <a:cs typeface="Times New Roman" pitchFamily="34" charset="-120"/>
               </a:rPr>
-              <a:t>Expected Answer</a:t>
+              <a:t>Evaluation 2</a:t>
             </a:r>
             <a:endParaRPr lang="en-US" sz="3600" dirty="0"/>
           </a:p>
@@ -13675,7 +13764,7 @@
                 <a:ea typeface="Times New Roman" pitchFamily="34" charset="-122"/>
                 <a:cs typeface="Times New Roman" pitchFamily="34" charset="-120"/>
               </a:rPr>
-              <a:t>A dune shaped like a crescent.</a:t>
+              <a:t>What is a barchan?</a:t>
             </a:r>
             <a:endParaRPr lang="en-US" sz="4000" dirty="0"/>
           </a:p>
@@ -13787,7 +13876,7 @@
                 <a:ea typeface="Calibri" pitchFamily="34" charset="-122"/>
                 <a:cs typeface="Calibri" pitchFamily="34" charset="-120"/>
               </a:rPr>
-              <a:t>REMEDIATION</a:t>
+              <a:t>FORMATIVE EVALUATION</a:t>
             </a:r>
             <a:endParaRPr lang="en-US" sz="1400" dirty="0"/>
           </a:p>
@@ -13810,7 +13899,7 @@
         <p:spPr>
           <a:xfrm>
             <a:off x="0" y="658368"/>
-            <a:ext cx="2468880" cy="5833872"/>
+            <a:ext cx="5120640" cy="5833872"/>
           </a:xfrm>
           <a:prstGeom prst="rect">
             <a:avLst/>
@@ -13825,8 +13914,8 @@
         </p:nvSpPr>
         <p:spPr>
           <a:xfrm>
-            <a:off x="2697480" y="1005840"/>
-            <a:ext cx="9174175" cy="731520"/>
+            <a:off x="5349240" y="1005840"/>
+            <a:ext cx="6522415" cy="731520"/>
           </a:xfrm>
           <a:prstGeom prst="rect">
             <a:avLst/>
@@ -13852,7 +13941,7 @@
                 <a:ea typeface="Times New Roman" pitchFamily="34" charset="-122"/>
                 <a:cs typeface="Times New Roman" pitchFamily="34" charset="-120"/>
               </a:rPr>
-              <a:t>Remediation</a:t>
+              <a:t>Expected Answer</a:t>
             </a:r>
             <a:endParaRPr lang="en-US" sz="3600" dirty="0"/>
           </a:p>
@@ -13866,8 +13955,8 @@
         </p:nvSpPr>
         <p:spPr>
           <a:xfrm>
-            <a:off x="2697480" y="1783080"/>
-            <a:ext cx="9174175" cy="4663440"/>
+            <a:off x="5349240" y="1783080"/>
+            <a:ext cx="6522415" cy="4663440"/>
           </a:xfrm>
           <a:prstGeom prst="rect">
             <a:avLst/>
@@ -13886,7 +13975,7 @@
               <a:buNone/>
             </a:pPr>
             <a:r>
-              <a:rPr lang="en-US" sz="4000" b="1" dirty="0">
+              <a:rPr lang="en-US" sz="4000" dirty="0">
                 <a:solidFill>
                   <a:srgbClr val="111111"/>
                 </a:solidFill>
@@ -13894,73 +13983,7 @@
                 <a:ea typeface="Times New Roman" pitchFamily="34" charset="-122"/>
                 <a:cs typeface="Times New Roman" pitchFamily="34" charset="-120"/>
               </a:rPr>
-              <a:t>Fill in the blanks:</a:t>
-            </a:r>
-            <a:endParaRPr lang="en-US" sz="4000" dirty="0"/>
-          </a:p>
-          <a:p>
-            <a:pPr algn="l" marL="342900" indent="-342900">
-              <a:spcAft>
-                <a:spcPts val="800"/>
-              </a:spcAft>
-              <a:buSzPct val="100000"/>
-              <a:buFont typeface="+mj-lt"/>
-              <a:buAutoNum type="arabicPeriod" startAt="1"/>
-            </a:pPr>
-            <a:r>
-              <a:rPr lang="en-US" sz="4000" dirty="0">
-                <a:solidFill>
-                  <a:srgbClr val="111111"/>
-                </a:solidFill>
-                <a:latin typeface="Times New Roman" pitchFamily="34" charset="0"/>
-                <a:ea typeface="Times New Roman" pitchFamily="34" charset="-122"/>
-                <a:cs typeface="Times New Roman" pitchFamily="34" charset="-120"/>
-              </a:rPr>
-              <a:t>A hill of sand made by the wind is a sand ______.</a:t>
-            </a:r>
-            <a:endParaRPr lang="en-US" sz="4000" dirty="0"/>
-          </a:p>
-          <a:p>
-            <a:pPr algn="l" marL="342900" indent="-342900">
-              <a:spcAft>
-                <a:spcPts val="800"/>
-              </a:spcAft>
-              <a:buSzPct val="100000"/>
-              <a:buFont typeface="+mj-lt"/>
-              <a:buAutoNum type="arabicPeriod" startAt="1"/>
-            </a:pPr>
-            <a:r>
-              <a:rPr lang="en-US" sz="4000" dirty="0">
-                <a:solidFill>
-                  <a:srgbClr val="111111"/>
-                </a:solidFill>
-                <a:latin typeface="Times New Roman" pitchFamily="34" charset="0"/>
-                <a:ea typeface="Times New Roman" pitchFamily="34" charset="-122"/>
-                <a:cs typeface="Times New Roman" pitchFamily="34" charset="-120"/>
-              </a:rPr>
-              <a:t>A crescent-shaped dune is a ______.</a:t>
-            </a:r>
-            <a:endParaRPr lang="en-US" sz="4000" dirty="0"/>
-          </a:p>
-          <a:p>
-            <a:pPr algn="l" marL="342900" indent="-342900">
-              <a:spcAft>
-                <a:spcPts val="800"/>
-              </a:spcAft>
-              <a:buSzPct val="100000"/>
-              <a:buFont typeface="+mj-lt"/>
-              <a:buAutoNum type="arabicPeriod" startAt="1"/>
-            </a:pPr>
-            <a:r>
-              <a:rPr lang="en-US" sz="4000" dirty="0">
-                <a:solidFill>
-                  <a:srgbClr val="111111"/>
-                </a:solidFill>
-                <a:latin typeface="Times New Roman" pitchFamily="34" charset="0"/>
-                <a:ea typeface="Times New Roman" pitchFamily="34" charset="-122"/>
-                <a:cs typeface="Times New Roman" pitchFamily="34" charset="-120"/>
-              </a:rPr>
-              <a:t>Long, straight dunes are ______ dunes.</a:t>
+              <a:t>A dune shaped like a crescent.</a:t>
             </a:r>
             <a:endParaRPr lang="en-US" sz="4000" dirty="0"/>
           </a:p>
@@ -14072,7 +14095,7 @@
                 <a:ea typeface="Calibri" pitchFamily="34" charset="-122"/>
                 <a:cs typeface="Calibri" pitchFamily="34" charset="-120"/>
               </a:rPr>
-              <a:t>HOMEWORK</a:t>
+              <a:t>REMEDIATION</a:t>
             </a:r>
             <a:endParaRPr lang="en-US" sz="1400" dirty="0"/>
           </a:p>
@@ -14095,7 +14118,7 @@
         <p:spPr>
           <a:xfrm>
             <a:off x="0" y="658368"/>
-            <a:ext cx="5120640" cy="5833872"/>
+            <a:ext cx="2468880" cy="5833872"/>
           </a:xfrm>
           <a:prstGeom prst="rect">
             <a:avLst/>
@@ -14110,8 +14133,8 @@
         </p:nvSpPr>
         <p:spPr>
           <a:xfrm>
-            <a:off x="5349240" y="1005840"/>
-            <a:ext cx="6522415" cy="731520"/>
+            <a:off x="2697480" y="1005840"/>
+            <a:ext cx="9174175" cy="731520"/>
           </a:xfrm>
           <a:prstGeom prst="rect">
             <a:avLst/>
@@ -14137,7 +14160,7 @@
                 <a:ea typeface="Times New Roman" pitchFamily="34" charset="-122"/>
                 <a:cs typeface="Times New Roman" pitchFamily="34" charset="-120"/>
               </a:rPr>
-              <a:t>Homework</a:t>
+              <a:t>Remediation</a:t>
             </a:r>
             <a:endParaRPr lang="en-US" sz="3600" dirty="0"/>
           </a:p>
@@ -14151,8 +14174,8 @@
         </p:nvSpPr>
         <p:spPr>
           <a:xfrm>
-            <a:off x="5349240" y="1783080"/>
-            <a:ext cx="6522415" cy="4663440"/>
+            <a:off x="2697480" y="1783080"/>
+            <a:ext cx="9174175" cy="4663440"/>
           </a:xfrm>
           <a:prstGeom prst="rect">
             <a:avLst/>
@@ -14171,7 +14194,7 @@
               <a:buNone/>
             </a:pPr>
             <a:r>
-              <a:rPr lang="en-US" sz="4000" dirty="0">
+              <a:rPr lang="en-US" sz="4000" b="1" dirty="0">
                 <a:solidFill>
                   <a:srgbClr val="111111"/>
                 </a:solidFill>
@@ -14179,7 +14202,73 @@
                 <a:ea typeface="Times New Roman" pitchFamily="34" charset="-122"/>
                 <a:cs typeface="Times New Roman" pitchFamily="34" charset="-120"/>
               </a:rPr>
-              <a:t>Ask an elder in your family how people in your area cope with the heat, the dust and the shortage of water during the dry season. Write down two ways.</a:t>
+              <a:t>Fill in the blanks:</a:t>
+            </a:r>
+            <a:endParaRPr lang="en-US" sz="4000" dirty="0"/>
+          </a:p>
+          <a:p>
+            <a:pPr algn="l" marL="342900" indent="-342900">
+              <a:spcAft>
+                <a:spcPts val="800"/>
+              </a:spcAft>
+              <a:buSzPct val="100000"/>
+              <a:buFont typeface="+mj-lt"/>
+              <a:buAutoNum type="arabicPeriod" startAt="1"/>
+            </a:pPr>
+            <a:r>
+              <a:rPr lang="en-US" sz="4000" dirty="0">
+                <a:solidFill>
+                  <a:srgbClr val="111111"/>
+                </a:solidFill>
+                <a:latin typeface="Times New Roman" pitchFamily="34" charset="0"/>
+                <a:ea typeface="Times New Roman" pitchFamily="34" charset="-122"/>
+                <a:cs typeface="Times New Roman" pitchFamily="34" charset="-120"/>
+              </a:rPr>
+              <a:t>A hill of sand made by the wind is a sand ______.</a:t>
+            </a:r>
+            <a:endParaRPr lang="en-US" sz="4000" dirty="0"/>
+          </a:p>
+          <a:p>
+            <a:pPr algn="l" marL="342900" indent="-342900">
+              <a:spcAft>
+                <a:spcPts val="800"/>
+              </a:spcAft>
+              <a:buSzPct val="100000"/>
+              <a:buFont typeface="+mj-lt"/>
+              <a:buAutoNum type="arabicPeriod" startAt="1"/>
+            </a:pPr>
+            <a:r>
+              <a:rPr lang="en-US" sz="4000" dirty="0">
+                <a:solidFill>
+                  <a:srgbClr val="111111"/>
+                </a:solidFill>
+                <a:latin typeface="Times New Roman" pitchFamily="34" charset="0"/>
+                <a:ea typeface="Times New Roman" pitchFamily="34" charset="-122"/>
+                <a:cs typeface="Times New Roman" pitchFamily="34" charset="-120"/>
+              </a:rPr>
+              <a:t>A crescent-shaped dune is a ______.</a:t>
+            </a:r>
+            <a:endParaRPr lang="en-US" sz="4000" dirty="0"/>
+          </a:p>
+          <a:p>
+            <a:pPr algn="l" marL="342900" indent="-342900">
+              <a:spcAft>
+                <a:spcPts val="800"/>
+              </a:spcAft>
+              <a:buSzPct val="100000"/>
+              <a:buFont typeface="+mj-lt"/>
+              <a:buAutoNum type="arabicPeriod" startAt="1"/>
+            </a:pPr>
+            <a:r>
+              <a:rPr lang="en-US" sz="4000" dirty="0">
+                <a:solidFill>
+                  <a:srgbClr val="111111"/>
+                </a:solidFill>
+                <a:latin typeface="Times New Roman" pitchFamily="34" charset="0"/>
+                <a:ea typeface="Times New Roman" pitchFamily="34" charset="-122"/>
+                <a:cs typeface="Times New Roman" pitchFamily="34" charset="-120"/>
+              </a:rPr>
+              <a:t>Long, straight dunes are ______ dunes.</a:t>
             </a:r>
             <a:endParaRPr lang="en-US" sz="4000" dirty="0"/>
           </a:p>
@@ -14530,7 +14619,7 @@
                 <a:ea typeface="Calibri" pitchFamily="34" charset="-122"/>
                 <a:cs typeface="Calibri" pitchFamily="34" charset="-120"/>
               </a:rPr>
-              <a:t>NEXT LESSON</a:t>
+              <a:t>HOMEWORK</a:t>
             </a:r>
             <a:endParaRPr lang="en-US" sz="1400" dirty="0"/>
           </a:p>
@@ -14595,7 +14684,7 @@
                 <a:ea typeface="Times New Roman" pitchFamily="34" charset="-122"/>
                 <a:cs typeface="Times New Roman" pitchFamily="34" charset="-120"/>
               </a:rPr>
-              <a:t>Next Lesson</a:t>
+              <a:t>Homework</a:t>
             </a:r>
             <a:endParaRPr lang="en-US" sz="3600" dirty="0"/>
           </a:p>
@@ -14619,17 +14708,17 @@
           <a:ln/>
         </p:spPr>
         <p:txBody>
-          <a:bodyPr wrap="square" lIns="0" tIns="0" rIns="0" bIns="0" rtlCol="0" anchor="ctr"/>
-          <a:lstStyle/>
-          <a:p>
-            <a:pPr algn="ctr" indent="0" marL="0">
+          <a:bodyPr wrap="square" lIns="0" tIns="0" rIns="0" bIns="0" rtlCol="0" anchor="t"/>
+          <a:lstStyle/>
+          <a:p>
+            <a:pPr algn="l" indent="0" marL="0">
               <a:spcAft>
                 <a:spcPts val="800"/>
               </a:spcAft>
               <a:buNone/>
             </a:pPr>
             <a:r>
-              <a:rPr lang="en-US" sz="4000" b="1" dirty="0">
+              <a:rPr lang="en-US" sz="4000" dirty="0">
                 <a:solidFill>
                   <a:srgbClr val="111111"/>
                 </a:solidFill>
@@ -14637,27 +14726,7 @@
                 <a:ea typeface="Times New Roman" pitchFamily="34" charset="-122"/>
                 <a:cs typeface="Times New Roman" pitchFamily="34" charset="-120"/>
               </a:rPr>
-              <a:t>Our next lesson will be on:</a:t>
-            </a:r>
-            <a:endParaRPr lang="en-US" sz="4000" dirty="0"/>
-          </a:p>
-          <a:p>
-            <a:pPr algn="ctr" indent="0" marL="0">
-              <a:spcAft>
-                <a:spcPts val="800"/>
-              </a:spcAft>
-              <a:buNone/>
-            </a:pPr>
-            <a:r>
-              <a:rPr lang="en-US" sz="4000" b="1" dirty="0">
-                <a:solidFill>
-                  <a:srgbClr val="990011"/>
-                </a:solidFill>
-                <a:latin typeface="Times New Roman" pitchFamily="34" charset="0"/>
-                <a:ea typeface="Times New Roman" pitchFamily="34" charset="-122"/>
-                <a:cs typeface="Times New Roman" pitchFamily="34" charset="-120"/>
-              </a:rPr>
-              <a:t>Lesson 29: Man in the Hot Desert Environments</a:t>
+              <a:t>Ask an elder in your family how people in your area cope with the heat, the dust and the shortage of water during the dry season. Write down two ways.</a:t>
             </a:r>
             <a:endParaRPr lang="en-US" sz="4000" dirty="0"/>
           </a:p>
@@ -14769,6 +14838,245 @@
                 <a:ea typeface="Calibri" pitchFamily="34" charset="-122"/>
                 <a:cs typeface="Calibri" pitchFamily="34" charset="-120"/>
               </a:rPr>
+              <a:t>NEXT LESSON</a:t>
+            </a:r>
+            <a:endParaRPr lang="en-US" sz="1400" dirty="0"/>
+          </a:p>
+        </p:txBody>
+      </p:sp>
+      <p:pic>
+        <p:nvPicPr>
+          <p:cNvPr id="3" name="Image 0" descr="/home/claude/f4/img/minesec_sheet.png">    </p:cNvPr>
+          <p:cNvPicPr>
+            <a:picLocks noChangeAspect="1"/>
+          </p:cNvPicPr>
+          <p:nvPr/>
+        </p:nvPicPr>
+        <p:blipFill>
+          <a:blip r:embed="rId1"/>
+          <a:stretch>
+            <a:fillRect/>
+          </a:stretch>
+        </p:blipFill>
+        <p:spPr>
+          <a:xfrm>
+            <a:off x="0" y="658368"/>
+            <a:ext cx="5120640" cy="5833872"/>
+          </a:xfrm>
+          <a:prstGeom prst="rect">
+            <a:avLst/>
+          </a:prstGeom>
+        </p:spPr>
+      </p:pic>
+      <p:sp>
+        <p:nvSpPr>
+          <p:cNvPr id="4" name="Text 1"/>
+          <p:cNvSpPr/>
+          <p:nvPr/>
+        </p:nvSpPr>
+        <p:spPr>
+          <a:xfrm>
+            <a:off x="5349240" y="1005840"/>
+            <a:ext cx="6522415" cy="731520"/>
+          </a:xfrm>
+          <a:prstGeom prst="rect">
+            <a:avLst/>
+          </a:prstGeom>
+          <a:noFill/>
+          <a:ln/>
+        </p:spPr>
+        <p:txBody>
+          <a:bodyPr wrap="square" lIns="0" tIns="0" rIns="0" bIns="0" rtlCol="0" anchor="ctr">
+            <a:normAutofit/>
+          </a:bodyPr>
+          <a:lstStyle/>
+          <a:p>
+            <a:pPr algn="ctr" indent="0" marL="0">
+              <a:buNone/>
+            </a:pPr>
+            <a:r>
+              <a:rPr lang="en-US" sz="3600" b="1" dirty="0">
+                <a:solidFill>
+                  <a:srgbClr val="990011"/>
+                </a:solidFill>
+                <a:latin typeface="Times New Roman" pitchFamily="34" charset="0"/>
+                <a:ea typeface="Times New Roman" pitchFamily="34" charset="-122"/>
+                <a:cs typeface="Times New Roman" pitchFamily="34" charset="-120"/>
+              </a:rPr>
+              <a:t>Next Lesson</a:t>
+            </a:r>
+            <a:endParaRPr lang="en-US" sz="3600" dirty="0"/>
+          </a:p>
+        </p:txBody>
+      </p:sp>
+      <p:sp>
+        <p:nvSpPr>
+          <p:cNvPr id="5" name="Text 2"/>
+          <p:cNvSpPr/>
+          <p:nvPr/>
+        </p:nvSpPr>
+        <p:spPr>
+          <a:xfrm>
+            <a:off x="5349240" y="1783080"/>
+            <a:ext cx="6522415" cy="4663440"/>
+          </a:xfrm>
+          <a:prstGeom prst="rect">
+            <a:avLst/>
+          </a:prstGeom>
+          <a:noFill/>
+          <a:ln/>
+        </p:spPr>
+        <p:txBody>
+          <a:bodyPr wrap="square" lIns="0" tIns="0" rIns="0" bIns="0" rtlCol="0" anchor="ctr"/>
+          <a:lstStyle/>
+          <a:p>
+            <a:pPr algn="ctr" indent="0" marL="0">
+              <a:spcAft>
+                <a:spcPts val="800"/>
+              </a:spcAft>
+              <a:buNone/>
+            </a:pPr>
+            <a:r>
+              <a:rPr lang="en-US" sz="4000" b="1" dirty="0">
+                <a:solidFill>
+                  <a:srgbClr val="111111"/>
+                </a:solidFill>
+                <a:latin typeface="Times New Roman" pitchFamily="34" charset="0"/>
+                <a:ea typeface="Times New Roman" pitchFamily="34" charset="-122"/>
+                <a:cs typeface="Times New Roman" pitchFamily="34" charset="-120"/>
+              </a:rPr>
+              <a:t>Our next lesson will be on:</a:t>
+            </a:r>
+            <a:endParaRPr lang="en-US" sz="4000" dirty="0"/>
+          </a:p>
+          <a:p>
+            <a:pPr algn="ctr" indent="0" marL="0">
+              <a:spcAft>
+                <a:spcPts val="800"/>
+              </a:spcAft>
+              <a:buNone/>
+            </a:pPr>
+            <a:r>
+              <a:rPr lang="en-US" sz="4000" b="1" dirty="0">
+                <a:solidFill>
+                  <a:srgbClr val="990011"/>
+                </a:solidFill>
+                <a:latin typeface="Times New Roman" pitchFamily="34" charset="0"/>
+                <a:ea typeface="Times New Roman" pitchFamily="34" charset="-122"/>
+                <a:cs typeface="Times New Roman" pitchFamily="34" charset="-120"/>
+              </a:rPr>
+              <a:t>Lesson 29: Man in the Hot Desert Environments</a:t>
+            </a:r>
+            <a:endParaRPr lang="en-US" sz="4000" dirty="0"/>
+          </a:p>
+        </p:txBody>
+      </p:sp>
+      <p:sp>
+        <p:nvSpPr>
+          <p:cNvPr id="25" name="Slide Number Placeholder 0"/>
+          <p:cNvSpPr>
+            <a:spLocks noGrp="1"/>
+          </p:cNvSpPr>
+          <p:nvPr>
+            <p:ph type="sldNum" sz="quarter" idx="4294967295"/>
+          </p:nvPr>
+        </p:nvSpPr>
+        <p:spPr>
+          <a:xfrm>
+            <a:off x="27432" y="91440"/>
+            <a:ext cx="585216" cy="475488"/>
+          </a:xfrm>
+          <a:prstGeom prst="rect">
+            <a:avLst/>
+          </a:prstGeom>
+          <a:extLst>
+            <a:ext uri="{C572A759-6A51-4108-AA02-DFA0A04FC94B}">
+              <ma14:wrappingTextBoxFlag xmlns:ma14="http://schemas.microsoft.com/office/mac/drawingml/2011/main" val="0"/>
+            </a:ext>
+          </a:extLst>
+        </p:spPr>
+        <p:txBody>
+          <a:bodyPr/>
+          <a:lstStyle>
+            <a:lvl1pPr>
+              <a:defRPr sz="2000">
+                <a:solidFill>
+                  <a:srgbClr val="FFFFFF"/>
+                </a:solidFill>
+                <a:latin typeface="Calibri"/>
+                <a:ea typeface="Calibri"/>
+                <a:cs typeface="Calibri"/>
+              </a:defRPr>
+            </a:lvl1pPr>
+          </a:lstStyle>
+          <a:p>
+            <a:pPr algn="ctr"/>
+            <a:fld id="{F7021451-1387-4CA6-816F-3879F97B5CBC}" type="slidenum">
+              <a:rPr b="1" lang="en-US"/>
+              <a:t>41</a:t>
+            </a:fld>
+            <a:endParaRPr lang="en-US"/>
+          </a:p>
+        </p:txBody>
+      </p:sp>
+    </p:spTree>
+  </p:cSld>
+  <p:clrMapOvr>
+    <a:masterClrMapping/>
+  </p:clrMapOvr>
+</p:sld>
+</file>
+
+<file path=ppt/slides/slide42.xml><?xml version="1.0" encoding="utf-8"?>
+<p:sld xmlns:a="http://schemas.openxmlformats.org/drawingml/2006/main" xmlns:r="http://schemas.openxmlformats.org/officeDocument/2006/relationships" xmlns:p="http://schemas.openxmlformats.org/presentationml/2006/main">
+  <p:cSld name="Slide 42">
+    <p:spTree>
+      <p:nvGrpSpPr>
+        <p:cNvPr id="1" name=""/>
+        <p:cNvGrpSpPr/>
+        <p:nvPr/>
+      </p:nvGrpSpPr>
+      <p:grpSpPr>
+        <a:xfrm>
+          <a:off x="0" y="0"/>
+          <a:ext cx="0" cy="0"/>
+          <a:chOff x="0" y="0"/>
+          <a:chExt cx="0" cy="0"/>
+        </a:xfrm>
+      </p:grpSpPr>
+      <p:sp>
+        <p:nvSpPr>
+          <p:cNvPr id="2" name="Text 0"/>
+          <p:cNvSpPr/>
+          <p:nvPr/>
+        </p:nvSpPr>
+        <p:spPr>
+          <a:xfrm>
+            <a:off x="457200" y="713232"/>
+            <a:ext cx="11368735" cy="274320"/>
+          </a:xfrm>
+          <a:prstGeom prst="rect">
+            <a:avLst/>
+          </a:prstGeom>
+          <a:noFill/>
+          <a:ln/>
+        </p:spPr>
+        <p:txBody>
+          <a:bodyPr wrap="square" lIns="0" tIns="0" rIns="0" bIns="0" rtlCol="0" anchor="ctr"/>
+          <a:lstStyle/>
+          <a:p>
+            <a:pPr algn="r" indent="0" marL="0">
+              <a:buNone/>
+            </a:pPr>
+            <a:r>
+              <a:rPr lang="en-US" sz="1400" b="1" dirty="0">
+                <a:solidFill>
+                  <a:srgbClr val="1C3F6E"/>
+                </a:solidFill>
+                <a:latin typeface="Calibri" pitchFamily="34" charset="0"/>
+                <a:ea typeface="Calibri" pitchFamily="34" charset="-122"/>
+                <a:cs typeface="Calibri" pitchFamily="34" charset="-120"/>
+              </a:rPr>
               <a:t>BILINGUAL GAME</a:t>
             </a:r>
             <a:endParaRPr lang="en-US" sz="1400" dirty="0"/>
@@ -14816,7 +15124,7 @@
       </p:sp>
       <p:graphicFrame>
         <p:nvGraphicFramePr>
-          <p:cNvPr id="42" name="Table 0"/>
+          <p:cNvPr id="43" name="Table 0"/>
           <p:cNvGraphicFramePr>
             <a:graphicFrameLocks noGrp="1"/>
           </p:cNvGraphicFramePr>
@@ -16128,7 +16436,7 @@
             <a:pPr algn="ctr"/>
             <a:fld id="{F7021451-1387-4CA6-816F-3879F97B5CBC}" type="slidenum">
               <a:rPr b="1" lang="en-US"/>
-              <a:t>41</a:t>
+              <a:t>42</a:t>
             </a:fld>
             <a:endParaRPr lang="en-US"/>
           </a:p>
@@ -16142,9 +16450,9 @@
 </p:sld>
 </file>
 
-<file path=ppt/slides/slide42.xml><?xml version="1.0" encoding="utf-8"?>
+<file path=ppt/slides/slide43.xml><?xml version="1.0" encoding="utf-8"?>
 <p:sld xmlns:a="http://schemas.openxmlformats.org/drawingml/2006/main" xmlns:r="http://schemas.openxmlformats.org/officeDocument/2006/relationships" xmlns:p="http://schemas.openxmlformats.org/presentationml/2006/main">
-  <p:cSld name="Slide 42">
+  <p:cSld name="Slide 43">
     <p:spTree>
       <p:nvGrpSpPr>
         <p:cNvPr id="1" name=""/>
@@ -16239,7 +16547,7 @@
       </p:sp>
       <p:graphicFrame>
         <p:nvGraphicFramePr>
-          <p:cNvPr id="43" name="Table 0"/>
+          <p:cNvPr id="44" name="Table 0"/>
           <p:cNvGraphicFramePr>
             <a:graphicFrameLocks noGrp="1"/>
           </p:cNvGraphicFramePr>
@@ -16861,7 +17169,7 @@
             <a:pPr algn="ctr"/>
             <a:fld id="{F7021451-1387-4CA6-816F-3879F97B5CBC}" type="slidenum">
               <a:rPr b="1" lang="en-US"/>
-              <a:t>42</a:t>
+              <a:t>43</a:t>
             </a:fld>
             <a:endParaRPr lang="en-US"/>
           </a:p>
@@ -16875,9 +17183,9 @@
 </p:sld>
 </file>
 
-<file path=ppt/slides/slide43.xml><?xml version="1.0" encoding="utf-8"?>
+<file path=ppt/slides/slide44.xml><?xml version="1.0" encoding="utf-8"?>
 <p:sld xmlns:a="http://schemas.openxmlformats.org/drawingml/2006/main" xmlns:r="http://schemas.openxmlformats.org/officeDocument/2006/relationships" xmlns:p="http://schemas.openxmlformats.org/presentationml/2006/main">
-  <p:cSld name="Slide 43">
+  <p:cSld name="Slide 44">
     <p:spTree>
       <p:nvGrpSpPr>
         <p:cNvPr id="1" name=""/>
@@ -16972,7 +17280,7 @@
       </p:sp>
       <p:graphicFrame>
         <p:nvGraphicFramePr>
-          <p:cNvPr id="44" name="Table 0"/>
+          <p:cNvPr id="45" name="Table 0"/>
           <p:cNvGraphicFramePr>
             <a:graphicFrameLocks noGrp="1"/>
           </p:cNvGraphicFramePr>
@@ -17082,7 +17390,7 @@
                           <a:ea typeface="Calibri" pitchFamily="34" charset="-122"/>
                           <a:cs typeface="Calibri" pitchFamily="34" charset="-120"/>
                         </a:rPr>
-                        <a:t>Wind Deposition; Depositional Features.</a:t>
+                        <a:t>DEFINITIONS; Causes of Wind Deposition; Depositional Features.</a:t>
                       </a:r>
                       <a:endParaRPr lang="en-US" sz="1600" dirty="0">
                         <a:latin typeface="Calibri" charset="0"/>
@@ -17732,310 +18040,6 @@
             <a:pPr algn="ctr"/>
             <a:fld id="{F7021451-1387-4CA6-816F-3879F97B5CBC}" type="slidenum">
               <a:rPr b="1" lang="en-US"/>
-              <a:t>43</a:t>
-            </a:fld>
-            <a:endParaRPr lang="en-US"/>
-          </a:p>
-        </p:txBody>
-      </p:sp>
-    </p:spTree>
-  </p:cSld>
-  <p:clrMapOvr>
-    <a:masterClrMapping/>
-  </p:clrMapOvr>
-</p:sld>
-</file>
-
-<file path=ppt/slides/slide44.xml><?xml version="1.0" encoding="utf-8"?>
-<p:sld xmlns:a="http://schemas.openxmlformats.org/drawingml/2006/main" xmlns:r="http://schemas.openxmlformats.org/officeDocument/2006/relationships" xmlns:p="http://schemas.openxmlformats.org/presentationml/2006/main">
-  <p:cSld name="Slide 44">
-    <p:spTree>
-      <p:nvGrpSpPr>
-        <p:cNvPr id="1" name=""/>
-        <p:cNvGrpSpPr/>
-        <p:nvPr/>
-      </p:nvGrpSpPr>
-      <p:grpSpPr>
-        <a:xfrm>
-          <a:off x="0" y="0"/>
-          <a:ext cx="0" cy="0"/>
-          <a:chOff x="0" y="0"/>
-          <a:chExt cx="0" cy="0"/>
-        </a:xfrm>
-      </p:grpSpPr>
-      <p:sp>
-        <p:nvSpPr>
-          <p:cNvPr id="2" name="Text 0"/>
-          <p:cNvSpPr/>
-          <p:nvPr/>
-        </p:nvSpPr>
-        <p:spPr>
-          <a:xfrm>
-            <a:off x="457200" y="713232"/>
-            <a:ext cx="11368735" cy="274320"/>
-          </a:xfrm>
-          <a:prstGeom prst="rect">
-            <a:avLst/>
-          </a:prstGeom>
-          <a:noFill/>
-          <a:ln/>
-        </p:spPr>
-        <p:txBody>
-          <a:bodyPr wrap="square" lIns="0" tIns="0" rIns="0" bIns="0" rtlCol="0" anchor="ctr"/>
-          <a:lstStyle/>
-          <a:p>
-            <a:pPr algn="r" indent="0" marL="0">
-              <a:buNone/>
-            </a:pPr>
-            <a:r>
-              <a:rPr lang="en-US" sz="1400" b="1" dirty="0">
-                <a:solidFill>
-                  <a:srgbClr val="1C3F6E"/>
-                </a:solidFill>
-                <a:latin typeface="Calibri" pitchFamily="34" charset="0"/>
-                <a:ea typeface="Calibri" pitchFamily="34" charset="-122"/>
-                <a:cs typeface="Calibri" pitchFamily="34" charset="-120"/>
-              </a:rPr>
-              <a:t>TEACHER'S NOTE</a:t>
-            </a:r>
-            <a:endParaRPr lang="en-US" sz="1400" dirty="0"/>
-          </a:p>
-        </p:txBody>
-      </p:sp>
-      <p:pic>
-        <p:nvPicPr>
-          <p:cNvPr id="3" name="Image 0" descr="/home/claude/f4/img/minesec_sheet.png">    </p:cNvPr>
-          <p:cNvPicPr>
-            <a:picLocks noChangeAspect="1"/>
-          </p:cNvPicPr>
-          <p:nvPr/>
-        </p:nvPicPr>
-        <p:blipFill>
-          <a:blip r:embed="rId1"/>
-          <a:stretch>
-            <a:fillRect/>
-          </a:stretch>
-        </p:blipFill>
-        <p:spPr>
-          <a:xfrm>
-            <a:off x="0" y="658368"/>
-            <a:ext cx="5120640" cy="5833872"/>
-          </a:xfrm>
-          <a:prstGeom prst="rect">
-            <a:avLst/>
-          </a:prstGeom>
-        </p:spPr>
-      </p:pic>
-      <p:sp>
-        <p:nvSpPr>
-          <p:cNvPr id="4" name="Text 1"/>
-          <p:cNvSpPr/>
-          <p:nvPr/>
-        </p:nvSpPr>
-        <p:spPr>
-          <a:xfrm>
-            <a:off x="5349240" y="1005840"/>
-            <a:ext cx="6522415" cy="731520"/>
-          </a:xfrm>
-          <a:prstGeom prst="rect">
-            <a:avLst/>
-          </a:prstGeom>
-          <a:noFill/>
-          <a:ln/>
-        </p:spPr>
-        <p:txBody>
-          <a:bodyPr wrap="square" lIns="0" tIns="0" rIns="0" bIns="0" rtlCol="0" anchor="ctr">
-            <a:normAutofit/>
-          </a:bodyPr>
-          <a:lstStyle/>
-          <a:p>
-            <a:pPr algn="ctr" indent="0" marL="0">
-              <a:buNone/>
-            </a:pPr>
-            <a:r>
-              <a:rPr lang="en-US" sz="3600" b="1" dirty="0">
-                <a:solidFill>
-                  <a:srgbClr val="990011"/>
-                </a:solidFill>
-                <a:latin typeface="Times New Roman" pitchFamily="34" charset="0"/>
-                <a:ea typeface="Times New Roman" pitchFamily="34" charset="-122"/>
-                <a:cs typeface="Times New Roman" pitchFamily="34" charset="-120"/>
-              </a:rPr>
-              <a:t>Teacher's Note</a:t>
-            </a:r>
-            <a:endParaRPr lang="en-US" sz="3600" dirty="0"/>
-          </a:p>
-        </p:txBody>
-      </p:sp>
-      <p:sp>
-        <p:nvSpPr>
-          <p:cNvPr id="5" name="Text 2"/>
-          <p:cNvSpPr/>
-          <p:nvPr/>
-        </p:nvSpPr>
-        <p:spPr>
-          <a:xfrm>
-            <a:off x="5349240" y="1783080"/>
-            <a:ext cx="6522415" cy="4663440"/>
-          </a:xfrm>
-          <a:prstGeom prst="rect">
-            <a:avLst/>
-          </a:prstGeom>
-          <a:noFill/>
-          <a:ln/>
-        </p:spPr>
-        <p:txBody>
-          <a:bodyPr wrap="square" lIns="0" tIns="0" rIns="0" bIns="0" rtlCol="0" anchor="t"/>
-          <a:lstStyle/>
-          <a:p>
-            <a:pPr algn="l" marL="342900" indent="-342900">
-              <a:spcAft>
-                <a:spcPts val="800"/>
-              </a:spcAft>
-              <a:buSzPct val="100000"/>
-              <a:buChar char="•"/>
-            </a:pPr>
-            <a:r>
-              <a:rPr lang="en-US" sz="2000" dirty="0">
-                <a:solidFill>
-                  <a:srgbClr val="111111"/>
-                </a:solidFill>
-                <a:latin typeface="Calibri" pitchFamily="34" charset="0"/>
-                <a:ea typeface="Calibri" pitchFamily="34" charset="-122"/>
-                <a:cs typeface="Calibri" pitchFamily="34" charset="-120"/>
-              </a:rPr>
-              <a:t>Timing: Homework correction, plan, objectives 4 min | Recall, situation, action 6 min | 3 activities 12 min | Board summary (copying) 15 min | Evaluation, remediation 5 min | Homework, next lesson 3 min | Logbook 5 min</a:t>
-            </a:r>
-            <a:endParaRPr lang="en-US" sz="2000" dirty="0"/>
-          </a:p>
-          <a:p>
-            <a:pPr algn="l" marL="342900" indent="-342900">
-              <a:spcAft>
-                <a:spcPts val="800"/>
-              </a:spcAft>
-              <a:buSzPct val="100000"/>
-              <a:buChar char="•"/>
-            </a:pPr>
-            <a:r>
-              <a:rPr lang="en-US" sz="2000" dirty="0">
-                <a:solidFill>
-                  <a:srgbClr val="111111"/>
-                </a:solidFill>
-                <a:latin typeface="Calibri" pitchFamily="34" charset="0"/>
-                <a:ea typeface="Calibri" pitchFamily="34" charset="-122"/>
-                <a:cs typeface="Calibri" pitchFamily="34" charset="-120"/>
-              </a:rPr>
-              <a:t>Activity 1 is an animation (GIF): it plays automatically in slide-show mode.</a:t>
-            </a:r>
-            <a:endParaRPr lang="en-US" sz="2000" dirty="0"/>
-          </a:p>
-          <a:p>
-            <a:pPr algn="l" marL="342900" indent="-342900">
-              <a:spcAft>
-                <a:spcPts val="800"/>
-              </a:spcAft>
-              <a:buSzPct val="100000"/>
-              <a:buChar char="•"/>
-            </a:pPr>
-            <a:r>
-              <a:rPr lang="en-US" sz="2000" dirty="0">
-                <a:solidFill>
-                  <a:srgbClr val="111111"/>
-                </a:solidFill>
-                <a:latin typeface="Calibri" pitchFamily="34" charset="0"/>
-                <a:ea typeface="Calibri" pitchFamily="34" charset="-122"/>
-                <a:cs typeface="Calibri" pitchFamily="34" charset="-120"/>
-              </a:rPr>
-              <a:t>Without the projector (Activity 1): draw a dune: a gentle slope and a steep slope.</a:t>
-            </a:r>
-            <a:endParaRPr lang="en-US" sz="2000" dirty="0"/>
-          </a:p>
-          <a:p>
-            <a:pPr algn="l" marL="342900" indent="-342900">
-              <a:spcAft>
-                <a:spcPts val="800"/>
-              </a:spcAft>
-              <a:buSzPct val="100000"/>
-              <a:buChar char="•"/>
-            </a:pPr>
-            <a:r>
-              <a:rPr lang="en-US" sz="2000" dirty="0">
-                <a:solidFill>
-                  <a:srgbClr val="111111"/>
-                </a:solidFill>
-                <a:latin typeface="Calibri" pitchFamily="34" charset="0"/>
-                <a:ea typeface="Calibri" pitchFamily="34" charset="-122"/>
-                <a:cs typeface="Calibri" pitchFamily="34" charset="-120"/>
-              </a:rPr>
-              <a:t>Without the projector (Activity 2): draw a crescent with two horns.</a:t>
-            </a:r>
-            <a:endParaRPr lang="en-US" sz="2000" dirty="0"/>
-          </a:p>
-          <a:p>
-            <a:pPr algn="l" marL="342900" indent="-342900">
-              <a:spcAft>
-                <a:spcPts val="800"/>
-              </a:spcAft>
-              <a:buSzPct val="100000"/>
-              <a:buChar char="•"/>
-            </a:pPr>
-            <a:r>
-              <a:rPr lang="en-US" sz="2000" dirty="0">
-                <a:solidFill>
-                  <a:srgbClr val="111111"/>
-                </a:solidFill>
-                <a:latin typeface="Calibri" pitchFamily="34" charset="0"/>
-                <a:ea typeface="Calibri" pitchFamily="34" charset="-122"/>
-                <a:cs typeface="Calibri" pitchFamily="34" charset="-120"/>
-              </a:rPr>
-              <a:t>Without the projector (Activity 3): draw long parallel lines of sand.</a:t>
-            </a:r>
-            <a:endParaRPr lang="en-US" sz="2000" dirty="0"/>
-          </a:p>
-        </p:txBody>
-      </p:sp>
-      <p:sp>
-        <p:nvSpPr>
-          <p:cNvPr id="25" name="Slide Number Placeholder 0"/>
-          <p:cNvSpPr>
-            <a:spLocks noGrp="1"/>
-          </p:cNvSpPr>
-          <p:nvPr>
-            <p:ph type="sldNum" sz="quarter" idx="4294967295"/>
-          </p:nvPr>
-        </p:nvSpPr>
-        <p:spPr>
-          <a:xfrm>
-            <a:off x="27432" y="91440"/>
-            <a:ext cx="585216" cy="475488"/>
-          </a:xfrm>
-          <a:prstGeom prst="rect">
-            <a:avLst/>
-          </a:prstGeom>
-          <a:extLst>
-            <a:ext uri="{C572A759-6A51-4108-AA02-DFA0A04FC94B}">
-              <ma14:wrappingTextBoxFlag xmlns:ma14="http://schemas.microsoft.com/office/mac/drawingml/2011/main" val="0"/>
-            </a:ext>
-          </a:extLst>
-        </p:spPr>
-        <p:txBody>
-          <a:bodyPr/>
-          <a:lstStyle>
-            <a:lvl1pPr>
-              <a:defRPr sz="2000">
-                <a:solidFill>
-                  <a:srgbClr val="FFFFFF"/>
-                </a:solidFill>
-                <a:latin typeface="Calibri"/>
-                <a:ea typeface="Calibri"/>
-                <a:cs typeface="Calibri"/>
-              </a:defRPr>
-            </a:lvl1pPr>
-          </a:lstStyle>
-          <a:p>
-            <a:pPr algn="ctr"/>
-            <a:fld id="{F7021451-1387-4CA6-816F-3879F97B5CBC}" type="slidenum">
-              <a:rPr b="1" lang="en-US"/>
               <a:t>44</a:t>
             </a:fld>
             <a:endParaRPr lang="en-US"/>
@@ -18100,7 +18104,7 @@
                 <a:ea typeface="Calibri" pitchFamily="34" charset="-122"/>
                 <a:cs typeface="Calibri" pitchFamily="34" charset="-120"/>
               </a:rPr>
-              <a:t>REFERENCES</a:t>
+              <a:t>TEACHER'S NOTE</a:t>
             </a:r>
             <a:endParaRPr lang="en-US" sz="1400" dirty="0"/>
           </a:p>
@@ -18165,7 +18169,7 @@
                 <a:ea typeface="Times New Roman" pitchFamily="34" charset="-122"/>
                 <a:cs typeface="Times New Roman" pitchFamily="34" charset="-120"/>
               </a:rPr>
-              <a:t>References</a:t>
+              <a:t>Teacher's Note</a:t>
             </a:r>
             <a:endParaRPr lang="en-US" sz="3600" dirty="0"/>
           </a:p>
@@ -18200,7 +18204,7 @@
               <a:buChar char="•"/>
             </a:pPr>
             <a:r>
-              <a:rPr lang="en-US" sz="1800" dirty="0">
+              <a:rPr lang="en-US" sz="2000" dirty="0">
                 <a:solidFill>
                   <a:srgbClr val="111111"/>
                 </a:solidFill>
@@ -18208,9 +18212,9 @@
                 <a:ea typeface="Calibri" pitchFamily="34" charset="-122"/>
                 <a:cs typeface="Calibri" pitchFamily="34" charset="-120"/>
               </a:rPr>
-              <a:t>National Geography Syllabus (MINESEC), Form 4 — Denudation processes, landforms and impacts on man — Lesson 28.</a:t>
-            </a:r>
-            <a:endParaRPr lang="en-US" sz="1800" dirty="0"/>
+              <a:t>Timing: Homework correction, plan, objectives 4 min | Recall, situation, action 6 min | 3 activities 12 min | Board summary (copying) 15 min | Evaluation, remediation 5 min | Homework, next lesson 3 min | Logbook 5 min</a:t>
+            </a:r>
+            <a:endParaRPr lang="en-US" sz="2000" dirty="0"/>
           </a:p>
           <a:p>
             <a:pPr algn="l" marL="342900" indent="-342900">
@@ -18221,7 +18225,7 @@
               <a:buChar char="•"/>
             </a:pPr>
             <a:r>
-              <a:rPr lang="en-US" sz="1800" dirty="0">
+              <a:rPr lang="en-US" sz="2000" dirty="0">
                 <a:solidFill>
                   <a:srgbClr val="111111"/>
                 </a:solidFill>
@@ -18229,9 +18233,9 @@
                 <a:ea typeface="Calibri" pitchFamily="34" charset="-122"/>
                 <a:cs typeface="Calibri" pitchFamily="34" charset="-120"/>
               </a:rPr>
-              <a:t>Teacher's lesson notes, Lesson 28 (f4.docx).</a:t>
-            </a:r>
-            <a:endParaRPr lang="en-US" sz="1800" dirty="0"/>
+              <a:t>Activity 1 is an animation (GIF): it plays automatically in slide-show mode.</a:t>
+            </a:r>
+            <a:endParaRPr lang="en-US" sz="2000" dirty="0"/>
           </a:p>
           <a:p>
             <a:pPr algn="l" marL="342900" indent="-342900">
@@ -18242,7 +18246,7 @@
               <a:buChar char="•"/>
             </a:pPr>
             <a:r>
-              <a:rPr lang="en-US" sz="1800" dirty="0">
+              <a:rPr lang="en-US" sz="2000" dirty="0">
                 <a:solidFill>
                   <a:srgbClr val="111111"/>
                 </a:solidFill>
@@ -18250,9 +18254,9 @@
                 <a:ea typeface="Calibri" pitchFamily="34" charset="-122"/>
                 <a:cs typeface="Calibri" pitchFamily="34" charset="-120"/>
               </a:rPr>
-              <a:t>Dune diagrams: teacher's images (dune profile, seif) and a barchan diagram redrawn with the horns pointing downwind.</a:t>
-            </a:r>
-            <a:endParaRPr lang="en-US" sz="1800" dirty="0"/>
+              <a:t>Without the projector (Activity 1): draw a dune: a gentle slope and a steep slope.</a:t>
+            </a:r>
+            <a:endParaRPr lang="en-US" sz="2000" dirty="0"/>
           </a:p>
           <a:p>
             <a:pPr algn="l" marL="342900" indent="-342900">
@@ -18263,7 +18267,7 @@
               <a:buChar char="•"/>
             </a:pPr>
             <a:r>
-              <a:rPr lang="en-US" sz="1800" dirty="0">
+              <a:rPr lang="en-US" sz="2000" dirty="0">
                 <a:solidFill>
                   <a:srgbClr val="111111"/>
                 </a:solidFill>
@@ -18271,9 +18275,30 @@
                 <a:ea typeface="Calibri" pitchFamily="34" charset="-122"/>
                 <a:cs typeface="Calibri" pitchFamily="34" charset="-120"/>
               </a:rPr>
-              <a:t>Diagrams and animations: drawn for this lesson (Geography Department).</a:t>
-            </a:r>
-            <a:endParaRPr lang="en-US" sz="1800" dirty="0"/>
+              <a:t>Without the projector (Activity 2): draw a crescent with two horns.</a:t>
+            </a:r>
+            <a:endParaRPr lang="en-US" sz="2000" dirty="0"/>
+          </a:p>
+          <a:p>
+            <a:pPr algn="l" marL="342900" indent="-342900">
+              <a:spcAft>
+                <a:spcPts val="800"/>
+              </a:spcAft>
+              <a:buSzPct val="100000"/>
+              <a:buChar char="•"/>
+            </a:pPr>
+            <a:r>
+              <a:rPr lang="en-US" sz="2000" dirty="0">
+                <a:solidFill>
+                  <a:srgbClr val="111111"/>
+                </a:solidFill>
+                <a:latin typeface="Calibri" pitchFamily="34" charset="0"/>
+                <a:ea typeface="Calibri" pitchFamily="34" charset="-122"/>
+                <a:cs typeface="Calibri" pitchFamily="34" charset="-120"/>
+              </a:rPr>
+              <a:t>Without the projector (Activity 3): draw long parallel lines of sand.</a:t>
+            </a:r>
+            <a:endParaRPr lang="en-US" sz="2000" dirty="0"/>
           </a:p>
         </p:txBody>
       </p:sp>
@@ -18320,6 +18345,289 @@
             <a:fld id="{F7021451-1387-4CA6-816F-3879F97B5CBC}" type="slidenum">
               <a:rPr b="1" lang="en-US"/>
               <a:t>45</a:t>
+            </a:fld>
+            <a:endParaRPr lang="en-US"/>
+          </a:p>
+        </p:txBody>
+      </p:sp>
+    </p:spTree>
+  </p:cSld>
+  <p:clrMapOvr>
+    <a:masterClrMapping/>
+  </p:clrMapOvr>
+</p:sld>
+</file>
+
+<file path=ppt/slides/slide46.xml><?xml version="1.0" encoding="utf-8"?>
+<p:sld xmlns:a="http://schemas.openxmlformats.org/drawingml/2006/main" xmlns:r="http://schemas.openxmlformats.org/officeDocument/2006/relationships" xmlns:p="http://schemas.openxmlformats.org/presentationml/2006/main">
+  <p:cSld name="Slide 46">
+    <p:spTree>
+      <p:nvGrpSpPr>
+        <p:cNvPr id="1" name=""/>
+        <p:cNvGrpSpPr/>
+        <p:nvPr/>
+      </p:nvGrpSpPr>
+      <p:grpSpPr>
+        <a:xfrm>
+          <a:off x="0" y="0"/>
+          <a:ext cx="0" cy="0"/>
+          <a:chOff x="0" y="0"/>
+          <a:chExt cx="0" cy="0"/>
+        </a:xfrm>
+      </p:grpSpPr>
+      <p:sp>
+        <p:nvSpPr>
+          <p:cNvPr id="2" name="Text 0"/>
+          <p:cNvSpPr/>
+          <p:nvPr/>
+        </p:nvSpPr>
+        <p:spPr>
+          <a:xfrm>
+            <a:off x="457200" y="713232"/>
+            <a:ext cx="11368735" cy="274320"/>
+          </a:xfrm>
+          <a:prstGeom prst="rect">
+            <a:avLst/>
+          </a:prstGeom>
+          <a:noFill/>
+          <a:ln/>
+        </p:spPr>
+        <p:txBody>
+          <a:bodyPr wrap="square" lIns="0" tIns="0" rIns="0" bIns="0" rtlCol="0" anchor="ctr"/>
+          <a:lstStyle/>
+          <a:p>
+            <a:pPr algn="r" indent="0" marL="0">
+              <a:buNone/>
+            </a:pPr>
+            <a:r>
+              <a:rPr lang="en-US" sz="1400" b="1" dirty="0">
+                <a:solidFill>
+                  <a:srgbClr val="1C3F6E"/>
+                </a:solidFill>
+                <a:latin typeface="Calibri" pitchFamily="34" charset="0"/>
+                <a:ea typeface="Calibri" pitchFamily="34" charset="-122"/>
+                <a:cs typeface="Calibri" pitchFamily="34" charset="-120"/>
+              </a:rPr>
+              <a:t>REFERENCES</a:t>
+            </a:r>
+            <a:endParaRPr lang="en-US" sz="1400" dirty="0"/>
+          </a:p>
+        </p:txBody>
+      </p:sp>
+      <p:pic>
+        <p:nvPicPr>
+          <p:cNvPr id="3" name="Image 0" descr="/home/claude/f4/img/minesec_sheet.png">    </p:cNvPr>
+          <p:cNvPicPr>
+            <a:picLocks noChangeAspect="1"/>
+          </p:cNvPicPr>
+          <p:nvPr/>
+        </p:nvPicPr>
+        <p:blipFill>
+          <a:blip r:embed="rId1"/>
+          <a:stretch>
+            <a:fillRect/>
+          </a:stretch>
+        </p:blipFill>
+        <p:spPr>
+          <a:xfrm>
+            <a:off x="0" y="658368"/>
+            <a:ext cx="5120640" cy="5833872"/>
+          </a:xfrm>
+          <a:prstGeom prst="rect">
+            <a:avLst/>
+          </a:prstGeom>
+        </p:spPr>
+      </p:pic>
+      <p:sp>
+        <p:nvSpPr>
+          <p:cNvPr id="4" name="Text 1"/>
+          <p:cNvSpPr/>
+          <p:nvPr/>
+        </p:nvSpPr>
+        <p:spPr>
+          <a:xfrm>
+            <a:off x="5349240" y="1005840"/>
+            <a:ext cx="6522415" cy="731520"/>
+          </a:xfrm>
+          <a:prstGeom prst="rect">
+            <a:avLst/>
+          </a:prstGeom>
+          <a:noFill/>
+          <a:ln/>
+        </p:spPr>
+        <p:txBody>
+          <a:bodyPr wrap="square" lIns="0" tIns="0" rIns="0" bIns="0" rtlCol="0" anchor="ctr">
+            <a:normAutofit/>
+          </a:bodyPr>
+          <a:lstStyle/>
+          <a:p>
+            <a:pPr algn="ctr" indent="0" marL="0">
+              <a:buNone/>
+            </a:pPr>
+            <a:r>
+              <a:rPr lang="en-US" sz="3600" b="1" dirty="0">
+                <a:solidFill>
+                  <a:srgbClr val="990011"/>
+                </a:solidFill>
+                <a:latin typeface="Times New Roman" pitchFamily="34" charset="0"/>
+                <a:ea typeface="Times New Roman" pitchFamily="34" charset="-122"/>
+                <a:cs typeface="Times New Roman" pitchFamily="34" charset="-120"/>
+              </a:rPr>
+              <a:t>References</a:t>
+            </a:r>
+            <a:endParaRPr lang="en-US" sz="3600" dirty="0"/>
+          </a:p>
+        </p:txBody>
+      </p:sp>
+      <p:sp>
+        <p:nvSpPr>
+          <p:cNvPr id="5" name="Text 2"/>
+          <p:cNvSpPr/>
+          <p:nvPr/>
+        </p:nvSpPr>
+        <p:spPr>
+          <a:xfrm>
+            <a:off x="5349240" y="1783080"/>
+            <a:ext cx="6522415" cy="4663440"/>
+          </a:xfrm>
+          <a:prstGeom prst="rect">
+            <a:avLst/>
+          </a:prstGeom>
+          <a:noFill/>
+          <a:ln/>
+        </p:spPr>
+        <p:txBody>
+          <a:bodyPr wrap="square" lIns="0" tIns="0" rIns="0" bIns="0" rtlCol="0" anchor="t"/>
+          <a:lstStyle/>
+          <a:p>
+            <a:pPr algn="l" marL="342900" indent="-342900">
+              <a:spcAft>
+                <a:spcPts val="800"/>
+              </a:spcAft>
+              <a:buSzPct val="100000"/>
+              <a:buChar char="•"/>
+            </a:pPr>
+            <a:r>
+              <a:rPr lang="en-US" sz="1800" dirty="0">
+                <a:solidFill>
+                  <a:srgbClr val="111111"/>
+                </a:solidFill>
+                <a:latin typeface="Calibri" pitchFamily="34" charset="0"/>
+                <a:ea typeface="Calibri" pitchFamily="34" charset="-122"/>
+                <a:cs typeface="Calibri" pitchFamily="34" charset="-120"/>
+              </a:rPr>
+              <a:t>National Geography Syllabus (MINESEC), Form 4 — Denudation processes, landforms and impacts on man — Lesson 28.</a:t>
+            </a:r>
+            <a:endParaRPr lang="en-US" sz="1800" dirty="0"/>
+          </a:p>
+          <a:p>
+            <a:pPr algn="l" marL="342900" indent="-342900">
+              <a:spcAft>
+                <a:spcPts val="800"/>
+              </a:spcAft>
+              <a:buSzPct val="100000"/>
+              <a:buChar char="•"/>
+            </a:pPr>
+            <a:r>
+              <a:rPr lang="en-US" sz="1800" dirty="0">
+                <a:solidFill>
+                  <a:srgbClr val="111111"/>
+                </a:solidFill>
+                <a:latin typeface="Calibri" pitchFamily="34" charset="0"/>
+                <a:ea typeface="Calibri" pitchFamily="34" charset="-122"/>
+                <a:cs typeface="Calibri" pitchFamily="34" charset="-120"/>
+              </a:rPr>
+              <a:t>Teacher's lesson notes, Lesson 28 (f4.docx).</a:t>
+            </a:r>
+            <a:endParaRPr lang="en-US" sz="1800" dirty="0"/>
+          </a:p>
+          <a:p>
+            <a:pPr algn="l" marL="342900" indent="-342900">
+              <a:spcAft>
+                <a:spcPts val="800"/>
+              </a:spcAft>
+              <a:buSzPct val="100000"/>
+              <a:buChar char="•"/>
+            </a:pPr>
+            <a:r>
+              <a:rPr lang="en-US" sz="1800" dirty="0">
+                <a:solidFill>
+                  <a:srgbClr val="111111"/>
+                </a:solidFill>
+                <a:latin typeface="Calibri" pitchFamily="34" charset="0"/>
+                <a:ea typeface="Calibri" pitchFamily="34" charset="-122"/>
+                <a:cs typeface="Calibri" pitchFamily="34" charset="-120"/>
+              </a:rPr>
+              <a:t>Dune diagrams: teacher's images (dune profile, seif) and a barchan diagram redrawn with the horns pointing downwind.</a:t>
+            </a:r>
+            <a:endParaRPr lang="en-US" sz="1800" dirty="0"/>
+          </a:p>
+          <a:p>
+            <a:pPr algn="l" marL="342900" indent="-342900">
+              <a:spcAft>
+                <a:spcPts val="800"/>
+              </a:spcAft>
+              <a:buSzPct val="100000"/>
+              <a:buChar char="•"/>
+            </a:pPr>
+            <a:r>
+              <a:rPr lang="en-US" sz="1800" dirty="0">
+                <a:solidFill>
+                  <a:srgbClr val="111111"/>
+                </a:solidFill>
+                <a:latin typeface="Calibri" pitchFamily="34" charset="0"/>
+                <a:ea typeface="Calibri" pitchFamily="34" charset="-122"/>
+                <a:cs typeface="Calibri" pitchFamily="34" charset="-120"/>
+              </a:rPr>
+              <a:t>Diagrams and animations: drawn for this lesson (Geography Department).</a:t>
+            </a:r>
+            <a:endParaRPr lang="en-US" sz="1800" dirty="0"/>
+          </a:p>
+        </p:txBody>
+      </p:sp>
+      <p:sp>
+        <p:nvSpPr>
+          <p:cNvPr id="25" name="Slide Number Placeholder 0"/>
+          <p:cNvSpPr>
+            <a:spLocks noGrp="1"/>
+          </p:cNvSpPr>
+          <p:nvPr>
+            <p:ph type="sldNum" sz="quarter" idx="4294967295"/>
+          </p:nvPr>
+        </p:nvSpPr>
+        <p:spPr>
+          <a:xfrm>
+            <a:off x="27432" y="91440"/>
+            <a:ext cx="585216" cy="475488"/>
+          </a:xfrm>
+          <a:prstGeom prst="rect">
+            <a:avLst/>
+          </a:prstGeom>
+          <a:extLst>
+            <a:ext uri="{C572A759-6A51-4108-AA02-DFA0A04FC94B}">
+              <ma14:wrappingTextBoxFlag xmlns:ma14="http://schemas.microsoft.com/office/mac/drawingml/2011/main" val="0"/>
+            </a:ext>
+          </a:extLst>
+        </p:spPr>
+        <p:txBody>
+          <a:bodyPr/>
+          <a:lstStyle>
+            <a:lvl1pPr>
+              <a:defRPr sz="2000">
+                <a:solidFill>
+                  <a:srgbClr val="FFFFFF"/>
+                </a:solidFill>
+                <a:latin typeface="Calibri"/>
+                <a:ea typeface="Calibri"/>
+                <a:cs typeface="Calibri"/>
+              </a:defRPr>
+            </a:lvl1pPr>
+          </a:lstStyle>
+          <a:p>
+            <a:pPr algn="ctr"/>
+            <a:fld id="{F7021451-1387-4CA6-816F-3879F97B5CBC}" type="slidenum">
+              <a:rPr b="1" lang="en-US"/>
+              <a:t>46</a:t>
             </a:fld>
             <a:endParaRPr lang="en-US"/>
           </a:p>

--- a/lecons/F3/32_FORM4_LESSON28_Depositional_Features_Wind.pptx
+++ b/lecons/F3/32_FORM4_LESSON28_Depositional_Features_Wind.pptx
@@ -51,9 +51,12 @@
     <p:sldId id="299" r:id="rId45"/>
     <p:sldId id="300" r:id="rId46"/>
     <p:sldId id="301" r:id="rId47"/>
+    <p:sldId id="302" r:id="rId48"/>
+    <p:sldId id="303" r:id="rId49"/>
+    <p:sldId id="304" r:id="rId50"/>
   </p:sldIdLst>
   <p:notesMasterIdLst>
-    <p:notesMasterId r:id="rId48"/>
+    <p:notesMasterId r:id="rId51"/>
   </p:notesMasterIdLst>
   <p:sldSz cx="12192000" cy="6858000"/>
   <p:notesSz cx="6858000" cy="12192000"/>
@@ -635,7 +638,7 @@
           <a:p>
             <a:r>
               <a:rPr lang="en-US" dirty="0"/>
-              <a:t>Listen carefully to this situation from real life. After a windy Harmattan day, Aminatou sweeps her compound. The sand has piled up only in some places: at the foot of a wall, behind a stone and around a bush. Think about it, because I am going to ask you some questions.</a:t>
+              <a:t>Listen carefully to this situation from real life. After a windy Harmattan day, Aminatou sweeps her compound. The sand has piled up only in some places: at the foot of a wall, behind a stone and around a bush. She asks: "Why does the wind drop its sand in these places, and what does it build in the desert?" Think about it, because I am going to ask you some questions.</a:t>
             </a:r>
             <a:endParaRPr lang="en-US" dirty="0"/>
           </a:p>
@@ -811,7 +814,7 @@
           <a:p>
             <a:r>
               <a:rPr lang="en-US" dirty="0"/>
-              <a:t>Good. Aminatou does not know why the sand piled up in some places.</a:t>
+              <a:t>Good. Aminatou does not know why the wind drops sand in some places and what it builds in deserts.</a:t>
             </a:r>
             <a:endParaRPr lang="en-US" dirty="0"/>
           </a:p>
@@ -987,7 +990,7 @@
           <a:p>
             <a:r>
               <a:rPr lang="en-US" dirty="0"/>
-              <a:t>Good. Near the wall, the stone and the bush.</a:t>
+              <a:t>Good. At the foot of a wall, behind a stone and around a bush.</a:t>
             </a:r>
             <a:endParaRPr lang="en-US" dirty="0"/>
           </a:p>
@@ -1075,7 +1078,7 @@
           <a:p>
             <a:r>
               <a:rPr lang="en-US" dirty="0"/>
-              <a:t>Question 3: Why there? Think for a moment, then raise your hand to answer.</a:t>
+              <a:t>Question 3: Why did the wind drop the sand there? Think for a moment, then raise your hand to answer.</a:t>
             </a:r>
             <a:endParaRPr lang="en-US" dirty="0"/>
           </a:p>
@@ -1163,7 +1166,7 @@
           <a:p>
             <a:r>
               <a:rPr lang="en-US" dirty="0"/>
-              <a:t>Good. These obstacles slow the wind, so it drops the sand.</a:t>
+              <a:t>Good. The obstacles slowed down the wind.</a:t>
             </a:r>
             <a:endParaRPr lang="en-US" dirty="0"/>
           </a:p>
@@ -1603,7 +1606,7 @@
           <a:p>
             <a:r>
               <a:rPr lang="en-US" dirty="0"/>
-              <a:t>Here is the question for Activity 1: Which slope faces the wind? Is it gentle or steep? Take one minute to think and write your answer in your rough notebook.</a:t>
+              <a:t>Here is the question for Activity 1: Which slope of the dune faces the wind? Take one minute to think and write your answer in your rough notebook.</a:t>
             </a:r>
             <a:endParaRPr lang="en-US" dirty="0"/>
           </a:p>
@@ -1691,7 +1694,7 @@
           <a:p>
             <a:r>
               <a:rPr lang="en-US" dirty="0"/>
-              <a:t>Let us check the answer together. The windward slope. It is gentle.</a:t>
+              <a:t>Let us check the answer together. The windward slope.</a:t>
             </a:r>
             <a:endParaRPr lang="en-US" dirty="0"/>
           </a:p>
@@ -1779,7 +1782,7 @@
           <a:p>
             <a:r>
               <a:rPr lang="en-US" dirty="0"/>
-              <a:t>Activity 2. Look carefully at this diagram: a dune seen from above, shaped like a crescent (a new moon). Observe every detail before I ask the question.</a:t>
+              <a:t>Here is the next question: Is it gentle or steep? Take one minute to think and write your answer in your rough notebook.</a:t>
             </a:r>
             <a:endParaRPr lang="en-US" dirty="0"/>
           </a:p>
@@ -1867,7 +1870,7 @@
           <a:p>
             <a:r>
               <a:rPr lang="en-US" dirty="0"/>
-              <a:t>Here is the question for Activity 2: What is this dune called? Take one minute to think and write your answer in your rough notebook.</a:t>
+              <a:t>Let us check the answer together. Gentle.</a:t>
             </a:r>
             <a:endParaRPr lang="en-US" dirty="0"/>
           </a:p>
@@ -1955,7 +1958,7 @@
           <a:p>
             <a:r>
               <a:rPr lang="en-US" dirty="0"/>
-              <a:t>Let us check the answer together. A barchan.</a:t>
+              <a:t>Activity 2. Look carefully at this diagram: a crescent-shaped dune seen from above. Observe every detail before I ask the question.</a:t>
             </a:r>
             <a:endParaRPr lang="en-US" dirty="0"/>
           </a:p>
@@ -2043,7 +2046,7 @@
           <a:p>
             <a:r>
               <a:rPr lang="en-US" dirty="0"/>
-              <a:t>Activity 3. Look carefully at this diagram: long, straight lines of dunes seen from above. Observe every detail before I ask the question.</a:t>
+              <a:t>Here is the question for Activity 2: What is this crescent-shaped dune called? Take one minute to think and write your answer in your rough notebook.</a:t>
             </a:r>
             <a:endParaRPr lang="en-US" dirty="0"/>
           </a:p>
@@ -2131,7 +2134,7 @@
           <a:p>
             <a:r>
               <a:rPr lang="en-US" dirty="0"/>
-              <a:t>Here is the question for Activity 3: What do we call these long, narrow dunes? Take one minute to think and write your answer in your rough notebook.</a:t>
+              <a:t>Let us check the answer together. A barchan.</a:t>
             </a:r>
             <a:endParaRPr lang="en-US" dirty="0"/>
           </a:p>
@@ -2219,7 +2222,7 @@
           <a:p>
             <a:r>
               <a:rPr lang="en-US" dirty="0"/>
-              <a:t>Let us check the answer together. Seif dunes.</a:t>
+              <a:t>Activity 3. Look carefully at this diagram: long, narrow dunes. Observe every detail before I ask the question.</a:t>
             </a:r>
             <a:endParaRPr lang="en-US" dirty="0"/>
           </a:p>
@@ -2307,7 +2310,7 @@
           <a:p>
             <a:r>
               <a:rPr lang="en-US" dirty="0"/>
-              <a:t>Now we are going to copy the board summary. Write the title and the headings neatly in your notebooks. I will give you enough time for each slide, so do not rush.</a:t>
+              <a:t>Here is the question for Activity 3: What do we call these long, narrow dunes? Take one minute to think and write your answer in your rough notebook.</a:t>
             </a:r>
             <a:endParaRPr lang="en-US" dirty="0"/>
           </a:p>
@@ -2395,7 +2398,7 @@
           <a:p>
             <a:r>
               <a:rPr lang="en-US" dirty="0"/>
-              <a:t>Let us copy the definitions. The key terms of this lesson are defined as follows. On this slide we have Wind deposition. Write each point on a new line, with the key term first, and explain it in your own words when we revise.</a:t>
+              <a:t>Let us check the answer together. Seif dunes.</a:t>
             </a:r>
             <a:endParaRPr lang="en-US" dirty="0"/>
           </a:p>
@@ -2571,7 +2574,7 @@
           <a:p>
             <a:r>
               <a:rPr lang="en-US" dirty="0"/>
-              <a:t>Let us copy Causes of Wind Deposition. The wind drops sand for the following reasons. On this slide we have Slower wind and Obstacles. Write each point on a new line, with the key term first, and explain it in your own words when we revise. When you finish, we go to the next slide.</a:t>
+              <a:t>Now we are going to copy the board summary. Write the title and the headings neatly in your notebooks. I will give you enough time for each slide, so do not rush.</a:t>
             </a:r>
             <a:endParaRPr lang="en-US" dirty="0"/>
           </a:p>
@@ -2659,7 +2662,7 @@
           <a:p>
             <a:r>
               <a:rPr lang="en-US" dirty="0"/>
-              <a:t>We continue with Causes of Wind Deposition. On this slide we have Rain. Write each point on a new line, with the key term first, and explain it in your own words when we revise.</a:t>
+              <a:t>Let us copy the definitions. The key terms of this lesson are defined as follows. On this slide we have Wind deposition and Sand dune. Write each point on a new line, with the key term first, and explain it in your own words when we revise.</a:t>
             </a:r>
             <a:endParaRPr lang="en-US" dirty="0"/>
           </a:p>
@@ -2747,7 +2750,7 @@
           <a:p>
             <a:r>
               <a:rPr lang="en-US" dirty="0"/>
-              <a:t>Let us copy Depositional Features. Wind deposition forms the following features. On this slide we have Sand dune and Barchan. Write each point on a new line, with the key term first, and explain it in your own words when we revise. When you finish, we go to the next slide.</a:t>
+              <a:t>Let us copy Depositional Features of Wind Action. Wind deposition takes place and forms features as follows. On this slide we have Causes of deposition. Write each point on a new line, with the key term first, and explain it in your own words when we revise. When you finish, we go to the next slide.</a:t>
             </a:r>
             <a:endParaRPr lang="en-US" dirty="0"/>
           </a:p>
@@ -2835,7 +2838,7 @@
           <a:p>
             <a:r>
               <a:rPr lang="en-US" dirty="0"/>
-              <a:t>We continue with Depositional Features. On this slide we have Seif dune and Loess. Write each point on a new line, with the key term first, and explain it in your own words when we revise.</a:t>
+              <a:t>We continue with Depositional Features of Wind Action. On this slide we have Sand sheets and ripples. Write each point on a new line, with the key term first, and explain it in your own words when we revise.</a:t>
             </a:r>
             <a:endParaRPr lang="en-US" dirty="0"/>
           </a:p>
@@ -2923,7 +2926,7 @@
           <a:p>
             <a:r>
               <a:rPr lang="en-US" dirty="0"/>
-              <a:t>Now draw this illustration in your notebook: how a dune moves. Give it a title and label it clearly.</a:t>
+              <a:t>Copy the point on Sand dunes on the left, then draw the diagram on the right: how a dune moves. Give it a title and label it clearly.</a:t>
             </a:r>
             <a:endParaRPr lang="en-US" dirty="0"/>
           </a:p>
@@ -3011,7 +3014,7 @@
           <a:p>
             <a:r>
               <a:rPr lang="en-US" dirty="0"/>
-              <a:t>Now let us check what you have understood. Question 1: Why does the wind drop its sand behind a wall? Answer in your exercise book.</a:t>
+              <a:t>We continue with Depositional Features of Wind Action. On this slide we have Loess. Write each point on a new line, with the key term first, and explain it in your own words when we revise.</a:t>
             </a:r>
             <a:endParaRPr lang="en-US" dirty="0"/>
           </a:p>
@@ -3099,7 +3102,7 @@
           <a:p>
             <a:r>
               <a:rPr lang="en-US" dirty="0"/>
-              <a:t>The expected answer is: the wall slows the wind. If you got it right, well done.</a:t>
+              <a:t>Let us copy Dunes. The main types of sand dunes are the following. Copy the point on Barchans on the left, then draw the diagram on the right: a barchan. Give it a title and label it clearly.</a:t>
             </a:r>
             <a:endParaRPr lang="en-US" dirty="0"/>
           </a:p>
@@ -3187,7 +3190,7 @@
           <a:p>
             <a:r>
               <a:rPr lang="en-US" dirty="0"/>
-              <a:t>Now let us check what you have understood. Question 2: What is a barchan? Answer in your exercise book.</a:t>
+              <a:t>Copy the point on Seif dunes on the left, then draw the diagram on the right: seif dunes. Give it a title and label it clearly.</a:t>
             </a:r>
             <a:endParaRPr lang="en-US" dirty="0"/>
           </a:p>
@@ -3275,7 +3278,7 @@
           <a:p>
             <a:r>
               <a:rPr lang="en-US" dirty="0"/>
-              <a:t>The expected answer is: a dune shaped like a crescent. If you got it right, well done.</a:t>
+              <a:t>Now let us check what you have understood. Question 1: Why does the wind drop its sand behind a wall? Answer in your exercise book.</a:t>
             </a:r>
             <a:endParaRPr lang="en-US" dirty="0"/>
           </a:p>
@@ -3363,7 +3366,7 @@
           <a:p>
             <a:r>
               <a:rPr lang="en-US" dirty="0"/>
-              <a:t>For those who need more practice, fill in the blanks in your exercise book. The answers are: number 1, dune; number 2, barchan; number 3, seif.</a:t>
+              <a:t>The expected answer is: the wall slows the wind. If you got it right, well done.</a:t>
             </a:r>
             <a:endParaRPr lang="en-US" dirty="0"/>
           </a:p>
@@ -3539,7 +3542,7 @@
           <a:p>
             <a:r>
               <a:rPr lang="en-US" dirty="0"/>
-              <a:t>For your homework: Ask an elder in your family how people in your area cope with the heat, the dust and the shortage of water during the dry season. Write down two ways. We shall correct it at the beginning of our next lesson.</a:t>
+              <a:t>Now let us check what you have understood. Question 2: What is a barchan? Answer in your exercise book.</a:t>
             </a:r>
             <a:endParaRPr lang="en-US" dirty="0"/>
           </a:p>
@@ -3627,7 +3630,7 @@
           <a:p>
             <a:r>
               <a:rPr lang="en-US" dirty="0"/>
-              <a:t>Our next lesson will be on Lesson 29: Man in the Hot Desert Environments. Thank you for your attention, and see you next time.</a:t>
+              <a:t>The expected answer is: a dune shaped like a crescent. If you got it right, well done.</a:t>
             </a:r>
             <a:endParaRPr lang="en-US" dirty="0"/>
           </a:p>
@@ -3715,7 +3718,7 @@
           <a:p>
             <a:r>
               <a:rPr lang="en-US" dirty="0"/>
-              <a:t>Let us play the bilingual game. I say a word in English, and you give me the French word. Then we do the reverse.</a:t>
+              <a:t>For those who need more practice, fill in the blanks in your exercise book. The answers are: number 1, dune; number 2, barchan; number 3, seif.</a:t>
             </a:r>
             <a:endParaRPr lang="en-US" dirty="0"/>
           </a:p>
@@ -3803,7 +3806,7 @@
           <a:p>
             <a:r>
               <a:rPr lang="en-US" dirty="0"/>
-              <a:t>I record this information in the official logbook of the class after the lesson.</a:t>
+              <a:t>For your homework: Ask an elder in your family how people in your area cope with the heat, the dust and the shortage of water during the dry season. Write down two ways. We shall correct it at the beginning of our next lesson.</a:t>
             </a:r>
             <a:endParaRPr lang="en-US" dirty="0"/>
           </a:p>
@@ -3891,7 +3894,7 @@
           <a:p>
             <a:r>
               <a:rPr lang="en-US" dirty="0"/>
-              <a:t>I complete the second page of the logbook: the matter taught, the evaluation, the homework and the attendance.</a:t>
+              <a:t>Our next lesson will be on Lesson 29: Man in the Hot Desert Environments. Thank you for your attention, and see you next time.</a:t>
             </a:r>
             <a:endParaRPr lang="en-US" dirty="0"/>
           </a:p>
@@ -3979,7 +3982,7 @@
           <a:p>
             <a:r>
               <a:rPr lang="en-US" dirty="0"/>
-              <a:t>This slide is for me, the teacher: it gives the timing of the lesson and what to do if the projector is not available.</a:t>
+              <a:t>Let us play the bilingual game. I say a word in English, and you give me the French word. Then we do the reverse.</a:t>
             </a:r>
             <a:endParaRPr lang="en-US" dirty="0"/>
           </a:p>
@@ -4067,7 +4070,7 @@
           <a:p>
             <a:r>
               <a:rPr lang="en-US" dirty="0"/>
-              <a:t>These are the references and picture credits used to prepare this lesson.</a:t>
+              <a:t>I record this information in the official logbook of the class after the lesson.</a:t>
             </a:r>
             <a:endParaRPr lang="en-US" dirty="0"/>
           </a:p>
@@ -4091,6 +4094,270 @@
             <a:fld id="{F7021451-1387-4CA6-816F-3879F97B5CBC}" type="slidenum">
               <a:rPr lang="en-US"/>
               <a:t>46</a:t>
+            </a:fld>
+            <a:endParaRPr lang="en-US"/>
+          </a:p>
+        </p:txBody>
+      </p:sp>
+    </p:spTree>
+    <p:extLst>
+      <p:ext uri="{BB962C8B-B14F-4D97-AF65-F5344CB8AC3E}">
+        <p14:creationId xmlns:p14="http://schemas.microsoft.com/office/powerpoint/2010/main" val="1024086991"/>
+      </p:ext>
+    </p:extLst>
+  </p:cSld>
+  <p:clrMapOvr>
+    <a:masterClrMapping/>
+  </p:clrMapOvr>
+</p:notes>
+</file>
+
+<file path=ppt/notesSlides/notesSlide47.xml><?xml version="1.0" encoding="utf-8"?>
+<p:notes xmlns:a="http://schemas.openxmlformats.org/drawingml/2006/main" xmlns:r="http://schemas.openxmlformats.org/officeDocument/2006/relationships" xmlns:p="http://schemas.openxmlformats.org/presentationml/2006/main">
+  <p:cSld>
+    <p:spTree>
+      <p:nvGrpSpPr>
+        <p:cNvPr id="1" name=""/>
+        <p:cNvGrpSpPr/>
+        <p:nvPr/>
+      </p:nvGrpSpPr>
+      <p:grpSpPr>
+        <a:xfrm>
+          <a:off x="0" y="0"/>
+          <a:ext cx="0" cy="0"/>
+          <a:chOff x="0" y="0"/>
+          <a:chExt cx="0" cy="0"/>
+        </a:xfrm>
+      </p:grpSpPr>
+      <p:sp>
+        <p:nvSpPr>
+          <p:cNvPr id="2" name="Slide Image Placeholder 1"/>
+          <p:cNvSpPr>
+            <a:spLocks noGrp="1" noRot="1" noChangeAspect="1"/>
+          </p:cNvSpPr>
+          <p:nvPr>
+            <p:ph type="sldImg"/>
+          </p:nvPr>
+        </p:nvSpPr>
+        <p:spPr/>
+      </p:sp>
+      <p:sp>
+        <p:nvSpPr>
+          <p:cNvPr id="3" name="Notes Placeholder 2"/>
+          <p:cNvSpPr>
+            <a:spLocks noGrp="1"/>
+          </p:cNvSpPr>
+          <p:nvPr>
+            <p:ph type="body" idx="1"/>
+          </p:nvPr>
+        </p:nvSpPr>
+        <p:spPr/>
+        <p:txBody>
+          <a:bodyPr/>
+          <a:lstStyle/>
+          <a:p>
+            <a:r>
+              <a:rPr lang="en-US" dirty="0"/>
+              <a:t>I complete the second page of the logbook: the matter taught, the evaluation, the homework and the attendance.</a:t>
+            </a:r>
+            <a:endParaRPr lang="en-US" dirty="0"/>
+          </a:p>
+        </p:txBody>
+      </p:sp>
+      <p:sp>
+        <p:nvSpPr>
+          <p:cNvPr id="4" name="Slide Number Placeholder 3"/>
+          <p:cNvSpPr>
+            <a:spLocks noGrp="1"/>
+          </p:cNvSpPr>
+          <p:nvPr>
+            <p:ph type="sldNum" sz="quarter" idx="10"/>
+          </p:nvPr>
+        </p:nvSpPr>
+        <p:spPr/>
+        <p:txBody>
+          <a:bodyPr/>
+          <a:lstStyle/>
+          <a:p>
+            <a:fld id="{F7021451-1387-4CA6-816F-3879F97B5CBC}" type="slidenum">
+              <a:rPr lang="en-US"/>
+              <a:t>47</a:t>
+            </a:fld>
+            <a:endParaRPr lang="en-US"/>
+          </a:p>
+        </p:txBody>
+      </p:sp>
+    </p:spTree>
+    <p:extLst>
+      <p:ext uri="{BB962C8B-B14F-4D97-AF65-F5344CB8AC3E}">
+        <p14:creationId xmlns:p14="http://schemas.microsoft.com/office/powerpoint/2010/main" val="1024086991"/>
+      </p:ext>
+    </p:extLst>
+  </p:cSld>
+  <p:clrMapOvr>
+    <a:masterClrMapping/>
+  </p:clrMapOvr>
+</p:notes>
+</file>
+
+<file path=ppt/notesSlides/notesSlide48.xml><?xml version="1.0" encoding="utf-8"?>
+<p:notes xmlns:a="http://schemas.openxmlformats.org/drawingml/2006/main" xmlns:r="http://schemas.openxmlformats.org/officeDocument/2006/relationships" xmlns:p="http://schemas.openxmlformats.org/presentationml/2006/main">
+  <p:cSld>
+    <p:spTree>
+      <p:nvGrpSpPr>
+        <p:cNvPr id="1" name=""/>
+        <p:cNvGrpSpPr/>
+        <p:nvPr/>
+      </p:nvGrpSpPr>
+      <p:grpSpPr>
+        <a:xfrm>
+          <a:off x="0" y="0"/>
+          <a:ext cx="0" cy="0"/>
+          <a:chOff x="0" y="0"/>
+          <a:chExt cx="0" cy="0"/>
+        </a:xfrm>
+      </p:grpSpPr>
+      <p:sp>
+        <p:nvSpPr>
+          <p:cNvPr id="2" name="Slide Image Placeholder 1"/>
+          <p:cNvSpPr>
+            <a:spLocks noGrp="1" noRot="1" noChangeAspect="1"/>
+          </p:cNvSpPr>
+          <p:nvPr>
+            <p:ph type="sldImg"/>
+          </p:nvPr>
+        </p:nvSpPr>
+        <p:spPr/>
+      </p:sp>
+      <p:sp>
+        <p:nvSpPr>
+          <p:cNvPr id="3" name="Notes Placeholder 2"/>
+          <p:cNvSpPr>
+            <a:spLocks noGrp="1"/>
+          </p:cNvSpPr>
+          <p:nvPr>
+            <p:ph type="body" idx="1"/>
+          </p:nvPr>
+        </p:nvSpPr>
+        <p:spPr/>
+        <p:txBody>
+          <a:bodyPr/>
+          <a:lstStyle/>
+          <a:p>
+            <a:r>
+              <a:rPr lang="en-US" dirty="0"/>
+              <a:t>This slide is for me, the teacher: it gives the timing of the lesson and what to do if the projector is not available.</a:t>
+            </a:r>
+            <a:endParaRPr lang="en-US" dirty="0"/>
+          </a:p>
+        </p:txBody>
+      </p:sp>
+      <p:sp>
+        <p:nvSpPr>
+          <p:cNvPr id="4" name="Slide Number Placeholder 3"/>
+          <p:cNvSpPr>
+            <a:spLocks noGrp="1"/>
+          </p:cNvSpPr>
+          <p:nvPr>
+            <p:ph type="sldNum" sz="quarter" idx="10"/>
+          </p:nvPr>
+        </p:nvSpPr>
+        <p:spPr/>
+        <p:txBody>
+          <a:bodyPr/>
+          <a:lstStyle/>
+          <a:p>
+            <a:fld id="{F7021451-1387-4CA6-816F-3879F97B5CBC}" type="slidenum">
+              <a:rPr lang="en-US"/>
+              <a:t>48</a:t>
+            </a:fld>
+            <a:endParaRPr lang="en-US"/>
+          </a:p>
+        </p:txBody>
+      </p:sp>
+    </p:spTree>
+    <p:extLst>
+      <p:ext uri="{BB962C8B-B14F-4D97-AF65-F5344CB8AC3E}">
+        <p14:creationId xmlns:p14="http://schemas.microsoft.com/office/powerpoint/2010/main" val="1024086991"/>
+      </p:ext>
+    </p:extLst>
+  </p:cSld>
+  <p:clrMapOvr>
+    <a:masterClrMapping/>
+  </p:clrMapOvr>
+</p:notes>
+</file>
+
+<file path=ppt/notesSlides/notesSlide49.xml><?xml version="1.0" encoding="utf-8"?>
+<p:notes xmlns:a="http://schemas.openxmlformats.org/drawingml/2006/main" xmlns:r="http://schemas.openxmlformats.org/officeDocument/2006/relationships" xmlns:p="http://schemas.openxmlformats.org/presentationml/2006/main">
+  <p:cSld>
+    <p:spTree>
+      <p:nvGrpSpPr>
+        <p:cNvPr id="1" name=""/>
+        <p:cNvGrpSpPr/>
+        <p:nvPr/>
+      </p:nvGrpSpPr>
+      <p:grpSpPr>
+        <a:xfrm>
+          <a:off x="0" y="0"/>
+          <a:ext cx="0" cy="0"/>
+          <a:chOff x="0" y="0"/>
+          <a:chExt cx="0" cy="0"/>
+        </a:xfrm>
+      </p:grpSpPr>
+      <p:sp>
+        <p:nvSpPr>
+          <p:cNvPr id="2" name="Slide Image Placeholder 1"/>
+          <p:cNvSpPr>
+            <a:spLocks noGrp="1" noRot="1" noChangeAspect="1"/>
+          </p:cNvSpPr>
+          <p:nvPr>
+            <p:ph type="sldImg"/>
+          </p:nvPr>
+        </p:nvSpPr>
+        <p:spPr/>
+      </p:sp>
+      <p:sp>
+        <p:nvSpPr>
+          <p:cNvPr id="3" name="Notes Placeholder 2"/>
+          <p:cNvSpPr>
+            <a:spLocks noGrp="1"/>
+          </p:cNvSpPr>
+          <p:nvPr>
+            <p:ph type="body" idx="1"/>
+          </p:nvPr>
+        </p:nvSpPr>
+        <p:spPr/>
+        <p:txBody>
+          <a:bodyPr/>
+          <a:lstStyle/>
+          <a:p>
+            <a:r>
+              <a:rPr lang="en-US" dirty="0"/>
+              <a:t>These are the references and picture credits used to prepare this lesson.</a:t>
+            </a:r>
+            <a:endParaRPr lang="en-US" dirty="0"/>
+          </a:p>
+        </p:txBody>
+      </p:sp>
+      <p:sp>
+        <p:nvSpPr>
+          <p:cNvPr id="4" name="Slide Number Placeholder 3"/>
+          <p:cNvSpPr>
+            <a:spLocks noGrp="1"/>
+          </p:cNvSpPr>
+          <p:nvPr>
+            <p:ph type="sldNum" sz="quarter" idx="10"/>
+          </p:nvPr>
+        </p:nvSpPr>
+        <p:spPr/>
+        <p:txBody>
+          <a:bodyPr/>
+          <a:lstStyle/>
+          <a:p>
+            <a:fld id="{F7021451-1387-4CA6-816F-3879F97B5CBC}" type="slidenum">
+              <a:rPr lang="en-US"/>
+              <a:t>49</a:t>
             </a:fld>
             <a:endParaRPr lang="en-US"/>
           </a:p>
@@ -5887,7 +6154,7 @@
         <p:spPr>
           <a:xfrm>
             <a:off x="0" y="658368"/>
-            <a:ext cx="5120640" cy="5833872"/>
+            <a:ext cx="2468880" cy="5833872"/>
           </a:xfrm>
           <a:prstGeom prst="rect">
             <a:avLst/>
@@ -5902,8 +6169,8 @@
         </p:nvSpPr>
         <p:spPr>
           <a:xfrm>
-            <a:off x="5349240" y="1005840"/>
-            <a:ext cx="6522415" cy="731520"/>
+            <a:off x="2697480" y="1005840"/>
+            <a:ext cx="9174175" cy="731520"/>
           </a:xfrm>
           <a:prstGeom prst="rect">
             <a:avLst/>
@@ -5943,8 +6210,8 @@
         </p:nvSpPr>
         <p:spPr>
           <a:xfrm>
-            <a:off x="5349240" y="1783080"/>
-            <a:ext cx="6522415" cy="4663440"/>
+            <a:off x="2697480" y="1783080"/>
+            <a:ext cx="9174175" cy="4663440"/>
           </a:xfrm>
           <a:prstGeom prst="rect">
             <a:avLst/>
@@ -5971,7 +6238,7 @@
                 <a:ea typeface="Times New Roman" pitchFamily="34" charset="-122"/>
                 <a:cs typeface="Times New Roman" pitchFamily="34" charset="-120"/>
               </a:rPr>
-              <a:t>After a windy Harmattan day, Aminatou sweeps her compound. The sand has piled up only in some places: at the foot of a wall, behind a stone and around a bush.</a:t>
+              <a:t>After a windy Harmattan day, Aminatou sweeps her compound. The sand has piled up only in some places: at the foot of a wall, behind a stone and around a bush. She asks: "Why does the wind drop its sand in these places, and what does it build in the desert?"</a:t>
             </a:r>
             <a:endParaRPr lang="en-US" sz="4000" dirty="0"/>
           </a:p>
@@ -6409,7 +6676,7 @@
                 <a:ea typeface="Times New Roman" pitchFamily="34" charset="-122"/>
                 <a:cs typeface="Times New Roman" pitchFamily="34" charset="-120"/>
               </a:rPr>
-              <a:t>Aminatou does not know why the sand piled up in some places.</a:t>
+              <a:t>Aminatou does not know why the wind drops sand in some places and what it builds in deserts.</a:t>
             </a:r>
             <a:endParaRPr lang="en-US" sz="4000" dirty="0"/>
           </a:p>
@@ -6847,7 +7114,7 @@
                 <a:ea typeface="Times New Roman" pitchFamily="34" charset="-122"/>
                 <a:cs typeface="Times New Roman" pitchFamily="34" charset="-120"/>
               </a:rPr>
-              <a:t>Near the wall, the stone and the bush.</a:t>
+              <a:t>At the foot of a wall, behind a stone and around a bush.</a:t>
             </a:r>
             <a:endParaRPr lang="en-US" sz="4000" dirty="0"/>
           </a:p>
@@ -7066,7 +7333,7 @@
                 <a:ea typeface="Times New Roman" pitchFamily="34" charset="-122"/>
                 <a:cs typeface="Times New Roman" pitchFamily="34" charset="-120"/>
               </a:rPr>
-              <a:t>Why there?</a:t>
+              <a:t>Why did the wind drop the sand there?</a:t>
             </a:r>
             <a:endParaRPr lang="en-US" sz="4000" dirty="0"/>
           </a:p>
@@ -7285,7 +7552,7 @@
                 <a:ea typeface="Times New Roman" pitchFamily="34" charset="-122"/>
                 <a:cs typeface="Times New Roman" pitchFamily="34" charset="-120"/>
               </a:rPr>
-              <a:t>These obstacles slow the wind, so it drops the sand.</a:t>
+              <a:t>The obstacles slowed down the wind.</a:t>
             </a:r>
             <a:endParaRPr lang="en-US" sz="4000" dirty="0"/>
           </a:p>
@@ -7835,7 +8102,7 @@
                 <a:ea typeface="Calibri" pitchFamily="34" charset="-122"/>
                 <a:cs typeface="Calibri" pitchFamily="34" charset="-120"/>
               </a:rPr>
-              <a:t>2. SAND DUNES</a:t>
+              <a:t>1. DEPOSITIONAL FEATURES</a:t>
             </a:r>
             <a:endParaRPr lang="en-US" sz="1400" dirty="0"/>
           </a:p>
@@ -8644,7 +8911,7 @@
                 <a:ea typeface="Calibri" pitchFamily="34" charset="-122"/>
                 <a:cs typeface="Calibri" pitchFamily="34" charset="-120"/>
               </a:rPr>
-              <a:t>2. SAND DUNES</a:t>
+              <a:t>1. DEPOSITIONAL FEATURES</a:t>
             </a:r>
             <a:endParaRPr lang="en-US" sz="1400" dirty="0"/>
           </a:p>
@@ -8709,7 +8976,7 @@
                 <a:ea typeface="Times New Roman" pitchFamily="34" charset="-122"/>
                 <a:cs typeface="Times New Roman" pitchFamily="34" charset="-120"/>
               </a:rPr>
-              <a:t>Activity 1: Question</a:t>
+              <a:t>Activity 1: Question 1</a:t>
             </a:r>
             <a:endParaRPr lang="en-US" sz="3600" dirty="0"/>
           </a:p>
@@ -8751,7 +9018,7 @@
                 <a:ea typeface="Times New Roman" pitchFamily="34" charset="-122"/>
                 <a:cs typeface="Times New Roman" pitchFamily="34" charset="-120"/>
               </a:rPr>
-              <a:t>Which slope faces the wind? Is it gentle or steep?</a:t>
+              <a:t>Which slope of the dune faces the wind?</a:t>
             </a:r>
             <a:endParaRPr lang="en-US" sz="4000" dirty="0"/>
           </a:p>
@@ -8863,7 +9130,7 @@
                 <a:ea typeface="Calibri" pitchFamily="34" charset="-122"/>
                 <a:cs typeface="Calibri" pitchFamily="34" charset="-120"/>
               </a:rPr>
-              <a:t>2. SAND DUNES</a:t>
+              <a:t>1. DEPOSITIONAL FEATURES</a:t>
             </a:r>
             <a:endParaRPr lang="en-US" sz="1400" dirty="0"/>
           </a:p>
@@ -8928,7 +9195,7 @@
                 <a:ea typeface="Times New Roman" pitchFamily="34" charset="-122"/>
                 <a:cs typeface="Times New Roman" pitchFamily="34" charset="-120"/>
               </a:rPr>
-              <a:t>Activity 1: Answer</a:t>
+              <a:t>Activity 1: Answer 1</a:t>
             </a:r>
             <a:endParaRPr lang="en-US" sz="3600" dirty="0"/>
           </a:p>
@@ -8970,7 +9237,7 @@
                 <a:ea typeface="Times New Roman" pitchFamily="34" charset="-122"/>
                 <a:cs typeface="Times New Roman" pitchFamily="34" charset="-120"/>
               </a:rPr>
-              <a:t>The windward slope. It is gentle.</a:t>
+              <a:t>The windward slope.</a:t>
             </a:r>
             <a:endParaRPr lang="en-US" sz="4000" dirty="0"/>
           </a:p>
@@ -9082,54 +9349,15 @@
                 <a:ea typeface="Calibri" pitchFamily="34" charset="-122"/>
                 <a:cs typeface="Calibri" pitchFamily="34" charset="-120"/>
               </a:rPr>
-              <a:t>2. BARCHANS</a:t>
+              <a:t>1. DEPOSITIONAL FEATURES</a:t>
             </a:r>
             <a:endParaRPr lang="en-US" sz="1400" dirty="0"/>
-          </a:p>
-        </p:txBody>
-      </p:sp>
-      <p:sp>
-        <p:nvSpPr>
-          <p:cNvPr id="3" name="Text 1"/>
-          <p:cNvSpPr/>
-          <p:nvPr/>
-        </p:nvSpPr>
-        <p:spPr>
-          <a:xfrm>
-            <a:off x="457200" y="1005840"/>
-            <a:ext cx="11277295" cy="731520"/>
-          </a:xfrm>
-          <a:prstGeom prst="rect">
-            <a:avLst/>
-          </a:prstGeom>
-          <a:noFill/>
-          <a:ln/>
-        </p:spPr>
-        <p:txBody>
-          <a:bodyPr wrap="square" lIns="0" tIns="0" rIns="0" bIns="0" rtlCol="0" anchor="ctr"/>
-          <a:lstStyle/>
-          <a:p>
-            <a:pPr algn="ctr" indent="0" marL="0">
-              <a:buNone/>
-            </a:pPr>
-            <a:r>
-              <a:rPr lang="en-US" sz="3600" b="1" dirty="0">
-                <a:solidFill>
-                  <a:srgbClr val="990011"/>
-                </a:solidFill>
-                <a:latin typeface="Times New Roman" pitchFamily="34" charset="0"/>
-                <a:ea typeface="Times New Roman" pitchFamily="34" charset="-122"/>
-                <a:cs typeface="Times New Roman" pitchFamily="34" charset="-120"/>
-              </a:rPr>
-              <a:t>Activity 2</a:t>
-            </a:r>
-            <a:endParaRPr lang="en-US" sz="3600" dirty="0"/>
           </a:p>
         </p:txBody>
       </p:sp>
       <p:pic>
         <p:nvPicPr>
-          <p:cNvPr id="4" name="Image 0" descr="/home/claude/f4/img/v2/barchan_big.png">    </p:cNvPr>
+          <p:cNvPr id="3" name="Image 0" descr="/home/claude/f4/img/minesec_sheet.png">    </p:cNvPr>
           <p:cNvPicPr>
             <a:picLocks noChangeAspect="1"/>
           </p:cNvPicPr>
@@ -9143,8 +9371,8 @@
         </p:blipFill>
         <p:spPr>
           <a:xfrm>
-            <a:off x="629930" y="1783080"/>
-            <a:ext cx="10931835" cy="4270248"/>
+            <a:off x="0" y="658368"/>
+            <a:ext cx="5120640" cy="5833872"/>
           </a:xfrm>
           <a:prstGeom prst="rect">
             <a:avLst/>
@@ -9153,14 +9381,14 @@
       </p:pic>
       <p:sp>
         <p:nvSpPr>
-          <p:cNvPr id="5" name="Text 2"/>
+          <p:cNvPr id="4" name="Text 1"/>
           <p:cNvSpPr/>
           <p:nvPr/>
         </p:nvSpPr>
         <p:spPr>
           <a:xfrm>
-            <a:off x="457200" y="6089904"/>
-            <a:ext cx="11277295" cy="347472"/>
+            <a:off x="5349240" y="1005840"/>
+            <a:ext cx="6522415" cy="731520"/>
           </a:xfrm>
           <a:prstGeom prst="rect">
             <a:avLst/>
@@ -9169,24 +9397,68 @@
           <a:ln/>
         </p:spPr>
         <p:txBody>
-          <a:bodyPr wrap="square" lIns="0" tIns="0" rIns="0" bIns="0" rtlCol="0" anchor="ctr"/>
+          <a:bodyPr wrap="square" lIns="0" tIns="0" rIns="0" bIns="0" rtlCol="0" anchor="ctr">
+            <a:normAutofit/>
+          </a:bodyPr>
           <a:lstStyle/>
           <a:p>
             <a:pPr algn="ctr" indent="0" marL="0">
               <a:buNone/>
             </a:pPr>
             <a:r>
-              <a:rPr lang="en-US" sz="1800" i="1" dirty="0">
-                <a:solidFill>
-                  <a:srgbClr val="555555"/>
+              <a:rPr lang="en-US" sz="3600" b="1" dirty="0">
+                <a:solidFill>
+                  <a:srgbClr val="990011"/>
                 </a:solidFill>
                 <a:latin typeface="Times New Roman" pitchFamily="34" charset="0"/>
                 <a:ea typeface="Times New Roman" pitchFamily="34" charset="-122"/>
                 <a:cs typeface="Times New Roman" pitchFamily="34" charset="-120"/>
               </a:rPr>
-              <a:t>A dune seen from above, shaped like a crescent (a new moon).</a:t>
-            </a:r>
-            <a:endParaRPr lang="en-US" sz="1800" dirty="0"/>
+              <a:t>Activity 1: Question 2</a:t>
+            </a:r>
+            <a:endParaRPr lang="en-US" sz="3600" dirty="0"/>
+          </a:p>
+        </p:txBody>
+      </p:sp>
+      <p:sp>
+        <p:nvSpPr>
+          <p:cNvPr id="5" name="Text 2"/>
+          <p:cNvSpPr/>
+          <p:nvPr/>
+        </p:nvSpPr>
+        <p:spPr>
+          <a:xfrm>
+            <a:off x="5349240" y="1783080"/>
+            <a:ext cx="6522415" cy="4663440"/>
+          </a:xfrm>
+          <a:prstGeom prst="rect">
+            <a:avLst/>
+          </a:prstGeom>
+          <a:noFill/>
+          <a:ln/>
+        </p:spPr>
+        <p:txBody>
+          <a:bodyPr wrap="square" lIns="0" tIns="0" rIns="0" bIns="0" rtlCol="0" anchor="t"/>
+          <a:lstStyle/>
+          <a:p>
+            <a:pPr algn="l" indent="0" marL="0">
+              <a:spcAft>
+                <a:spcPts val="800"/>
+              </a:spcAft>
+              <a:buNone/>
+            </a:pPr>
+            <a:r>
+              <a:rPr lang="en-US" sz="4000" dirty="0">
+                <a:solidFill>
+                  <a:srgbClr val="111111"/>
+                </a:solidFill>
+                <a:latin typeface="Times New Roman" pitchFamily="34" charset="0"/>
+                <a:ea typeface="Times New Roman" pitchFamily="34" charset="-122"/>
+                <a:cs typeface="Times New Roman" pitchFamily="34" charset="-120"/>
+              </a:rPr>
+              <a:t>Is it gentle or steep?</a:t>
+            </a:r>
+            <a:endParaRPr lang="en-US" sz="4000" dirty="0"/>
           </a:p>
         </p:txBody>
       </p:sp>
@@ -9296,7 +9568,7 @@
                 <a:ea typeface="Calibri" pitchFamily="34" charset="-122"/>
                 <a:cs typeface="Calibri" pitchFamily="34" charset="-120"/>
               </a:rPr>
-              <a:t>2. BARCHANS</a:t>
+              <a:t>1. DEPOSITIONAL FEATURES</a:t>
             </a:r>
             <a:endParaRPr lang="en-US" sz="1400" dirty="0"/>
           </a:p>
@@ -9361,7 +9633,7 @@
                 <a:ea typeface="Times New Roman" pitchFamily="34" charset="-122"/>
                 <a:cs typeface="Times New Roman" pitchFamily="34" charset="-120"/>
               </a:rPr>
-              <a:t>Activity 2: Question</a:t>
+              <a:t>Activity 1: Answer 2</a:t>
             </a:r>
             <a:endParaRPr lang="en-US" sz="3600" dirty="0"/>
           </a:p>
@@ -9403,7 +9675,7 @@
                 <a:ea typeface="Times New Roman" pitchFamily="34" charset="-122"/>
                 <a:cs typeface="Times New Roman" pitchFamily="34" charset="-120"/>
               </a:rPr>
-              <a:t>What is this dune called?</a:t>
+              <a:t>Gentle.</a:t>
             </a:r>
             <a:endParaRPr lang="en-US" sz="4000" dirty="0"/>
           </a:p>
@@ -9515,15 +9787,54 @@
                 <a:ea typeface="Calibri" pitchFamily="34" charset="-122"/>
                 <a:cs typeface="Calibri" pitchFamily="34" charset="-120"/>
               </a:rPr>
-              <a:t>2. BARCHANS</a:t>
+              <a:t>2. DUNES</a:t>
             </a:r>
             <a:endParaRPr lang="en-US" sz="1400" dirty="0"/>
+          </a:p>
+        </p:txBody>
+      </p:sp>
+      <p:sp>
+        <p:nvSpPr>
+          <p:cNvPr id="3" name="Text 1"/>
+          <p:cNvSpPr/>
+          <p:nvPr/>
+        </p:nvSpPr>
+        <p:spPr>
+          <a:xfrm>
+            <a:off x="457200" y="1005840"/>
+            <a:ext cx="11277295" cy="731520"/>
+          </a:xfrm>
+          <a:prstGeom prst="rect">
+            <a:avLst/>
+          </a:prstGeom>
+          <a:noFill/>
+          <a:ln/>
+        </p:spPr>
+        <p:txBody>
+          <a:bodyPr wrap="square" lIns="0" tIns="0" rIns="0" bIns="0" rtlCol="0" anchor="ctr"/>
+          <a:lstStyle/>
+          <a:p>
+            <a:pPr algn="ctr" indent="0" marL="0">
+              <a:buNone/>
+            </a:pPr>
+            <a:r>
+              <a:rPr lang="en-US" sz="3600" b="1" dirty="0">
+                <a:solidFill>
+                  <a:srgbClr val="990011"/>
+                </a:solidFill>
+                <a:latin typeface="Times New Roman" pitchFamily="34" charset="0"/>
+                <a:ea typeface="Times New Roman" pitchFamily="34" charset="-122"/>
+                <a:cs typeface="Times New Roman" pitchFamily="34" charset="-120"/>
+              </a:rPr>
+              <a:t>Activity 2</a:t>
+            </a:r>
+            <a:endParaRPr lang="en-US" sz="3600" dirty="0"/>
           </a:p>
         </p:txBody>
       </p:sp>
       <p:pic>
         <p:nvPicPr>
-          <p:cNvPr id="3" name="Image 0" descr="/home/claude/f4/img/minesec_sheet.png">    </p:cNvPr>
+          <p:cNvPr id="4" name="Image 0" descr="/home/claude/f4/img/v2/barchan_big.png">    </p:cNvPr>
           <p:cNvPicPr>
             <a:picLocks noChangeAspect="1"/>
           </p:cNvPicPr>
@@ -9537,8 +9848,8 @@
         </p:blipFill>
         <p:spPr>
           <a:xfrm>
-            <a:off x="0" y="658368"/>
-            <a:ext cx="5120640" cy="5833872"/>
+            <a:off x="629930" y="1783080"/>
+            <a:ext cx="10931835" cy="4270248"/>
           </a:xfrm>
           <a:prstGeom prst="rect">
             <a:avLst/>
@@ -9547,14 +9858,14 @@
       </p:pic>
       <p:sp>
         <p:nvSpPr>
-          <p:cNvPr id="4" name="Text 1"/>
+          <p:cNvPr id="5" name="Text 2"/>
           <p:cNvSpPr/>
           <p:nvPr/>
         </p:nvSpPr>
         <p:spPr>
           <a:xfrm>
-            <a:off x="5349240" y="1005840"/>
-            <a:ext cx="6522415" cy="731520"/>
+            <a:off x="457200" y="6089904"/>
+            <a:ext cx="11277295" cy="347472"/>
           </a:xfrm>
           <a:prstGeom prst="rect">
             <a:avLst/>
@@ -9563,68 +9874,24 @@
           <a:ln/>
         </p:spPr>
         <p:txBody>
-          <a:bodyPr wrap="square" lIns="0" tIns="0" rIns="0" bIns="0" rtlCol="0" anchor="ctr">
-            <a:normAutofit/>
-          </a:bodyPr>
+          <a:bodyPr wrap="square" lIns="0" tIns="0" rIns="0" bIns="0" rtlCol="0" anchor="ctr"/>
           <a:lstStyle/>
           <a:p>
             <a:pPr algn="ctr" indent="0" marL="0">
               <a:buNone/>
             </a:pPr>
             <a:r>
-              <a:rPr lang="en-US" sz="3600" b="1" dirty="0">
-                <a:solidFill>
-                  <a:srgbClr val="990011"/>
+              <a:rPr lang="en-US" sz="1800" i="1" dirty="0">
+                <a:solidFill>
+                  <a:srgbClr val="555555"/>
                 </a:solidFill>
                 <a:latin typeface="Times New Roman" pitchFamily="34" charset="0"/>
                 <a:ea typeface="Times New Roman" pitchFamily="34" charset="-122"/>
                 <a:cs typeface="Times New Roman" pitchFamily="34" charset="-120"/>
               </a:rPr>
-              <a:t>Activity 2: Answer</a:t>
-            </a:r>
-            <a:endParaRPr lang="en-US" sz="3600" dirty="0"/>
-          </a:p>
-        </p:txBody>
-      </p:sp>
-      <p:sp>
-        <p:nvSpPr>
-          <p:cNvPr id="5" name="Text 2"/>
-          <p:cNvSpPr/>
-          <p:nvPr/>
-        </p:nvSpPr>
-        <p:spPr>
-          <a:xfrm>
-            <a:off x="5349240" y="1783080"/>
-            <a:ext cx="6522415" cy="4663440"/>
-          </a:xfrm>
-          <a:prstGeom prst="rect">
-            <a:avLst/>
-          </a:prstGeom>
-          <a:noFill/>
-          <a:ln/>
-        </p:spPr>
-        <p:txBody>
-          <a:bodyPr wrap="square" lIns="0" tIns="0" rIns="0" bIns="0" rtlCol="0" anchor="t"/>
-          <a:lstStyle/>
-          <a:p>
-            <a:pPr algn="l" indent="0" marL="0">
-              <a:spcAft>
-                <a:spcPts val="800"/>
-              </a:spcAft>
-              <a:buNone/>
-            </a:pPr>
-            <a:r>
-              <a:rPr lang="en-US" sz="4000" dirty="0">
-                <a:solidFill>
-                  <a:srgbClr val="111111"/>
-                </a:solidFill>
-                <a:latin typeface="Times New Roman" pitchFamily="34" charset="0"/>
-                <a:ea typeface="Times New Roman" pitchFamily="34" charset="-122"/>
-                <a:cs typeface="Times New Roman" pitchFamily="34" charset="-120"/>
-              </a:rPr>
-              <a:t>A barchan.</a:t>
-            </a:r>
-            <a:endParaRPr lang="en-US" sz="4000" dirty="0"/>
+              <a:t>A crescent-shaped dune seen from above.</a:t>
+            </a:r>
+            <a:endParaRPr lang="en-US" sz="1800" dirty="0"/>
           </a:p>
         </p:txBody>
       </p:sp>
@@ -9734,54 +10001,15 @@
                 <a:ea typeface="Calibri" pitchFamily="34" charset="-122"/>
                 <a:cs typeface="Calibri" pitchFamily="34" charset="-120"/>
               </a:rPr>
-              <a:t>2. SEIF DUNES</a:t>
+              <a:t>2. DUNES</a:t>
             </a:r>
             <a:endParaRPr lang="en-US" sz="1400" dirty="0"/>
-          </a:p>
-        </p:txBody>
-      </p:sp>
-      <p:sp>
-        <p:nvSpPr>
-          <p:cNvPr id="3" name="Text 1"/>
-          <p:cNvSpPr/>
-          <p:nvPr/>
-        </p:nvSpPr>
-        <p:spPr>
-          <a:xfrm>
-            <a:off x="457200" y="1005840"/>
-            <a:ext cx="11277295" cy="731520"/>
-          </a:xfrm>
-          <a:prstGeom prst="rect">
-            <a:avLst/>
-          </a:prstGeom>
-          <a:noFill/>
-          <a:ln/>
-        </p:spPr>
-        <p:txBody>
-          <a:bodyPr wrap="square" lIns="0" tIns="0" rIns="0" bIns="0" rtlCol="0" anchor="ctr"/>
-          <a:lstStyle/>
-          <a:p>
-            <a:pPr algn="ctr" indent="0" marL="0">
-              <a:buNone/>
-            </a:pPr>
-            <a:r>
-              <a:rPr lang="en-US" sz="3600" b="1" dirty="0">
-                <a:solidFill>
-                  <a:srgbClr val="990011"/>
-                </a:solidFill>
-                <a:latin typeface="Times New Roman" pitchFamily="34" charset="0"/>
-                <a:ea typeface="Times New Roman" pitchFamily="34" charset="-122"/>
-                <a:cs typeface="Times New Roman" pitchFamily="34" charset="-120"/>
-              </a:rPr>
-              <a:t>Activity 3</a:t>
-            </a:r>
-            <a:endParaRPr lang="en-US" sz="3600" dirty="0"/>
           </a:p>
         </p:txBody>
       </p:sp>
       <p:pic>
         <p:nvPicPr>
-          <p:cNvPr id="4" name="Image 0" descr="/home/claude/f4/img/v2/seif_big.png">    </p:cNvPr>
+          <p:cNvPr id="3" name="Image 0" descr="/home/claude/f4/img/minesec_sheet.png">    </p:cNvPr>
           <p:cNvPicPr>
             <a:picLocks noChangeAspect="1"/>
           </p:cNvPicPr>
@@ -9795,8 +10023,8 @@
         </p:blipFill>
         <p:spPr>
           <a:xfrm>
-            <a:off x="629930" y="1783080"/>
-            <a:ext cx="10931835" cy="4270248"/>
+            <a:off x="0" y="658368"/>
+            <a:ext cx="5120640" cy="5833872"/>
           </a:xfrm>
           <a:prstGeom prst="rect">
             <a:avLst/>
@@ -9805,14 +10033,14 @@
       </p:pic>
       <p:sp>
         <p:nvSpPr>
-          <p:cNvPr id="5" name="Text 2"/>
+          <p:cNvPr id="4" name="Text 1"/>
           <p:cNvSpPr/>
           <p:nvPr/>
         </p:nvSpPr>
         <p:spPr>
           <a:xfrm>
-            <a:off x="457200" y="6089904"/>
-            <a:ext cx="11277295" cy="347472"/>
+            <a:off x="5349240" y="1005840"/>
+            <a:ext cx="6522415" cy="731520"/>
           </a:xfrm>
           <a:prstGeom prst="rect">
             <a:avLst/>
@@ -9821,24 +10049,68 @@
           <a:ln/>
         </p:spPr>
         <p:txBody>
-          <a:bodyPr wrap="square" lIns="0" tIns="0" rIns="0" bIns="0" rtlCol="0" anchor="ctr"/>
+          <a:bodyPr wrap="square" lIns="0" tIns="0" rIns="0" bIns="0" rtlCol="0" anchor="ctr">
+            <a:normAutofit/>
+          </a:bodyPr>
           <a:lstStyle/>
           <a:p>
             <a:pPr algn="ctr" indent="0" marL="0">
               <a:buNone/>
             </a:pPr>
             <a:r>
-              <a:rPr lang="en-US" sz="1800" i="1" dirty="0">
-                <a:solidFill>
-                  <a:srgbClr val="555555"/>
+              <a:rPr lang="en-US" sz="3600" b="1" dirty="0">
+                <a:solidFill>
+                  <a:srgbClr val="990011"/>
                 </a:solidFill>
                 <a:latin typeface="Times New Roman" pitchFamily="34" charset="0"/>
                 <a:ea typeface="Times New Roman" pitchFamily="34" charset="-122"/>
                 <a:cs typeface="Times New Roman" pitchFamily="34" charset="-120"/>
               </a:rPr>
-              <a:t>Long, straight lines of dunes seen from above.</a:t>
-            </a:r>
-            <a:endParaRPr lang="en-US" sz="1800" dirty="0"/>
+              <a:t>Activity 2: Question</a:t>
+            </a:r>
+            <a:endParaRPr lang="en-US" sz="3600" dirty="0"/>
+          </a:p>
+        </p:txBody>
+      </p:sp>
+      <p:sp>
+        <p:nvSpPr>
+          <p:cNvPr id="5" name="Text 2"/>
+          <p:cNvSpPr/>
+          <p:nvPr/>
+        </p:nvSpPr>
+        <p:spPr>
+          <a:xfrm>
+            <a:off x="5349240" y="1783080"/>
+            <a:ext cx="6522415" cy="4663440"/>
+          </a:xfrm>
+          <a:prstGeom prst="rect">
+            <a:avLst/>
+          </a:prstGeom>
+          <a:noFill/>
+          <a:ln/>
+        </p:spPr>
+        <p:txBody>
+          <a:bodyPr wrap="square" lIns="0" tIns="0" rIns="0" bIns="0" rtlCol="0" anchor="t"/>
+          <a:lstStyle/>
+          <a:p>
+            <a:pPr algn="l" indent="0" marL="0">
+              <a:spcAft>
+                <a:spcPts val="800"/>
+              </a:spcAft>
+              <a:buNone/>
+            </a:pPr>
+            <a:r>
+              <a:rPr lang="en-US" sz="4000" dirty="0">
+                <a:solidFill>
+                  <a:srgbClr val="111111"/>
+                </a:solidFill>
+                <a:latin typeface="Times New Roman" pitchFamily="34" charset="0"/>
+                <a:ea typeface="Times New Roman" pitchFamily="34" charset="-122"/>
+                <a:cs typeface="Times New Roman" pitchFamily="34" charset="-120"/>
+              </a:rPr>
+              <a:t>What is this crescent-shaped dune called?</a:t>
+            </a:r>
+            <a:endParaRPr lang="en-US" sz="4000" dirty="0"/>
           </a:p>
         </p:txBody>
       </p:sp>
@@ -9948,7 +10220,7 @@
                 <a:ea typeface="Calibri" pitchFamily="34" charset="-122"/>
                 <a:cs typeface="Calibri" pitchFamily="34" charset="-120"/>
               </a:rPr>
-              <a:t>2. SEIF DUNES</a:t>
+              <a:t>2. DUNES</a:t>
             </a:r>
             <a:endParaRPr lang="en-US" sz="1400" dirty="0"/>
           </a:p>
@@ -10013,7 +10285,7 @@
                 <a:ea typeface="Times New Roman" pitchFamily="34" charset="-122"/>
                 <a:cs typeface="Times New Roman" pitchFamily="34" charset="-120"/>
               </a:rPr>
-              <a:t>Activity 3: Question</a:t>
+              <a:t>Activity 2: Answer</a:t>
             </a:r>
             <a:endParaRPr lang="en-US" sz="3600" dirty="0"/>
           </a:p>
@@ -10055,7 +10327,7 @@
                 <a:ea typeface="Times New Roman" pitchFamily="34" charset="-122"/>
                 <a:cs typeface="Times New Roman" pitchFamily="34" charset="-120"/>
               </a:rPr>
-              <a:t>What do we call these long, narrow dunes?</a:t>
+              <a:t>A barchan.</a:t>
             </a:r>
             <a:endParaRPr lang="en-US" sz="4000" dirty="0"/>
           </a:p>
@@ -10167,15 +10439,54 @@
                 <a:ea typeface="Calibri" pitchFamily="34" charset="-122"/>
                 <a:cs typeface="Calibri" pitchFamily="34" charset="-120"/>
               </a:rPr>
-              <a:t>2. SEIF DUNES</a:t>
+              <a:t>2. DUNES</a:t>
             </a:r>
             <a:endParaRPr lang="en-US" sz="1400" dirty="0"/>
+          </a:p>
+        </p:txBody>
+      </p:sp>
+      <p:sp>
+        <p:nvSpPr>
+          <p:cNvPr id="3" name="Text 1"/>
+          <p:cNvSpPr/>
+          <p:nvPr/>
+        </p:nvSpPr>
+        <p:spPr>
+          <a:xfrm>
+            <a:off x="457200" y="1005840"/>
+            <a:ext cx="11277295" cy="731520"/>
+          </a:xfrm>
+          <a:prstGeom prst="rect">
+            <a:avLst/>
+          </a:prstGeom>
+          <a:noFill/>
+          <a:ln/>
+        </p:spPr>
+        <p:txBody>
+          <a:bodyPr wrap="square" lIns="0" tIns="0" rIns="0" bIns="0" rtlCol="0" anchor="ctr"/>
+          <a:lstStyle/>
+          <a:p>
+            <a:pPr algn="ctr" indent="0" marL="0">
+              <a:buNone/>
+            </a:pPr>
+            <a:r>
+              <a:rPr lang="en-US" sz="3600" b="1" dirty="0">
+                <a:solidFill>
+                  <a:srgbClr val="990011"/>
+                </a:solidFill>
+                <a:latin typeface="Times New Roman" pitchFamily="34" charset="0"/>
+                <a:ea typeface="Times New Roman" pitchFamily="34" charset="-122"/>
+                <a:cs typeface="Times New Roman" pitchFamily="34" charset="-120"/>
+              </a:rPr>
+              <a:t>Activity 3</a:t>
+            </a:r>
+            <a:endParaRPr lang="en-US" sz="3600" dirty="0"/>
           </a:p>
         </p:txBody>
       </p:sp>
       <p:pic>
         <p:nvPicPr>
-          <p:cNvPr id="3" name="Image 0" descr="/home/claude/f4/img/minesec_sheet.png">    </p:cNvPr>
+          <p:cNvPr id="4" name="Image 0" descr="/home/claude/f4/img/v2/seif_big.png">    </p:cNvPr>
           <p:cNvPicPr>
             <a:picLocks noChangeAspect="1"/>
           </p:cNvPicPr>
@@ -10189,8 +10500,8 @@
         </p:blipFill>
         <p:spPr>
           <a:xfrm>
-            <a:off x="0" y="658368"/>
-            <a:ext cx="5120640" cy="5833872"/>
+            <a:off x="629930" y="1783080"/>
+            <a:ext cx="10931835" cy="4270248"/>
           </a:xfrm>
           <a:prstGeom prst="rect">
             <a:avLst/>
@@ -10199,14 +10510,14 @@
       </p:pic>
       <p:sp>
         <p:nvSpPr>
-          <p:cNvPr id="4" name="Text 1"/>
+          <p:cNvPr id="5" name="Text 2"/>
           <p:cNvSpPr/>
           <p:nvPr/>
         </p:nvSpPr>
         <p:spPr>
           <a:xfrm>
-            <a:off x="5349240" y="1005840"/>
-            <a:ext cx="6522415" cy="731520"/>
+            <a:off x="457200" y="6089904"/>
+            <a:ext cx="11277295" cy="347472"/>
           </a:xfrm>
           <a:prstGeom prst="rect">
             <a:avLst/>
@@ -10215,68 +10526,24 @@
           <a:ln/>
         </p:spPr>
         <p:txBody>
-          <a:bodyPr wrap="square" lIns="0" tIns="0" rIns="0" bIns="0" rtlCol="0" anchor="ctr">
-            <a:normAutofit/>
-          </a:bodyPr>
+          <a:bodyPr wrap="square" lIns="0" tIns="0" rIns="0" bIns="0" rtlCol="0" anchor="ctr"/>
           <a:lstStyle/>
           <a:p>
             <a:pPr algn="ctr" indent="0" marL="0">
               <a:buNone/>
             </a:pPr>
             <a:r>
-              <a:rPr lang="en-US" sz="3600" b="1" dirty="0">
-                <a:solidFill>
-                  <a:srgbClr val="990011"/>
+              <a:rPr lang="en-US" sz="1800" i="1" dirty="0">
+                <a:solidFill>
+                  <a:srgbClr val="555555"/>
                 </a:solidFill>
                 <a:latin typeface="Times New Roman" pitchFamily="34" charset="0"/>
                 <a:ea typeface="Times New Roman" pitchFamily="34" charset="-122"/>
                 <a:cs typeface="Times New Roman" pitchFamily="34" charset="-120"/>
               </a:rPr>
-              <a:t>Activity 3: Answer</a:t>
-            </a:r>
-            <a:endParaRPr lang="en-US" sz="3600" dirty="0"/>
-          </a:p>
-        </p:txBody>
-      </p:sp>
-      <p:sp>
-        <p:nvSpPr>
-          <p:cNvPr id="5" name="Text 2"/>
-          <p:cNvSpPr/>
-          <p:nvPr/>
-        </p:nvSpPr>
-        <p:spPr>
-          <a:xfrm>
-            <a:off x="5349240" y="1783080"/>
-            <a:ext cx="6522415" cy="4663440"/>
-          </a:xfrm>
-          <a:prstGeom prst="rect">
-            <a:avLst/>
-          </a:prstGeom>
-          <a:noFill/>
-          <a:ln/>
-        </p:spPr>
-        <p:txBody>
-          <a:bodyPr wrap="square" lIns="0" tIns="0" rIns="0" bIns="0" rtlCol="0" anchor="t"/>
-          <a:lstStyle/>
-          <a:p>
-            <a:pPr algn="l" indent="0" marL="0">
-              <a:spcAft>
-                <a:spcPts val="800"/>
-              </a:spcAft>
-              <a:buNone/>
-            </a:pPr>
-            <a:r>
-              <a:rPr lang="en-US" sz="4000" dirty="0">
-                <a:solidFill>
-                  <a:srgbClr val="111111"/>
-                </a:solidFill>
-                <a:latin typeface="Times New Roman" pitchFamily="34" charset="0"/>
-                <a:ea typeface="Times New Roman" pitchFamily="34" charset="-122"/>
-                <a:cs typeface="Times New Roman" pitchFamily="34" charset="-120"/>
-              </a:rPr>
-              <a:t>Seif dunes.</a:t>
-            </a:r>
-            <a:endParaRPr lang="en-US" sz="4000" dirty="0"/>
+              <a:t>Long, narrow dunes.</a:t>
+            </a:r>
+            <a:endParaRPr lang="en-US" sz="1800" dirty="0"/>
           </a:p>
         </p:txBody>
       </p:sp>
@@ -10386,7 +10653,7 @@
                 <a:ea typeface="Calibri" pitchFamily="34" charset="-122"/>
                 <a:cs typeface="Calibri" pitchFamily="34" charset="-120"/>
               </a:rPr>
-              <a:t>BOARD SUMMARY</a:t>
+              <a:t>2. DUNES</a:t>
             </a:r>
             <a:endParaRPr lang="en-US" sz="1400" dirty="0"/>
           </a:p>
@@ -10451,7 +10718,7 @@
                 <a:ea typeface="Times New Roman" pitchFamily="34" charset="-122"/>
                 <a:cs typeface="Times New Roman" pitchFamily="34" charset="-120"/>
               </a:rPr>
-              <a:t>Board Summary</a:t>
+              <a:t>Activity 3: Question</a:t>
             </a:r>
             <a:endParaRPr lang="en-US" sz="3600" dirty="0"/>
           </a:p>
@@ -10485,7 +10752,7 @@
               <a:buNone/>
             </a:pPr>
             <a:r>
-              <a:rPr lang="en-US" sz="4000" b="1" dirty="0">
+              <a:rPr lang="en-US" sz="4000" dirty="0">
                 <a:solidFill>
                   <a:srgbClr val="111111"/>
                 </a:solidFill>
@@ -10493,47 +10760,7 @@
                 <a:ea typeface="Times New Roman" pitchFamily="34" charset="-122"/>
                 <a:cs typeface="Times New Roman" pitchFamily="34" charset="-120"/>
               </a:rPr>
-              <a:t>Topic: Denudation Processes, Landforms and Impacts on Man</a:t>
-            </a:r>
-            <a:endParaRPr lang="en-US" sz="4000" dirty="0"/>
-          </a:p>
-          <a:p>
-            <a:pPr algn="l" indent="0" marL="0">
-              <a:spcAft>
-                <a:spcPts val="800"/>
-              </a:spcAft>
-              <a:buNone/>
-            </a:pPr>
-            <a:r>
-              <a:rPr lang="en-US" sz="4000" b="1" dirty="0">
-                <a:solidFill>
-                  <a:srgbClr val="111111"/>
-                </a:solidFill>
-                <a:latin typeface="Times New Roman" pitchFamily="34" charset="0"/>
-                <a:ea typeface="Times New Roman" pitchFamily="34" charset="-122"/>
-                <a:cs typeface="Times New Roman" pitchFamily="34" charset="-120"/>
-              </a:rPr>
-              <a:t>Sub-topic: Hot Desert Landscapes: Wind Action and Human Adaptation</a:t>
-            </a:r>
-            <a:endParaRPr lang="en-US" sz="4000" dirty="0"/>
-          </a:p>
-          <a:p>
-            <a:pPr algn="l" indent="0" marL="0">
-              <a:spcAft>
-                <a:spcPts val="800"/>
-              </a:spcAft>
-              <a:buNone/>
-            </a:pPr>
-            <a:r>
-              <a:rPr lang="en-US" sz="4000" b="1" dirty="0">
-                <a:solidFill>
-                  <a:srgbClr val="990011"/>
-                </a:solidFill>
-                <a:latin typeface="Times New Roman" pitchFamily="34" charset="0"/>
-                <a:ea typeface="Times New Roman" pitchFamily="34" charset="-122"/>
-                <a:cs typeface="Times New Roman" pitchFamily="34" charset="-120"/>
-              </a:rPr>
-              <a:t>Lesson 28: Depositional Features of Wind Action</a:t>
+              <a:t>What do we call these long, narrow dunes?</a:t>
             </a:r>
             <a:endParaRPr lang="en-US" sz="4000" dirty="0"/>
           </a:p>
@@ -10645,7 +10872,7 @@
                 <a:ea typeface="Calibri" pitchFamily="34" charset="-122"/>
                 <a:cs typeface="Calibri" pitchFamily="34" charset="-120"/>
               </a:rPr>
-              <a:t>BOARD SUMMARY</a:t>
+              <a:t>2. DUNES</a:t>
             </a:r>
             <a:endParaRPr lang="en-US" sz="1400" dirty="0"/>
           </a:p>
@@ -10710,7 +10937,7 @@
                 <a:ea typeface="Times New Roman" pitchFamily="34" charset="-122"/>
                 <a:cs typeface="Times New Roman" pitchFamily="34" charset="-120"/>
               </a:rPr>
-              <a:t>DEFINITIONS</a:t>
+              <a:t>Activity 3: Answer</a:t>
             </a:r>
             <a:endParaRPr lang="en-US" sz="3600" dirty="0"/>
           </a:p>
@@ -10744,7 +10971,7 @@
               <a:buNone/>
             </a:pPr>
             <a:r>
-              <a:rPr lang="en-US" sz="4000" i="1" dirty="0">
+              <a:rPr lang="en-US" sz="4000" dirty="0">
                 <a:solidFill>
                   <a:srgbClr val="111111"/>
                 </a:solidFill>
@@ -10752,44 +10979,7 @@
                 <a:ea typeface="Times New Roman" pitchFamily="34" charset="-122"/>
                 <a:cs typeface="Times New Roman" pitchFamily="34" charset="-120"/>
               </a:rPr>
-              <a:t>The key terms of this lesson are defined as follows:</a:t>
-            </a:r>
-            <a:endParaRPr lang="en-US" sz="4000" dirty="0"/>
-          </a:p>
-          <a:p>
-            <a:pPr algn="l" indent="0" marL="0">
-              <a:spcAft>
-                <a:spcPts val="800"/>
-              </a:spcAft>
-              <a:buNone/>
-            </a:pPr>
-            <a:r>
-              <a:rPr lang="en-US" sz="4000" b="1" dirty="0">
-                <a:solidFill>
-                  <a:srgbClr val="111111"/>
-                </a:solidFill>
-                <a:latin typeface="Times New Roman" pitchFamily="34" charset="0"/>
-                <a:ea typeface="Times New Roman" pitchFamily="34" charset="-122"/>
-                <a:cs typeface="Times New Roman" pitchFamily="34" charset="-120"/>
-              </a:rPr>
-              <a:t>Wind deposition: </a:t>
-            </a:r>
-            <a:pPr algn="l" indent="0" marL="0">
-              <a:spcAft>
-                <a:spcPts val="800"/>
-              </a:spcAft>
-              <a:buNone/>
-            </a:pPr>
-            <a:r>
-              <a:rPr lang="en-US" sz="4000" dirty="0">
-                <a:solidFill>
-                  <a:srgbClr val="111111"/>
-                </a:solidFill>
-                <a:latin typeface="Times New Roman" pitchFamily="34" charset="0"/>
-                <a:ea typeface="Times New Roman" pitchFamily="34" charset="-122"/>
-                <a:cs typeface="Times New Roman" pitchFamily="34" charset="-120"/>
-              </a:rPr>
-              <a:t>It is the dropping of sand and dust carried by the wind.</a:t>
+              <a:t>Seif dunes.</a:t>
             </a:r>
             <a:endParaRPr lang="en-US" sz="4000" dirty="0"/>
           </a:p>
@@ -11933,7 +12123,7 @@
         <p:spPr>
           <a:xfrm>
             <a:off x="0" y="658368"/>
-            <a:ext cx="3840480" cy="5833872"/>
+            <a:ext cx="5120640" cy="5833872"/>
           </a:xfrm>
           <a:prstGeom prst="rect">
             <a:avLst/>
@@ -11948,8 +12138,8 @@
         </p:nvSpPr>
         <p:spPr>
           <a:xfrm>
-            <a:off x="4069080" y="1005840"/>
-            <a:ext cx="7802575" cy="731520"/>
+            <a:off x="5349240" y="1005840"/>
+            <a:ext cx="6522415" cy="731520"/>
           </a:xfrm>
           <a:prstGeom prst="rect">
             <a:avLst/>
@@ -11975,7 +12165,7 @@
                 <a:ea typeface="Times New Roman" pitchFamily="34" charset="-122"/>
                 <a:cs typeface="Times New Roman" pitchFamily="34" charset="-120"/>
               </a:rPr>
-              <a:t>1. Causes of Wind Deposition</a:t>
+              <a:t>Board Summary</a:t>
             </a:r>
             <a:endParaRPr lang="en-US" sz="3600" dirty="0"/>
           </a:p>
@@ -11989,8 +12179,8 @@
         </p:nvSpPr>
         <p:spPr>
           <a:xfrm>
-            <a:off x="4069080" y="1783080"/>
-            <a:ext cx="7802575" cy="4663440"/>
+            <a:off x="5349240" y="1783080"/>
+            <a:ext cx="6522415" cy="4663440"/>
           </a:xfrm>
           <a:prstGeom prst="rect">
             <a:avLst/>
@@ -12009,7 +12199,7 @@
               <a:buNone/>
             </a:pPr>
             <a:r>
-              <a:rPr lang="en-US" sz="4000" i="1" dirty="0">
+              <a:rPr lang="en-US" sz="3200" b="1" dirty="0">
                 <a:solidFill>
                   <a:srgbClr val="111111"/>
                 </a:solidFill>
@@ -12017,9 +12207,9 @@
                 <a:ea typeface="Times New Roman" pitchFamily="34" charset="-122"/>
                 <a:cs typeface="Times New Roman" pitchFamily="34" charset="-120"/>
               </a:rPr>
-              <a:t>The wind drops sand for the following reasons:</a:t>
-            </a:r>
-            <a:endParaRPr lang="en-US" sz="4000" dirty="0"/>
+              <a:t>Topic: Denudation Processes, Landforms and Impacts on Man</a:t>
+            </a:r>
+            <a:endParaRPr lang="en-US" sz="3200" dirty="0"/>
           </a:p>
           <a:p>
             <a:pPr algn="l" indent="0" marL="0">
@@ -12029,7 +12219,7 @@
               <a:buNone/>
             </a:pPr>
             <a:r>
-              <a:rPr lang="en-US" sz="4000" b="1" dirty="0">
+              <a:rPr lang="en-US" sz="3200" b="1" dirty="0">
                 <a:solidFill>
                   <a:srgbClr val="111111"/>
                 </a:solidFill>
@@ -12037,8 +12227,11 @@
                 <a:ea typeface="Times New Roman" pitchFamily="34" charset="-122"/>
                 <a:cs typeface="Times New Roman" pitchFamily="34" charset="-120"/>
               </a:rPr>
-              <a:t>Slower wind: </a:t>
-            </a:r>
+              <a:t>Sub-topic: Hot Desert Landscapes: Wind Action and Human Adaptation</a:t>
+            </a:r>
+            <a:endParaRPr lang="en-US" sz="3200" dirty="0"/>
+          </a:p>
+          <a:p>
             <a:pPr algn="l" indent="0" marL="0">
               <a:spcAft>
                 <a:spcPts val="800"/>
@@ -12046,54 +12239,17 @@
               <a:buNone/>
             </a:pPr>
             <a:r>
-              <a:rPr lang="en-US" sz="4000" dirty="0">
-                <a:solidFill>
-                  <a:srgbClr val="111111"/>
+              <a:rPr lang="en-US" sz="3200" b="1" dirty="0">
+                <a:solidFill>
+                  <a:srgbClr val="990011"/>
                 </a:solidFill>
                 <a:latin typeface="Times New Roman" pitchFamily="34" charset="0"/>
                 <a:ea typeface="Times New Roman" pitchFamily="34" charset="-122"/>
                 <a:cs typeface="Times New Roman" pitchFamily="34" charset="-120"/>
               </a:rPr>
-              <a:t>The wind drops sand when it loses its force.</a:t>
-            </a:r>
-            <a:endParaRPr lang="en-US" sz="4000" dirty="0"/>
-          </a:p>
-          <a:p>
-            <a:pPr algn="l" indent="0" marL="0">
-              <a:spcAft>
-                <a:spcPts val="800"/>
-              </a:spcAft>
-              <a:buNone/>
-            </a:pPr>
-            <a:r>
-              <a:rPr lang="en-US" sz="4000" b="1" dirty="0">
-                <a:solidFill>
-                  <a:srgbClr val="111111"/>
-                </a:solidFill>
-                <a:latin typeface="Times New Roman" pitchFamily="34" charset="0"/>
-                <a:ea typeface="Times New Roman" pitchFamily="34" charset="-122"/>
-                <a:cs typeface="Times New Roman" pitchFamily="34" charset="-120"/>
-              </a:rPr>
-              <a:t>Obstacles: </a:t>
-            </a:r>
-            <a:pPr algn="l" indent="0" marL="0">
-              <a:spcAft>
-                <a:spcPts val="800"/>
-              </a:spcAft>
-              <a:buNone/>
-            </a:pPr>
-            <a:r>
-              <a:rPr lang="en-US" sz="4000" dirty="0">
-                <a:solidFill>
-                  <a:srgbClr val="111111"/>
-                </a:solidFill>
-                <a:latin typeface="Times New Roman" pitchFamily="34" charset="0"/>
-                <a:ea typeface="Times New Roman" pitchFamily="34" charset="-122"/>
-                <a:cs typeface="Times New Roman" pitchFamily="34" charset="-120"/>
-              </a:rPr>
-              <a:t>Walls, stones and bushes slow the wind and make it drop sand.</a:t>
-            </a:r>
-            <a:endParaRPr lang="en-US" sz="4000" dirty="0"/>
+              <a:t>Lesson 28: Depositional Features of Wind Action</a:t>
+            </a:r>
+            <a:endParaRPr lang="en-US" sz="3200" dirty="0"/>
           </a:p>
         </p:txBody>
       </p:sp>
@@ -12226,7 +12382,7 @@
         <p:spPr>
           <a:xfrm>
             <a:off x="0" y="658368"/>
-            <a:ext cx="5120640" cy="5833872"/>
+            <a:ext cx="3840480" cy="5833872"/>
           </a:xfrm>
           <a:prstGeom prst="rect">
             <a:avLst/>
@@ -12241,8 +12397,8 @@
         </p:nvSpPr>
         <p:spPr>
           <a:xfrm>
-            <a:off x="5349240" y="1005840"/>
-            <a:ext cx="6522415" cy="731520"/>
+            <a:off x="4069080" y="1005840"/>
+            <a:ext cx="7802575" cy="731520"/>
           </a:xfrm>
           <a:prstGeom prst="rect">
             <a:avLst/>
@@ -12268,7 +12424,7 @@
                 <a:ea typeface="Times New Roman" pitchFamily="34" charset="-122"/>
                 <a:cs typeface="Times New Roman" pitchFamily="34" charset="-120"/>
               </a:rPr>
-              <a:t>1. Causes of Wind Deposition (continued)</a:t>
+              <a:t>DEFINITIONS</a:t>
             </a:r>
             <a:endParaRPr lang="en-US" sz="3600" dirty="0"/>
           </a:p>
@@ -12282,8 +12438,8 @@
         </p:nvSpPr>
         <p:spPr>
           <a:xfrm>
-            <a:off x="5349240" y="1783080"/>
-            <a:ext cx="6522415" cy="4663440"/>
+            <a:off x="4069080" y="1783080"/>
+            <a:ext cx="7802575" cy="4663440"/>
           </a:xfrm>
           <a:prstGeom prst="rect">
             <a:avLst/>
@@ -12302,7 +12458,7 @@
               <a:buNone/>
             </a:pPr>
             <a:r>
-              <a:rPr lang="en-US" sz="4000" b="1" dirty="0">
+              <a:rPr lang="en-US" sz="4000" i="1" dirty="0">
                 <a:solidFill>
                   <a:srgbClr val="111111"/>
                 </a:solidFill>
@@ -12310,8 +12466,11 @@
                 <a:ea typeface="Times New Roman" pitchFamily="34" charset="-122"/>
                 <a:cs typeface="Times New Roman" pitchFamily="34" charset="-120"/>
               </a:rPr>
-              <a:t>Rain: </a:t>
-            </a:r>
+              <a:t>The key terms of this lesson are defined as follows:</a:t>
+            </a:r>
+            <a:endParaRPr lang="en-US" sz="4000" dirty="0"/>
+          </a:p>
+          <a:p>
             <a:pPr algn="l" indent="0" marL="0">
               <a:spcAft>
                 <a:spcPts val="800"/>
@@ -12319,7 +12478,7 @@
               <a:buNone/>
             </a:pPr>
             <a:r>
-              <a:rPr lang="en-US" sz="4000" dirty="0">
+              <a:rPr lang="en-US" sz="4000" b="1" dirty="0">
                 <a:solidFill>
                   <a:srgbClr val="111111"/>
                 </a:solidFill>
@@ -12327,7 +12486,61 @@
                 <a:ea typeface="Times New Roman" pitchFamily="34" charset="-122"/>
                 <a:cs typeface="Times New Roman" pitchFamily="34" charset="-120"/>
               </a:rPr>
-              <a:t>Wet sand becomes heavy and stops moving.</a:t>
+              <a:t>Wind deposition: </a:t>
+            </a:r>
+            <a:pPr algn="l" indent="0" marL="0">
+              <a:spcAft>
+                <a:spcPts val="800"/>
+              </a:spcAft>
+              <a:buNone/>
+            </a:pPr>
+            <a:r>
+              <a:rPr lang="en-US" sz="4000" dirty="0">
+                <a:solidFill>
+                  <a:srgbClr val="111111"/>
+                </a:solidFill>
+                <a:latin typeface="Times New Roman" pitchFamily="34" charset="0"/>
+                <a:ea typeface="Times New Roman" pitchFamily="34" charset="-122"/>
+                <a:cs typeface="Times New Roman" pitchFamily="34" charset="-120"/>
+              </a:rPr>
+              <a:t>It is the dropping of the sand and dust carried by the wind.</a:t>
+            </a:r>
+            <a:endParaRPr lang="en-US" sz="4000" dirty="0"/>
+          </a:p>
+          <a:p>
+            <a:pPr algn="l" indent="0" marL="0">
+              <a:spcAft>
+                <a:spcPts val="800"/>
+              </a:spcAft>
+              <a:buNone/>
+            </a:pPr>
+            <a:r>
+              <a:rPr lang="en-US" sz="4000" b="1" dirty="0">
+                <a:solidFill>
+                  <a:srgbClr val="111111"/>
+                </a:solidFill>
+                <a:latin typeface="Times New Roman" pitchFamily="34" charset="0"/>
+                <a:ea typeface="Times New Roman" pitchFamily="34" charset="-122"/>
+                <a:cs typeface="Times New Roman" pitchFamily="34" charset="-120"/>
+              </a:rPr>
+              <a:t>Sand dune: </a:t>
+            </a:r>
+            <a:pPr algn="l" indent="0" marL="0">
+              <a:spcAft>
+                <a:spcPts val="800"/>
+              </a:spcAft>
+              <a:buNone/>
+            </a:pPr>
+            <a:r>
+              <a:rPr lang="en-US" sz="4000" dirty="0">
+                <a:solidFill>
+                  <a:srgbClr val="111111"/>
+                </a:solidFill>
+                <a:latin typeface="Times New Roman" pitchFamily="34" charset="0"/>
+                <a:ea typeface="Times New Roman" pitchFamily="34" charset="-122"/>
+                <a:cs typeface="Times New Roman" pitchFamily="34" charset="-120"/>
+              </a:rPr>
+              <a:t>It is a hill or ridge of sand built by the wind.</a:t>
             </a:r>
             <a:endParaRPr lang="en-US" sz="4000" dirty="0"/>
           </a:p>
@@ -12462,7 +12675,7 @@
         <p:spPr>
           <a:xfrm>
             <a:off x="0" y="658368"/>
-            <a:ext cx="1463040" cy="5833872"/>
+            <a:ext cx="3840480" cy="5833872"/>
           </a:xfrm>
           <a:prstGeom prst="rect">
             <a:avLst/>
@@ -12477,8 +12690,8 @@
         </p:nvSpPr>
         <p:spPr>
           <a:xfrm>
-            <a:off x="1691640" y="1005840"/>
-            <a:ext cx="10180015" cy="731520"/>
+            <a:off x="4069080" y="1005840"/>
+            <a:ext cx="7802575" cy="731520"/>
           </a:xfrm>
           <a:prstGeom prst="rect">
             <a:avLst/>
@@ -12504,7 +12717,7 @@
                 <a:ea typeface="Times New Roman" pitchFamily="34" charset="-122"/>
                 <a:cs typeface="Times New Roman" pitchFamily="34" charset="-120"/>
               </a:rPr>
-              <a:t>2. Depositional Features</a:t>
+              <a:t>1. Depositional Features of Wind Action</a:t>
             </a:r>
             <a:endParaRPr lang="en-US" sz="3600" dirty="0"/>
           </a:p>
@@ -12518,8 +12731,8 @@
         </p:nvSpPr>
         <p:spPr>
           <a:xfrm>
-            <a:off x="1691640" y="1783080"/>
-            <a:ext cx="10180015" cy="4663440"/>
+            <a:off x="4069080" y="1783080"/>
+            <a:ext cx="7802575" cy="4663440"/>
           </a:xfrm>
           <a:prstGeom prst="rect">
             <a:avLst/>
@@ -12546,7 +12759,7 @@
                 <a:ea typeface="Times New Roman" pitchFamily="34" charset="-122"/>
                 <a:cs typeface="Times New Roman" pitchFamily="34" charset="-120"/>
               </a:rPr>
-              <a:t>Wind deposition forms the following features:</a:t>
+              <a:t>Wind deposition takes place and forms features as follows:</a:t>
             </a:r>
             <a:endParaRPr lang="en-US" sz="4000" dirty="0"/>
           </a:p>
@@ -12566,7 +12779,7 @@
                 <a:ea typeface="Times New Roman" pitchFamily="34" charset="-122"/>
                 <a:cs typeface="Times New Roman" pitchFamily="34" charset="-120"/>
               </a:rPr>
-              <a:t>Sand dune: </a:t>
+              <a:t>Causes of deposition: </a:t>
             </a:r>
             <a:pPr algn="l" indent="0" marL="0">
               <a:spcAft>
@@ -12583,44 +12796,7 @@
                 <a:ea typeface="Times New Roman" pitchFamily="34" charset="-122"/>
                 <a:cs typeface="Times New Roman" pitchFamily="34" charset="-120"/>
               </a:rPr>
-              <a:t>It is a hill of sand with a gentle windward slope and a steep slip face.</a:t>
-            </a:r>
-            <a:endParaRPr lang="en-US" sz="4000" dirty="0"/>
-          </a:p>
-          <a:p>
-            <a:pPr algn="l" indent="0" marL="0">
-              <a:spcAft>
-                <a:spcPts val="800"/>
-              </a:spcAft>
-              <a:buNone/>
-            </a:pPr>
-            <a:r>
-              <a:rPr lang="en-US" sz="4000" b="1" dirty="0">
-                <a:solidFill>
-                  <a:srgbClr val="111111"/>
-                </a:solidFill>
-                <a:latin typeface="Times New Roman" pitchFamily="34" charset="0"/>
-                <a:ea typeface="Times New Roman" pitchFamily="34" charset="-122"/>
-                <a:cs typeface="Times New Roman" pitchFamily="34" charset="-120"/>
-              </a:rPr>
-              <a:t>Barchan: </a:t>
-            </a:r>
-            <a:pPr algn="l" indent="0" marL="0">
-              <a:spcAft>
-                <a:spcPts val="800"/>
-              </a:spcAft>
-              <a:buNone/>
-            </a:pPr>
-            <a:r>
-              <a:rPr lang="en-US" sz="4000" dirty="0">
-                <a:solidFill>
-                  <a:srgbClr val="111111"/>
-                </a:solidFill>
-                <a:latin typeface="Times New Roman" pitchFamily="34" charset="0"/>
-                <a:ea typeface="Times New Roman" pitchFamily="34" charset="-122"/>
-                <a:cs typeface="Times New Roman" pitchFamily="34" charset="-120"/>
-              </a:rPr>
-              <a:t>It is a crescent-shaped dune whose horns point in the direction of the wind.</a:t>
+              <a:t>The wind drops sand when it slows down, meets an obstacle such as a rock or a bush, or when the sand becomes wet.</a:t>
             </a:r>
             <a:endParaRPr lang="en-US" sz="4000" dirty="0"/>
           </a:p>
@@ -12797,7 +12973,7 @@
                 <a:ea typeface="Times New Roman" pitchFamily="34" charset="-122"/>
                 <a:cs typeface="Times New Roman" pitchFamily="34" charset="-120"/>
               </a:rPr>
-              <a:t>2. Depositional Features (continued)</a:t>
+              <a:t>1. Depositional Features of Wind Action (continued)</a:t>
             </a:r>
             <a:endParaRPr lang="en-US" sz="3600" dirty="0"/>
           </a:p>
@@ -12839,7 +13015,7 @@
                 <a:ea typeface="Times New Roman" pitchFamily="34" charset="-122"/>
                 <a:cs typeface="Times New Roman" pitchFamily="34" charset="-120"/>
               </a:rPr>
-              <a:t>Seif dune: </a:t>
+              <a:t>Sand sheets and ripples: </a:t>
             </a:r>
             <a:pPr algn="l" indent="0" marL="0">
               <a:spcAft>
@@ -12856,44 +13032,7 @@
                 <a:ea typeface="Times New Roman" pitchFamily="34" charset="-122"/>
                 <a:cs typeface="Times New Roman" pitchFamily="34" charset="-120"/>
               </a:rPr>
-              <a:t>It is a long, straight ridge of sand lying parallel to the wind.</a:t>
-            </a:r>
-            <a:endParaRPr lang="en-US" sz="4000" dirty="0"/>
-          </a:p>
-          <a:p>
-            <a:pPr algn="l" indent="0" marL="0">
-              <a:spcAft>
-                <a:spcPts val="800"/>
-              </a:spcAft>
-              <a:buNone/>
-            </a:pPr>
-            <a:r>
-              <a:rPr lang="en-US" sz="4000" b="1" dirty="0">
-                <a:solidFill>
-                  <a:srgbClr val="111111"/>
-                </a:solidFill>
-                <a:latin typeface="Times New Roman" pitchFamily="34" charset="0"/>
-                <a:ea typeface="Times New Roman" pitchFamily="34" charset="-122"/>
-                <a:cs typeface="Times New Roman" pitchFamily="34" charset="-120"/>
-              </a:rPr>
-              <a:t>Loess: </a:t>
-            </a:r>
-            <a:pPr algn="l" indent="0" marL="0">
-              <a:spcAft>
-                <a:spcPts val="800"/>
-              </a:spcAft>
-              <a:buNone/>
-            </a:pPr>
-            <a:r>
-              <a:rPr lang="en-US" sz="4000" dirty="0">
-                <a:solidFill>
-                  <a:srgbClr val="111111"/>
-                </a:solidFill>
-                <a:latin typeface="Times New Roman" pitchFamily="34" charset="0"/>
-                <a:ea typeface="Times New Roman" pitchFamily="34" charset="-122"/>
-                <a:cs typeface="Times New Roman" pitchFamily="34" charset="-120"/>
-              </a:rPr>
-              <a:t>It is a thick layer of fine dust deposited far from the desert.</a:t>
+              <a:t>Wide, flat spreads of sand are marked with small waves called ripples.</a:t>
             </a:r>
             <a:endParaRPr lang="en-US" sz="4000" dirty="0"/>
           </a:p>
@@ -13019,8 +13158,8 @@
         </p:nvSpPr>
         <p:spPr>
           <a:xfrm>
-            <a:off x="457200" y="1005840"/>
-            <a:ext cx="11277295" cy="731520"/>
+            <a:off x="365760" y="1005840"/>
+            <a:ext cx="11460175" cy="731520"/>
           </a:xfrm>
           <a:prstGeom prst="rect">
             <a:avLst/>
@@ -13029,7 +13168,9 @@
           <a:ln/>
         </p:spPr>
         <p:txBody>
-          <a:bodyPr wrap="square" lIns="0" tIns="0" rIns="0" bIns="0" rtlCol="0" anchor="ctr"/>
+          <a:bodyPr wrap="square" lIns="0" tIns="0" rIns="0" bIns="0" rtlCol="0" anchor="ctr">
+            <a:normAutofit/>
+          </a:bodyPr>
           <a:lstStyle/>
           <a:p>
             <a:pPr algn="ctr" indent="0" marL="0">
@@ -13044,7 +13185,66 @@
                 <a:ea typeface="Times New Roman" pitchFamily="34" charset="-122"/>
                 <a:cs typeface="Times New Roman" pitchFamily="34" charset="-120"/>
               </a:rPr>
-              <a:t>2. Depositional Features</a:t>
+              <a:t>1. Depositional Features of Wind Action</a:t>
+            </a:r>
+            <a:endParaRPr lang="en-US" sz="3600" dirty="0"/>
+          </a:p>
+        </p:txBody>
+      </p:sp>
+      <p:sp>
+        <p:nvSpPr>
+          <p:cNvPr id="4" name="Text 2"/>
+          <p:cNvSpPr/>
+          <p:nvPr/>
+        </p:nvSpPr>
+        <p:spPr>
+          <a:xfrm>
+            <a:off x="365760" y="1783080"/>
+            <a:ext cx="4846320" cy="4617720"/>
+          </a:xfrm>
+          <a:prstGeom prst="rect">
+            <a:avLst/>
+          </a:prstGeom>
+          <a:noFill/>
+          <a:ln/>
+        </p:spPr>
+        <p:txBody>
+          <a:bodyPr wrap="square" lIns="0" tIns="0" rIns="0" bIns="0" rtlCol="0" anchor="t"/>
+          <a:lstStyle/>
+          <a:p>
+            <a:pPr algn="l" indent="0" marL="0">
+              <a:spcAft>
+                <a:spcPts val="800"/>
+              </a:spcAft>
+              <a:buNone/>
+            </a:pPr>
+            <a:r>
+              <a:rPr lang="en-US" sz="3600" b="1" dirty="0">
+                <a:solidFill>
+                  <a:srgbClr val="111111"/>
+                </a:solidFill>
+                <a:latin typeface="Times New Roman" pitchFamily="34" charset="0"/>
+                <a:ea typeface="Times New Roman" pitchFamily="34" charset="-122"/>
+                <a:cs typeface="Times New Roman" pitchFamily="34" charset="-120"/>
+              </a:rPr>
+              <a:t>Sand dunes: </a:t>
+            </a:r>
+            <a:pPr algn="l" indent="0" marL="0">
+              <a:spcAft>
+                <a:spcPts val="800"/>
+              </a:spcAft>
+              <a:buNone/>
+            </a:pPr>
+            <a:r>
+              <a:rPr lang="en-US" sz="3600" dirty="0">
+                <a:solidFill>
+                  <a:srgbClr val="111111"/>
+                </a:solidFill>
+                <a:latin typeface="Times New Roman" pitchFamily="34" charset="0"/>
+                <a:ea typeface="Times New Roman" pitchFamily="34" charset="-122"/>
+                <a:cs typeface="Times New Roman" pitchFamily="34" charset="-120"/>
+              </a:rPr>
+              <a:t>Hills of sand with a gentle windward slope and a steep slip face that slowly move in the direction of the wind.</a:t>
             </a:r>
             <a:endParaRPr lang="en-US" sz="3600" dirty="0"/>
           </a:p>
@@ -13052,7 +13252,7 @@
       </p:sp>
       <p:pic>
         <p:nvPicPr>
-          <p:cNvPr id="4" name="Image 0" descr="/home/claude/f4/img/v2/dune_move_last.png">    </p:cNvPr>
+          <p:cNvPr id="5" name="Image 0" descr="/home/claude/f4/img/v2/dune_move_last.png">    </p:cNvPr>
           <p:cNvPicPr>
             <a:picLocks noChangeAspect="1"/>
           </p:cNvPicPr>
@@ -13066,8 +13266,8 @@
         </p:blipFill>
         <p:spPr>
           <a:xfrm>
-            <a:off x="629930" y="1783080"/>
-            <a:ext cx="10931835" cy="4270248"/>
+            <a:off x="5349240" y="2617506"/>
+            <a:ext cx="6659575" cy="2601397"/>
           </a:xfrm>
           <a:prstGeom prst="rect">
             <a:avLst/>
@@ -13076,14 +13276,14 @@
       </p:pic>
       <p:sp>
         <p:nvSpPr>
-          <p:cNvPr id="5" name="Text 2"/>
+          <p:cNvPr id="6" name="Text 3"/>
           <p:cNvSpPr/>
           <p:nvPr/>
         </p:nvSpPr>
         <p:spPr>
           <a:xfrm>
-            <a:off x="457200" y="6089904"/>
-            <a:ext cx="11277295" cy="347472"/>
+            <a:off x="5349240" y="6089904"/>
+            <a:ext cx="6659575" cy="347472"/>
           </a:xfrm>
           <a:prstGeom prst="rect">
             <a:avLst/>
@@ -13099,7 +13299,7 @@
               <a:buNone/>
             </a:pPr>
             <a:r>
-              <a:rPr lang="en-US" sz="1800" i="1" dirty="0">
+              <a:rPr lang="en-US" sz="1600" i="1" dirty="0">
                 <a:solidFill>
                   <a:srgbClr val="555555"/>
                 </a:solidFill>
@@ -13109,7 +13309,7 @@
               </a:rPr>
               <a:t>Illustration: how a dune moves</a:t>
             </a:r>
-            <a:endParaRPr lang="en-US" sz="1800" dirty="0"/>
+            <a:endParaRPr lang="en-US" sz="1600" dirty="0"/>
           </a:p>
         </p:txBody>
       </p:sp>
@@ -13219,7 +13419,7 @@
                 <a:ea typeface="Calibri" pitchFamily="34" charset="-122"/>
                 <a:cs typeface="Calibri" pitchFamily="34" charset="-120"/>
               </a:rPr>
-              <a:t>FORMATIVE EVALUATION</a:t>
+              <a:t>BOARD SUMMARY</a:t>
             </a:r>
             <a:endParaRPr lang="en-US" sz="1400" dirty="0"/>
           </a:p>
@@ -13284,7 +13484,7 @@
                 <a:ea typeface="Times New Roman" pitchFamily="34" charset="-122"/>
                 <a:cs typeface="Times New Roman" pitchFamily="34" charset="-120"/>
               </a:rPr>
-              <a:t>Evaluation 1</a:t>
+              <a:t>1. Depositional Features of Wind Action</a:t>
             </a:r>
             <a:endParaRPr lang="en-US" sz="3600" dirty="0"/>
           </a:p>
@@ -13318,7 +13518,7 @@
               <a:buNone/>
             </a:pPr>
             <a:r>
-              <a:rPr lang="en-US" sz="4000" dirty="0">
+              <a:rPr lang="en-US" sz="4000" b="1" dirty="0">
                 <a:solidFill>
                   <a:srgbClr val="111111"/>
                 </a:solidFill>
@@ -13326,7 +13526,24 @@
                 <a:ea typeface="Times New Roman" pitchFamily="34" charset="-122"/>
                 <a:cs typeface="Times New Roman" pitchFamily="34" charset="-120"/>
               </a:rPr>
-              <a:t>Why does the wind drop its sand behind a wall?</a:t>
+              <a:t>Loess: </a:t>
+            </a:r>
+            <a:pPr algn="l" indent="0" marL="0">
+              <a:spcAft>
+                <a:spcPts val="800"/>
+              </a:spcAft>
+              <a:buNone/>
+            </a:pPr>
+            <a:r>
+              <a:rPr lang="en-US" sz="4000" dirty="0">
+                <a:solidFill>
+                  <a:srgbClr val="111111"/>
+                </a:solidFill>
+                <a:latin typeface="Times New Roman" pitchFamily="34" charset="0"/>
+                <a:ea typeface="Times New Roman" pitchFamily="34" charset="-122"/>
+                <a:cs typeface="Times New Roman" pitchFamily="34" charset="-120"/>
+              </a:rPr>
+              <a:t>It is a thick layer of fine, fertile dust deposited far from the desert.</a:t>
             </a:r>
             <a:endParaRPr lang="en-US" sz="4000" dirty="0"/>
           </a:p>
@@ -13438,15 +13655,135 @@
                 <a:ea typeface="Calibri" pitchFamily="34" charset="-122"/>
                 <a:cs typeface="Calibri" pitchFamily="34" charset="-120"/>
               </a:rPr>
-              <a:t>FORMATIVE EVALUATION</a:t>
+              <a:t>BOARD SUMMARY</a:t>
             </a:r>
             <a:endParaRPr lang="en-US" sz="1400" dirty="0"/>
+          </a:p>
+        </p:txBody>
+      </p:sp>
+      <p:sp>
+        <p:nvSpPr>
+          <p:cNvPr id="3" name="Text 1"/>
+          <p:cNvSpPr/>
+          <p:nvPr/>
+        </p:nvSpPr>
+        <p:spPr>
+          <a:xfrm>
+            <a:off x="365760" y="1005840"/>
+            <a:ext cx="11460175" cy="731520"/>
+          </a:xfrm>
+          <a:prstGeom prst="rect">
+            <a:avLst/>
+          </a:prstGeom>
+          <a:noFill/>
+          <a:ln/>
+        </p:spPr>
+        <p:txBody>
+          <a:bodyPr wrap="square" lIns="0" tIns="0" rIns="0" bIns="0" rtlCol="0" anchor="ctr">
+            <a:normAutofit/>
+          </a:bodyPr>
+          <a:lstStyle/>
+          <a:p>
+            <a:pPr algn="ctr" indent="0" marL="0">
+              <a:buNone/>
+            </a:pPr>
+            <a:r>
+              <a:rPr lang="en-US" sz="3600" b="1" dirty="0">
+                <a:solidFill>
+                  <a:srgbClr val="990011"/>
+                </a:solidFill>
+                <a:latin typeface="Times New Roman" pitchFamily="34" charset="0"/>
+                <a:ea typeface="Times New Roman" pitchFamily="34" charset="-122"/>
+                <a:cs typeface="Times New Roman" pitchFamily="34" charset="-120"/>
+              </a:rPr>
+              <a:t>2. Dunes</a:t>
+            </a:r>
+            <a:endParaRPr lang="en-US" sz="3600" dirty="0"/>
+          </a:p>
+        </p:txBody>
+      </p:sp>
+      <p:sp>
+        <p:nvSpPr>
+          <p:cNvPr id="4" name="Text 2"/>
+          <p:cNvSpPr/>
+          <p:nvPr/>
+        </p:nvSpPr>
+        <p:spPr>
+          <a:xfrm>
+            <a:off x="365760" y="1783080"/>
+            <a:ext cx="4846320" cy="4617720"/>
+          </a:xfrm>
+          <a:prstGeom prst="rect">
+            <a:avLst/>
+          </a:prstGeom>
+          <a:noFill/>
+          <a:ln/>
+        </p:spPr>
+        <p:txBody>
+          <a:bodyPr wrap="square" lIns="0" tIns="0" rIns="0" bIns="0" rtlCol="0" anchor="t"/>
+          <a:lstStyle/>
+          <a:p>
+            <a:pPr algn="l" indent="0" marL="0">
+              <a:spcAft>
+                <a:spcPts val="800"/>
+              </a:spcAft>
+              <a:buNone/>
+            </a:pPr>
+            <a:r>
+              <a:rPr lang="en-US" sz="3200" i="1" dirty="0">
+                <a:solidFill>
+                  <a:srgbClr val="111111"/>
+                </a:solidFill>
+                <a:latin typeface="Times New Roman" pitchFamily="34" charset="0"/>
+                <a:ea typeface="Times New Roman" pitchFamily="34" charset="-122"/>
+                <a:cs typeface="Times New Roman" pitchFamily="34" charset="-120"/>
+              </a:rPr>
+              <a:t>The main types of sand dunes are the following:</a:t>
+            </a:r>
+            <a:endParaRPr lang="en-US" sz="3200" dirty="0"/>
+          </a:p>
+          <a:p>
+            <a:pPr algn="l" indent="0" marL="0">
+              <a:spcAft>
+                <a:spcPts val="800"/>
+              </a:spcAft>
+              <a:buNone/>
+            </a:pPr>
+            <a:r>
+              <a:rPr lang="en-US" sz="3200" b="1" dirty="0">
+                <a:solidFill>
+                  <a:srgbClr val="111111"/>
+                </a:solidFill>
+                <a:latin typeface="Times New Roman" pitchFamily="34" charset="0"/>
+                <a:ea typeface="Times New Roman" pitchFamily="34" charset="-122"/>
+                <a:cs typeface="Times New Roman" pitchFamily="34" charset="-120"/>
+              </a:rPr>
+              <a:t>Barchans: </a:t>
+            </a:r>
+            <a:pPr algn="l" indent="0" marL="0">
+              <a:spcAft>
+                <a:spcPts val="800"/>
+              </a:spcAft>
+              <a:buNone/>
+            </a:pPr>
+            <a:r>
+              <a:rPr lang="en-US" sz="3200" dirty="0">
+                <a:solidFill>
+                  <a:srgbClr val="111111"/>
+                </a:solidFill>
+                <a:latin typeface="Times New Roman" pitchFamily="34" charset="0"/>
+                <a:ea typeface="Times New Roman" pitchFamily="34" charset="-122"/>
+                <a:cs typeface="Times New Roman" pitchFamily="34" charset="-120"/>
+              </a:rPr>
+              <a:t>They are crescent-shaped dunes whose horns point in the direction of the wind. They form where the wind blows from one direction and sand is limited.</a:t>
+            </a:r>
+            <a:endParaRPr lang="en-US" sz="3200" dirty="0"/>
           </a:p>
         </p:txBody>
       </p:sp>
       <p:pic>
         <p:nvPicPr>
-          <p:cNvPr id="3" name="Image 0" descr="/home/claude/f4/img/minesec_sheet.png">    </p:cNvPr>
+          <p:cNvPr id="5" name="Image 0" descr="/home/claude/f4/img/v2/barchan_big.png">    </p:cNvPr>
           <p:cNvPicPr>
             <a:picLocks noChangeAspect="1"/>
           </p:cNvPicPr>
@@ -13460,8 +13797,8 @@
         </p:blipFill>
         <p:spPr>
           <a:xfrm>
-            <a:off x="0" y="658368"/>
-            <a:ext cx="5120640" cy="5833872"/>
+            <a:off x="5349240" y="2617506"/>
+            <a:ext cx="6659575" cy="2601397"/>
           </a:xfrm>
           <a:prstGeom prst="rect">
             <a:avLst/>
@@ -13470,14 +13807,14 @@
       </p:pic>
       <p:sp>
         <p:nvSpPr>
-          <p:cNvPr id="4" name="Text 1"/>
+          <p:cNvPr id="6" name="Text 3"/>
           <p:cNvSpPr/>
           <p:nvPr/>
         </p:nvSpPr>
         <p:spPr>
           <a:xfrm>
-            <a:off x="5349240" y="1005840"/>
-            <a:ext cx="6522415" cy="731520"/>
+            <a:off x="5349240" y="6089904"/>
+            <a:ext cx="6659575" cy="347472"/>
           </a:xfrm>
           <a:prstGeom prst="rect">
             <a:avLst/>
@@ -13486,68 +13823,24 @@
           <a:ln/>
         </p:spPr>
         <p:txBody>
-          <a:bodyPr wrap="square" lIns="0" tIns="0" rIns="0" bIns="0" rtlCol="0" anchor="ctr">
-            <a:normAutofit/>
-          </a:bodyPr>
+          <a:bodyPr wrap="square" lIns="0" tIns="0" rIns="0" bIns="0" rtlCol="0" anchor="ctr"/>
           <a:lstStyle/>
           <a:p>
             <a:pPr algn="ctr" indent="0" marL="0">
               <a:buNone/>
             </a:pPr>
             <a:r>
-              <a:rPr lang="en-US" sz="3600" b="1" dirty="0">
-                <a:solidFill>
-                  <a:srgbClr val="990011"/>
+              <a:rPr lang="en-US" sz="1600" i="1" dirty="0">
+                <a:solidFill>
+                  <a:srgbClr val="555555"/>
                 </a:solidFill>
                 <a:latin typeface="Times New Roman" pitchFamily="34" charset="0"/>
                 <a:ea typeface="Times New Roman" pitchFamily="34" charset="-122"/>
                 <a:cs typeface="Times New Roman" pitchFamily="34" charset="-120"/>
               </a:rPr>
-              <a:t>Expected Answer</a:t>
-            </a:r>
-            <a:endParaRPr lang="en-US" sz="3600" dirty="0"/>
-          </a:p>
-        </p:txBody>
-      </p:sp>
-      <p:sp>
-        <p:nvSpPr>
-          <p:cNvPr id="5" name="Text 2"/>
-          <p:cNvSpPr/>
-          <p:nvPr/>
-        </p:nvSpPr>
-        <p:spPr>
-          <a:xfrm>
-            <a:off x="5349240" y="1783080"/>
-            <a:ext cx="6522415" cy="4663440"/>
-          </a:xfrm>
-          <a:prstGeom prst="rect">
-            <a:avLst/>
-          </a:prstGeom>
-          <a:noFill/>
-          <a:ln/>
-        </p:spPr>
-        <p:txBody>
-          <a:bodyPr wrap="square" lIns="0" tIns="0" rIns="0" bIns="0" rtlCol="0" anchor="t"/>
-          <a:lstStyle/>
-          <a:p>
-            <a:pPr algn="l" indent="0" marL="0">
-              <a:spcAft>
-                <a:spcPts val="800"/>
-              </a:spcAft>
-              <a:buNone/>
-            </a:pPr>
-            <a:r>
-              <a:rPr lang="en-US" sz="4000" dirty="0">
-                <a:solidFill>
-                  <a:srgbClr val="111111"/>
-                </a:solidFill>
-                <a:latin typeface="Times New Roman" pitchFamily="34" charset="0"/>
-                <a:ea typeface="Times New Roman" pitchFamily="34" charset="-122"/>
-                <a:cs typeface="Times New Roman" pitchFamily="34" charset="-120"/>
-              </a:rPr>
-              <a:t>The wall slows the wind.</a:t>
-            </a:r>
-            <a:endParaRPr lang="en-US" sz="4000" dirty="0"/>
+              <a:t>Illustration: a barchan</a:t>
+            </a:r>
+            <a:endParaRPr lang="en-US" sz="1600" dirty="0"/>
           </a:p>
         </p:txBody>
       </p:sp>
@@ -13657,15 +13950,115 @@
                 <a:ea typeface="Calibri" pitchFamily="34" charset="-122"/>
                 <a:cs typeface="Calibri" pitchFamily="34" charset="-120"/>
               </a:rPr>
-              <a:t>FORMATIVE EVALUATION</a:t>
+              <a:t>BOARD SUMMARY</a:t>
             </a:r>
             <a:endParaRPr lang="en-US" sz="1400" dirty="0"/>
+          </a:p>
+        </p:txBody>
+      </p:sp>
+      <p:sp>
+        <p:nvSpPr>
+          <p:cNvPr id="3" name="Text 1"/>
+          <p:cNvSpPr/>
+          <p:nvPr/>
+        </p:nvSpPr>
+        <p:spPr>
+          <a:xfrm>
+            <a:off x="365760" y="1005840"/>
+            <a:ext cx="11460175" cy="731520"/>
+          </a:xfrm>
+          <a:prstGeom prst="rect">
+            <a:avLst/>
+          </a:prstGeom>
+          <a:noFill/>
+          <a:ln/>
+        </p:spPr>
+        <p:txBody>
+          <a:bodyPr wrap="square" lIns="0" tIns="0" rIns="0" bIns="0" rtlCol="0" anchor="ctr">
+            <a:normAutofit/>
+          </a:bodyPr>
+          <a:lstStyle/>
+          <a:p>
+            <a:pPr algn="ctr" indent="0" marL="0">
+              <a:buNone/>
+            </a:pPr>
+            <a:r>
+              <a:rPr lang="en-US" sz="3600" b="1" dirty="0">
+                <a:solidFill>
+                  <a:srgbClr val="990011"/>
+                </a:solidFill>
+                <a:latin typeface="Times New Roman" pitchFamily="34" charset="0"/>
+                <a:ea typeface="Times New Roman" pitchFamily="34" charset="-122"/>
+                <a:cs typeface="Times New Roman" pitchFamily="34" charset="-120"/>
+              </a:rPr>
+              <a:t>2. Dunes</a:t>
+            </a:r>
+            <a:endParaRPr lang="en-US" sz="3600" dirty="0"/>
+          </a:p>
+        </p:txBody>
+      </p:sp>
+      <p:sp>
+        <p:nvSpPr>
+          <p:cNvPr id="4" name="Text 2"/>
+          <p:cNvSpPr/>
+          <p:nvPr/>
+        </p:nvSpPr>
+        <p:spPr>
+          <a:xfrm>
+            <a:off x="365760" y="1783080"/>
+            <a:ext cx="4846320" cy="4617720"/>
+          </a:xfrm>
+          <a:prstGeom prst="rect">
+            <a:avLst/>
+          </a:prstGeom>
+          <a:noFill/>
+          <a:ln/>
+        </p:spPr>
+        <p:txBody>
+          <a:bodyPr wrap="square" lIns="0" tIns="0" rIns="0" bIns="0" rtlCol="0" anchor="t"/>
+          <a:lstStyle/>
+          <a:p>
+            <a:pPr algn="l" indent="0" marL="0">
+              <a:spcAft>
+                <a:spcPts val="800"/>
+              </a:spcAft>
+              <a:buNone/>
+            </a:pPr>
+            <a:r>
+              <a:rPr lang="en-US" sz="3600" b="1" dirty="0">
+                <a:solidFill>
+                  <a:srgbClr val="111111"/>
+                </a:solidFill>
+                <a:latin typeface="Times New Roman" pitchFamily="34" charset="0"/>
+                <a:ea typeface="Times New Roman" pitchFamily="34" charset="-122"/>
+                <a:cs typeface="Times New Roman" pitchFamily="34" charset="-120"/>
+              </a:rPr>
+              <a:t>Seif dunes: </a:t>
+            </a:r>
+            <a:pPr algn="l" indent="0" marL="0">
+              <a:spcAft>
+                <a:spcPts val="800"/>
+              </a:spcAft>
+              <a:buNone/>
+            </a:pPr>
+            <a:r>
+              <a:rPr lang="en-US" sz="3600" dirty="0">
+                <a:solidFill>
+                  <a:srgbClr val="111111"/>
+                </a:solidFill>
+                <a:latin typeface="Times New Roman" pitchFamily="34" charset="0"/>
+                <a:ea typeface="Times New Roman" pitchFamily="34" charset="-122"/>
+                <a:cs typeface="Times New Roman" pitchFamily="34" charset="-120"/>
+              </a:rPr>
+              <a:t>They are long, narrow, straight ridges of sand lying parallel to the wind. They form where winds blow from two slightly different directions.</a:t>
+            </a:r>
+            <a:endParaRPr lang="en-US" sz="3600" dirty="0"/>
           </a:p>
         </p:txBody>
       </p:sp>
       <p:pic>
         <p:nvPicPr>
-          <p:cNvPr id="3" name="Image 0" descr="/home/claude/f4/img/minesec_sheet.png">    </p:cNvPr>
+          <p:cNvPr id="5" name="Image 0" descr="/home/claude/f4/img/v2/seif_big.png">    </p:cNvPr>
           <p:cNvPicPr>
             <a:picLocks noChangeAspect="1"/>
           </p:cNvPicPr>
@@ -13679,8 +14072,8 @@
         </p:blipFill>
         <p:spPr>
           <a:xfrm>
-            <a:off x="0" y="658368"/>
-            <a:ext cx="5120640" cy="5833872"/>
+            <a:off x="5349240" y="2617506"/>
+            <a:ext cx="6659575" cy="2601397"/>
           </a:xfrm>
           <a:prstGeom prst="rect">
             <a:avLst/>
@@ -13689,14 +14082,14 @@
       </p:pic>
       <p:sp>
         <p:nvSpPr>
-          <p:cNvPr id="4" name="Text 1"/>
+          <p:cNvPr id="6" name="Text 3"/>
           <p:cNvSpPr/>
           <p:nvPr/>
         </p:nvSpPr>
         <p:spPr>
           <a:xfrm>
-            <a:off x="5349240" y="1005840"/>
-            <a:ext cx="6522415" cy="731520"/>
+            <a:off x="5349240" y="6089904"/>
+            <a:ext cx="6659575" cy="347472"/>
           </a:xfrm>
           <a:prstGeom prst="rect">
             <a:avLst/>
@@ -13705,68 +14098,24 @@
           <a:ln/>
         </p:spPr>
         <p:txBody>
-          <a:bodyPr wrap="square" lIns="0" tIns="0" rIns="0" bIns="0" rtlCol="0" anchor="ctr">
-            <a:normAutofit/>
-          </a:bodyPr>
+          <a:bodyPr wrap="square" lIns="0" tIns="0" rIns="0" bIns="0" rtlCol="0" anchor="ctr"/>
           <a:lstStyle/>
           <a:p>
             <a:pPr algn="ctr" indent="0" marL="0">
               <a:buNone/>
             </a:pPr>
             <a:r>
-              <a:rPr lang="en-US" sz="3600" b="1" dirty="0">
-                <a:solidFill>
-                  <a:srgbClr val="990011"/>
+              <a:rPr lang="en-US" sz="1600" i="1" dirty="0">
+                <a:solidFill>
+                  <a:srgbClr val="555555"/>
                 </a:solidFill>
                 <a:latin typeface="Times New Roman" pitchFamily="34" charset="0"/>
                 <a:ea typeface="Times New Roman" pitchFamily="34" charset="-122"/>
                 <a:cs typeface="Times New Roman" pitchFamily="34" charset="-120"/>
               </a:rPr>
-              <a:t>Evaluation 2</a:t>
-            </a:r>
-            <a:endParaRPr lang="en-US" sz="3600" dirty="0"/>
-          </a:p>
-        </p:txBody>
-      </p:sp>
-      <p:sp>
-        <p:nvSpPr>
-          <p:cNvPr id="5" name="Text 2"/>
-          <p:cNvSpPr/>
-          <p:nvPr/>
-        </p:nvSpPr>
-        <p:spPr>
-          <a:xfrm>
-            <a:off x="5349240" y="1783080"/>
-            <a:ext cx="6522415" cy="4663440"/>
-          </a:xfrm>
-          <a:prstGeom prst="rect">
-            <a:avLst/>
-          </a:prstGeom>
-          <a:noFill/>
-          <a:ln/>
-        </p:spPr>
-        <p:txBody>
-          <a:bodyPr wrap="square" lIns="0" tIns="0" rIns="0" bIns="0" rtlCol="0" anchor="t"/>
-          <a:lstStyle/>
-          <a:p>
-            <a:pPr algn="l" indent="0" marL="0">
-              <a:spcAft>
-                <a:spcPts val="800"/>
-              </a:spcAft>
-              <a:buNone/>
-            </a:pPr>
-            <a:r>
-              <a:rPr lang="en-US" sz="4000" dirty="0">
-                <a:solidFill>
-                  <a:srgbClr val="111111"/>
-                </a:solidFill>
-                <a:latin typeface="Times New Roman" pitchFamily="34" charset="0"/>
-                <a:ea typeface="Times New Roman" pitchFamily="34" charset="-122"/>
-                <a:cs typeface="Times New Roman" pitchFamily="34" charset="-120"/>
-              </a:rPr>
-              <a:t>What is a barchan?</a:t>
-            </a:r>
-            <a:endParaRPr lang="en-US" sz="4000" dirty="0"/>
+              <a:t>Illustration: seif dunes</a:t>
+            </a:r>
+            <a:endParaRPr lang="en-US" sz="1600" dirty="0"/>
           </a:p>
         </p:txBody>
       </p:sp>
@@ -13941,7 +14290,7 @@
                 <a:ea typeface="Times New Roman" pitchFamily="34" charset="-122"/>
                 <a:cs typeface="Times New Roman" pitchFamily="34" charset="-120"/>
               </a:rPr>
-              <a:t>Expected Answer</a:t>
+              <a:t>Evaluation 1</a:t>
             </a:r>
             <a:endParaRPr lang="en-US" sz="3600" dirty="0"/>
           </a:p>
@@ -13983,7 +14332,7 @@
                 <a:ea typeface="Times New Roman" pitchFamily="34" charset="-122"/>
                 <a:cs typeface="Times New Roman" pitchFamily="34" charset="-120"/>
               </a:rPr>
-              <a:t>A dune shaped like a crescent.</a:t>
+              <a:t>Why does the wind drop its sand behind a wall?</a:t>
             </a:r>
             <a:endParaRPr lang="en-US" sz="4000" dirty="0"/>
           </a:p>
@@ -14095,7 +14444,7 @@
                 <a:ea typeface="Calibri" pitchFamily="34" charset="-122"/>
                 <a:cs typeface="Calibri" pitchFamily="34" charset="-120"/>
               </a:rPr>
-              <a:t>REMEDIATION</a:t>
+              <a:t>FORMATIVE EVALUATION</a:t>
             </a:r>
             <a:endParaRPr lang="en-US" sz="1400" dirty="0"/>
           </a:p>
@@ -14118,7 +14467,7 @@
         <p:spPr>
           <a:xfrm>
             <a:off x="0" y="658368"/>
-            <a:ext cx="2468880" cy="5833872"/>
+            <a:ext cx="5120640" cy="5833872"/>
           </a:xfrm>
           <a:prstGeom prst="rect">
             <a:avLst/>
@@ -14133,8 +14482,8 @@
         </p:nvSpPr>
         <p:spPr>
           <a:xfrm>
-            <a:off x="2697480" y="1005840"/>
-            <a:ext cx="9174175" cy="731520"/>
+            <a:off x="5349240" y="1005840"/>
+            <a:ext cx="6522415" cy="731520"/>
           </a:xfrm>
           <a:prstGeom prst="rect">
             <a:avLst/>
@@ -14160,7 +14509,7 @@
                 <a:ea typeface="Times New Roman" pitchFamily="34" charset="-122"/>
                 <a:cs typeface="Times New Roman" pitchFamily="34" charset="-120"/>
               </a:rPr>
-              <a:t>Remediation</a:t>
+              <a:t>Expected Answer</a:t>
             </a:r>
             <a:endParaRPr lang="en-US" sz="3600" dirty="0"/>
           </a:p>
@@ -14174,8 +14523,8 @@
         </p:nvSpPr>
         <p:spPr>
           <a:xfrm>
-            <a:off x="2697480" y="1783080"/>
-            <a:ext cx="9174175" cy="4663440"/>
+            <a:off x="5349240" y="1783080"/>
+            <a:ext cx="6522415" cy="4663440"/>
           </a:xfrm>
           <a:prstGeom prst="rect">
             <a:avLst/>
@@ -14194,7 +14543,7 @@
               <a:buNone/>
             </a:pPr>
             <a:r>
-              <a:rPr lang="en-US" sz="4000" b="1" dirty="0">
+              <a:rPr lang="en-US" sz="4000" dirty="0">
                 <a:solidFill>
                   <a:srgbClr val="111111"/>
                 </a:solidFill>
@@ -14202,73 +14551,7 @@
                 <a:ea typeface="Times New Roman" pitchFamily="34" charset="-122"/>
                 <a:cs typeface="Times New Roman" pitchFamily="34" charset="-120"/>
               </a:rPr>
-              <a:t>Fill in the blanks:</a:t>
-            </a:r>
-            <a:endParaRPr lang="en-US" sz="4000" dirty="0"/>
-          </a:p>
-          <a:p>
-            <a:pPr algn="l" marL="342900" indent="-342900">
-              <a:spcAft>
-                <a:spcPts val="800"/>
-              </a:spcAft>
-              <a:buSzPct val="100000"/>
-              <a:buFont typeface="+mj-lt"/>
-              <a:buAutoNum type="arabicPeriod" startAt="1"/>
-            </a:pPr>
-            <a:r>
-              <a:rPr lang="en-US" sz="4000" dirty="0">
-                <a:solidFill>
-                  <a:srgbClr val="111111"/>
-                </a:solidFill>
-                <a:latin typeface="Times New Roman" pitchFamily="34" charset="0"/>
-                <a:ea typeface="Times New Roman" pitchFamily="34" charset="-122"/>
-                <a:cs typeface="Times New Roman" pitchFamily="34" charset="-120"/>
-              </a:rPr>
-              <a:t>A hill of sand made by the wind is a sand ______.</a:t>
-            </a:r>
-            <a:endParaRPr lang="en-US" sz="4000" dirty="0"/>
-          </a:p>
-          <a:p>
-            <a:pPr algn="l" marL="342900" indent="-342900">
-              <a:spcAft>
-                <a:spcPts val="800"/>
-              </a:spcAft>
-              <a:buSzPct val="100000"/>
-              <a:buFont typeface="+mj-lt"/>
-              <a:buAutoNum type="arabicPeriod" startAt="1"/>
-            </a:pPr>
-            <a:r>
-              <a:rPr lang="en-US" sz="4000" dirty="0">
-                <a:solidFill>
-                  <a:srgbClr val="111111"/>
-                </a:solidFill>
-                <a:latin typeface="Times New Roman" pitchFamily="34" charset="0"/>
-                <a:ea typeface="Times New Roman" pitchFamily="34" charset="-122"/>
-                <a:cs typeface="Times New Roman" pitchFamily="34" charset="-120"/>
-              </a:rPr>
-              <a:t>A crescent-shaped dune is a ______.</a:t>
-            </a:r>
-            <a:endParaRPr lang="en-US" sz="4000" dirty="0"/>
-          </a:p>
-          <a:p>
-            <a:pPr algn="l" marL="342900" indent="-342900">
-              <a:spcAft>
-                <a:spcPts val="800"/>
-              </a:spcAft>
-              <a:buSzPct val="100000"/>
-              <a:buFont typeface="+mj-lt"/>
-              <a:buAutoNum type="arabicPeriod" startAt="1"/>
-            </a:pPr>
-            <a:r>
-              <a:rPr lang="en-US" sz="4000" dirty="0">
-                <a:solidFill>
-                  <a:srgbClr val="111111"/>
-                </a:solidFill>
-                <a:latin typeface="Times New Roman" pitchFamily="34" charset="0"/>
-                <a:ea typeface="Times New Roman" pitchFamily="34" charset="-122"/>
-                <a:cs typeface="Times New Roman" pitchFamily="34" charset="-120"/>
-              </a:rPr>
-              <a:t>Long, straight dunes are ______ dunes.</a:t>
+              <a:t>The wall slows the wind.</a:t>
             </a:r>
             <a:endParaRPr lang="en-US" sz="4000" dirty="0"/>
           </a:p>
@@ -14619,7 +14902,7 @@
                 <a:ea typeface="Calibri" pitchFamily="34" charset="-122"/>
                 <a:cs typeface="Calibri" pitchFamily="34" charset="-120"/>
               </a:rPr>
-              <a:t>HOMEWORK</a:t>
+              <a:t>FORMATIVE EVALUATION</a:t>
             </a:r>
             <a:endParaRPr lang="en-US" sz="1400" dirty="0"/>
           </a:p>
@@ -14684,7 +14967,7 @@
                 <a:ea typeface="Times New Roman" pitchFamily="34" charset="-122"/>
                 <a:cs typeface="Times New Roman" pitchFamily="34" charset="-120"/>
               </a:rPr>
-              <a:t>Homework</a:t>
+              <a:t>Evaluation 2</a:t>
             </a:r>
             <a:endParaRPr lang="en-US" sz="3600" dirty="0"/>
           </a:p>
@@ -14726,7 +15009,7 @@
                 <a:ea typeface="Times New Roman" pitchFamily="34" charset="-122"/>
                 <a:cs typeface="Times New Roman" pitchFamily="34" charset="-120"/>
               </a:rPr>
-              <a:t>Ask an elder in your family how people in your area cope with the heat, the dust and the shortage of water during the dry season. Write down two ways.</a:t>
+              <a:t>What is a barchan?</a:t>
             </a:r>
             <a:endParaRPr lang="en-US" sz="4000" dirty="0"/>
           </a:p>
@@ -14838,7 +15121,7 @@
                 <a:ea typeface="Calibri" pitchFamily="34" charset="-122"/>
                 <a:cs typeface="Calibri" pitchFamily="34" charset="-120"/>
               </a:rPr>
-              <a:t>NEXT LESSON</a:t>
+              <a:t>FORMATIVE EVALUATION</a:t>
             </a:r>
             <a:endParaRPr lang="en-US" sz="1400" dirty="0"/>
           </a:p>
@@ -14903,7 +15186,7 @@
                 <a:ea typeface="Times New Roman" pitchFamily="34" charset="-122"/>
                 <a:cs typeface="Times New Roman" pitchFamily="34" charset="-120"/>
               </a:rPr>
-              <a:t>Next Lesson</a:t>
+              <a:t>Expected Answer</a:t>
             </a:r>
             <a:endParaRPr lang="en-US" sz="3600" dirty="0"/>
           </a:p>
@@ -14927,17 +15210,17 @@
           <a:ln/>
         </p:spPr>
         <p:txBody>
-          <a:bodyPr wrap="square" lIns="0" tIns="0" rIns="0" bIns="0" rtlCol="0" anchor="ctr"/>
-          <a:lstStyle/>
-          <a:p>
-            <a:pPr algn="ctr" indent="0" marL="0">
+          <a:bodyPr wrap="square" lIns="0" tIns="0" rIns="0" bIns="0" rtlCol="0" anchor="t"/>
+          <a:lstStyle/>
+          <a:p>
+            <a:pPr algn="l" indent="0" marL="0">
               <a:spcAft>
                 <a:spcPts val="800"/>
               </a:spcAft>
               <a:buNone/>
             </a:pPr>
             <a:r>
-              <a:rPr lang="en-US" sz="4000" b="1" dirty="0">
+              <a:rPr lang="en-US" sz="4000" dirty="0">
                 <a:solidFill>
                   <a:srgbClr val="111111"/>
                 </a:solidFill>
@@ -14945,27 +15228,7 @@
                 <a:ea typeface="Times New Roman" pitchFamily="34" charset="-122"/>
                 <a:cs typeface="Times New Roman" pitchFamily="34" charset="-120"/>
               </a:rPr>
-              <a:t>Our next lesson will be on:</a:t>
-            </a:r>
-            <a:endParaRPr lang="en-US" sz="4000" dirty="0"/>
-          </a:p>
-          <a:p>
-            <a:pPr algn="ctr" indent="0" marL="0">
-              <a:spcAft>
-                <a:spcPts val="800"/>
-              </a:spcAft>
-              <a:buNone/>
-            </a:pPr>
-            <a:r>
-              <a:rPr lang="en-US" sz="4000" b="1" dirty="0">
-                <a:solidFill>
-                  <a:srgbClr val="990011"/>
-                </a:solidFill>
-                <a:latin typeface="Times New Roman" pitchFamily="34" charset="0"/>
-                <a:ea typeface="Times New Roman" pitchFamily="34" charset="-122"/>
-                <a:cs typeface="Times New Roman" pitchFamily="34" charset="-120"/>
-              </a:rPr>
-              <a:t>Lesson 29: Man in the Hot Desert Environments</a:t>
+              <a:t>A dune shaped like a crescent.</a:t>
             </a:r>
             <a:endParaRPr lang="en-US" sz="4000" dirty="0"/>
           </a:p>
@@ -15077,6 +15340,749 @@
                 <a:ea typeface="Calibri" pitchFamily="34" charset="-122"/>
                 <a:cs typeface="Calibri" pitchFamily="34" charset="-120"/>
               </a:rPr>
+              <a:t>REMEDIATION</a:t>
+            </a:r>
+            <a:endParaRPr lang="en-US" sz="1400" dirty="0"/>
+          </a:p>
+        </p:txBody>
+      </p:sp>
+      <p:pic>
+        <p:nvPicPr>
+          <p:cNvPr id="3" name="Image 0" descr="/home/claude/f4/img/minesec_sheet.png">    </p:cNvPr>
+          <p:cNvPicPr>
+            <a:picLocks noChangeAspect="1"/>
+          </p:cNvPicPr>
+          <p:nvPr/>
+        </p:nvPicPr>
+        <p:blipFill>
+          <a:blip r:embed="rId1"/>
+          <a:stretch>
+            <a:fillRect/>
+          </a:stretch>
+        </p:blipFill>
+        <p:spPr>
+          <a:xfrm>
+            <a:off x="0" y="658368"/>
+            <a:ext cx="2468880" cy="5833872"/>
+          </a:xfrm>
+          <a:prstGeom prst="rect">
+            <a:avLst/>
+          </a:prstGeom>
+        </p:spPr>
+      </p:pic>
+      <p:sp>
+        <p:nvSpPr>
+          <p:cNvPr id="4" name="Text 1"/>
+          <p:cNvSpPr/>
+          <p:nvPr/>
+        </p:nvSpPr>
+        <p:spPr>
+          <a:xfrm>
+            <a:off x="2697480" y="1005840"/>
+            <a:ext cx="9174175" cy="731520"/>
+          </a:xfrm>
+          <a:prstGeom prst="rect">
+            <a:avLst/>
+          </a:prstGeom>
+          <a:noFill/>
+          <a:ln/>
+        </p:spPr>
+        <p:txBody>
+          <a:bodyPr wrap="square" lIns="0" tIns="0" rIns="0" bIns="0" rtlCol="0" anchor="ctr">
+            <a:normAutofit/>
+          </a:bodyPr>
+          <a:lstStyle/>
+          <a:p>
+            <a:pPr algn="ctr" indent="0" marL="0">
+              <a:buNone/>
+            </a:pPr>
+            <a:r>
+              <a:rPr lang="en-US" sz="3600" b="1" dirty="0">
+                <a:solidFill>
+                  <a:srgbClr val="990011"/>
+                </a:solidFill>
+                <a:latin typeface="Times New Roman" pitchFamily="34" charset="0"/>
+                <a:ea typeface="Times New Roman" pitchFamily="34" charset="-122"/>
+                <a:cs typeface="Times New Roman" pitchFamily="34" charset="-120"/>
+              </a:rPr>
+              <a:t>Remediation</a:t>
+            </a:r>
+            <a:endParaRPr lang="en-US" sz="3600" dirty="0"/>
+          </a:p>
+        </p:txBody>
+      </p:sp>
+      <p:sp>
+        <p:nvSpPr>
+          <p:cNvPr id="5" name="Text 2"/>
+          <p:cNvSpPr/>
+          <p:nvPr/>
+        </p:nvSpPr>
+        <p:spPr>
+          <a:xfrm>
+            <a:off x="2697480" y="1783080"/>
+            <a:ext cx="9174175" cy="4663440"/>
+          </a:xfrm>
+          <a:prstGeom prst="rect">
+            <a:avLst/>
+          </a:prstGeom>
+          <a:noFill/>
+          <a:ln/>
+        </p:spPr>
+        <p:txBody>
+          <a:bodyPr wrap="square" lIns="0" tIns="0" rIns="0" bIns="0" rtlCol="0" anchor="t"/>
+          <a:lstStyle/>
+          <a:p>
+            <a:pPr algn="l" indent="0" marL="0">
+              <a:spcAft>
+                <a:spcPts val="800"/>
+              </a:spcAft>
+              <a:buNone/>
+            </a:pPr>
+            <a:r>
+              <a:rPr lang="en-US" sz="4000" b="1" dirty="0">
+                <a:solidFill>
+                  <a:srgbClr val="111111"/>
+                </a:solidFill>
+                <a:latin typeface="Times New Roman" pitchFamily="34" charset="0"/>
+                <a:ea typeface="Times New Roman" pitchFamily="34" charset="-122"/>
+                <a:cs typeface="Times New Roman" pitchFamily="34" charset="-120"/>
+              </a:rPr>
+              <a:t>Fill in the blanks:</a:t>
+            </a:r>
+            <a:endParaRPr lang="en-US" sz="4000" dirty="0"/>
+          </a:p>
+          <a:p>
+            <a:pPr algn="l" marL="342900" indent="-342900">
+              <a:spcAft>
+                <a:spcPts val="800"/>
+              </a:spcAft>
+              <a:buSzPct val="100000"/>
+              <a:buFont typeface="+mj-lt"/>
+              <a:buAutoNum type="arabicPeriod" startAt="1"/>
+            </a:pPr>
+            <a:r>
+              <a:rPr lang="en-US" sz="4000" dirty="0">
+                <a:solidFill>
+                  <a:srgbClr val="111111"/>
+                </a:solidFill>
+                <a:latin typeface="Times New Roman" pitchFamily="34" charset="0"/>
+                <a:ea typeface="Times New Roman" pitchFamily="34" charset="-122"/>
+                <a:cs typeface="Times New Roman" pitchFamily="34" charset="-120"/>
+              </a:rPr>
+              <a:t>A hill of sand made by the wind is a sand ______.</a:t>
+            </a:r>
+            <a:endParaRPr lang="en-US" sz="4000" dirty="0"/>
+          </a:p>
+          <a:p>
+            <a:pPr algn="l" marL="342900" indent="-342900">
+              <a:spcAft>
+                <a:spcPts val="800"/>
+              </a:spcAft>
+              <a:buSzPct val="100000"/>
+              <a:buFont typeface="+mj-lt"/>
+              <a:buAutoNum type="arabicPeriod" startAt="1"/>
+            </a:pPr>
+            <a:r>
+              <a:rPr lang="en-US" sz="4000" dirty="0">
+                <a:solidFill>
+                  <a:srgbClr val="111111"/>
+                </a:solidFill>
+                <a:latin typeface="Times New Roman" pitchFamily="34" charset="0"/>
+                <a:ea typeface="Times New Roman" pitchFamily="34" charset="-122"/>
+                <a:cs typeface="Times New Roman" pitchFamily="34" charset="-120"/>
+              </a:rPr>
+              <a:t>A crescent-shaped dune is a ______.</a:t>
+            </a:r>
+            <a:endParaRPr lang="en-US" sz="4000" dirty="0"/>
+          </a:p>
+          <a:p>
+            <a:pPr algn="l" marL="342900" indent="-342900">
+              <a:spcAft>
+                <a:spcPts val="800"/>
+              </a:spcAft>
+              <a:buSzPct val="100000"/>
+              <a:buFont typeface="+mj-lt"/>
+              <a:buAutoNum type="arabicPeriod" startAt="1"/>
+            </a:pPr>
+            <a:r>
+              <a:rPr lang="en-US" sz="4000" dirty="0">
+                <a:solidFill>
+                  <a:srgbClr val="111111"/>
+                </a:solidFill>
+                <a:latin typeface="Times New Roman" pitchFamily="34" charset="0"/>
+                <a:ea typeface="Times New Roman" pitchFamily="34" charset="-122"/>
+                <a:cs typeface="Times New Roman" pitchFamily="34" charset="-120"/>
+              </a:rPr>
+              <a:t>Long, straight dunes are ______ dunes.</a:t>
+            </a:r>
+            <a:endParaRPr lang="en-US" sz="4000" dirty="0"/>
+          </a:p>
+        </p:txBody>
+      </p:sp>
+      <p:sp>
+        <p:nvSpPr>
+          <p:cNvPr id="25" name="Slide Number Placeholder 0"/>
+          <p:cNvSpPr>
+            <a:spLocks noGrp="1"/>
+          </p:cNvSpPr>
+          <p:nvPr>
+            <p:ph type="sldNum" sz="quarter" idx="4294967295"/>
+          </p:nvPr>
+        </p:nvSpPr>
+        <p:spPr>
+          <a:xfrm>
+            <a:off x="27432" y="91440"/>
+            <a:ext cx="585216" cy="475488"/>
+          </a:xfrm>
+          <a:prstGeom prst="rect">
+            <a:avLst/>
+          </a:prstGeom>
+          <a:extLst>
+            <a:ext uri="{C572A759-6A51-4108-AA02-DFA0A04FC94B}">
+              <ma14:wrappingTextBoxFlag xmlns:ma14="http://schemas.microsoft.com/office/mac/drawingml/2011/main" val="0"/>
+            </a:ext>
+          </a:extLst>
+        </p:spPr>
+        <p:txBody>
+          <a:bodyPr/>
+          <a:lstStyle>
+            <a:lvl1pPr>
+              <a:defRPr sz="2000">
+                <a:solidFill>
+                  <a:srgbClr val="FFFFFF"/>
+                </a:solidFill>
+                <a:latin typeface="Calibri"/>
+                <a:ea typeface="Calibri"/>
+                <a:cs typeface="Calibri"/>
+              </a:defRPr>
+            </a:lvl1pPr>
+          </a:lstStyle>
+          <a:p>
+            <a:pPr algn="ctr"/>
+            <a:fld id="{F7021451-1387-4CA6-816F-3879F97B5CBC}" type="slidenum">
+              <a:rPr b="1" lang="en-US"/>
+              <a:t>42</a:t>
+            </a:fld>
+            <a:endParaRPr lang="en-US"/>
+          </a:p>
+        </p:txBody>
+      </p:sp>
+    </p:spTree>
+  </p:cSld>
+  <p:clrMapOvr>
+    <a:masterClrMapping/>
+  </p:clrMapOvr>
+</p:sld>
+</file>
+
+<file path=ppt/slides/slide43.xml><?xml version="1.0" encoding="utf-8"?>
+<p:sld xmlns:a="http://schemas.openxmlformats.org/drawingml/2006/main" xmlns:r="http://schemas.openxmlformats.org/officeDocument/2006/relationships" xmlns:p="http://schemas.openxmlformats.org/presentationml/2006/main">
+  <p:cSld name="Slide 43">
+    <p:spTree>
+      <p:nvGrpSpPr>
+        <p:cNvPr id="1" name=""/>
+        <p:cNvGrpSpPr/>
+        <p:nvPr/>
+      </p:nvGrpSpPr>
+      <p:grpSpPr>
+        <a:xfrm>
+          <a:off x="0" y="0"/>
+          <a:ext cx="0" cy="0"/>
+          <a:chOff x="0" y="0"/>
+          <a:chExt cx="0" cy="0"/>
+        </a:xfrm>
+      </p:grpSpPr>
+      <p:sp>
+        <p:nvSpPr>
+          <p:cNvPr id="2" name="Text 0"/>
+          <p:cNvSpPr/>
+          <p:nvPr/>
+        </p:nvSpPr>
+        <p:spPr>
+          <a:xfrm>
+            <a:off x="457200" y="713232"/>
+            <a:ext cx="11368735" cy="274320"/>
+          </a:xfrm>
+          <a:prstGeom prst="rect">
+            <a:avLst/>
+          </a:prstGeom>
+          <a:noFill/>
+          <a:ln/>
+        </p:spPr>
+        <p:txBody>
+          <a:bodyPr wrap="square" lIns="0" tIns="0" rIns="0" bIns="0" rtlCol="0" anchor="ctr"/>
+          <a:lstStyle/>
+          <a:p>
+            <a:pPr algn="r" indent="0" marL="0">
+              <a:buNone/>
+            </a:pPr>
+            <a:r>
+              <a:rPr lang="en-US" sz="1400" b="1" dirty="0">
+                <a:solidFill>
+                  <a:srgbClr val="1C3F6E"/>
+                </a:solidFill>
+                <a:latin typeface="Calibri" pitchFamily="34" charset="0"/>
+                <a:ea typeface="Calibri" pitchFamily="34" charset="-122"/>
+                <a:cs typeface="Calibri" pitchFamily="34" charset="-120"/>
+              </a:rPr>
+              <a:t>HOMEWORK</a:t>
+            </a:r>
+            <a:endParaRPr lang="en-US" sz="1400" dirty="0"/>
+          </a:p>
+        </p:txBody>
+      </p:sp>
+      <p:pic>
+        <p:nvPicPr>
+          <p:cNvPr id="3" name="Image 0" descr="/home/claude/f4/img/minesec_sheet.png">    </p:cNvPr>
+          <p:cNvPicPr>
+            <a:picLocks noChangeAspect="1"/>
+          </p:cNvPicPr>
+          <p:nvPr/>
+        </p:nvPicPr>
+        <p:blipFill>
+          <a:blip r:embed="rId1"/>
+          <a:stretch>
+            <a:fillRect/>
+          </a:stretch>
+        </p:blipFill>
+        <p:spPr>
+          <a:xfrm>
+            <a:off x="0" y="658368"/>
+            <a:ext cx="5120640" cy="5833872"/>
+          </a:xfrm>
+          <a:prstGeom prst="rect">
+            <a:avLst/>
+          </a:prstGeom>
+        </p:spPr>
+      </p:pic>
+      <p:sp>
+        <p:nvSpPr>
+          <p:cNvPr id="4" name="Text 1"/>
+          <p:cNvSpPr/>
+          <p:nvPr/>
+        </p:nvSpPr>
+        <p:spPr>
+          <a:xfrm>
+            <a:off x="5349240" y="1005840"/>
+            <a:ext cx="6522415" cy="731520"/>
+          </a:xfrm>
+          <a:prstGeom prst="rect">
+            <a:avLst/>
+          </a:prstGeom>
+          <a:noFill/>
+          <a:ln/>
+        </p:spPr>
+        <p:txBody>
+          <a:bodyPr wrap="square" lIns="0" tIns="0" rIns="0" bIns="0" rtlCol="0" anchor="ctr">
+            <a:normAutofit/>
+          </a:bodyPr>
+          <a:lstStyle/>
+          <a:p>
+            <a:pPr algn="ctr" indent="0" marL="0">
+              <a:buNone/>
+            </a:pPr>
+            <a:r>
+              <a:rPr lang="en-US" sz="3600" b="1" dirty="0">
+                <a:solidFill>
+                  <a:srgbClr val="990011"/>
+                </a:solidFill>
+                <a:latin typeface="Times New Roman" pitchFamily="34" charset="0"/>
+                <a:ea typeface="Times New Roman" pitchFamily="34" charset="-122"/>
+                <a:cs typeface="Times New Roman" pitchFamily="34" charset="-120"/>
+              </a:rPr>
+              <a:t>Homework</a:t>
+            </a:r>
+            <a:endParaRPr lang="en-US" sz="3600" dirty="0"/>
+          </a:p>
+        </p:txBody>
+      </p:sp>
+      <p:sp>
+        <p:nvSpPr>
+          <p:cNvPr id="5" name="Text 2"/>
+          <p:cNvSpPr/>
+          <p:nvPr/>
+        </p:nvSpPr>
+        <p:spPr>
+          <a:xfrm>
+            <a:off x="5349240" y="1783080"/>
+            <a:ext cx="6522415" cy="4663440"/>
+          </a:xfrm>
+          <a:prstGeom prst="rect">
+            <a:avLst/>
+          </a:prstGeom>
+          <a:noFill/>
+          <a:ln/>
+        </p:spPr>
+        <p:txBody>
+          <a:bodyPr wrap="square" lIns="0" tIns="0" rIns="0" bIns="0" rtlCol="0" anchor="t"/>
+          <a:lstStyle/>
+          <a:p>
+            <a:pPr algn="l" indent="0" marL="0">
+              <a:spcAft>
+                <a:spcPts val="800"/>
+              </a:spcAft>
+              <a:buNone/>
+            </a:pPr>
+            <a:r>
+              <a:rPr lang="en-US" sz="4000" dirty="0">
+                <a:solidFill>
+                  <a:srgbClr val="111111"/>
+                </a:solidFill>
+                <a:latin typeface="Times New Roman" pitchFamily="34" charset="0"/>
+                <a:ea typeface="Times New Roman" pitchFamily="34" charset="-122"/>
+                <a:cs typeface="Times New Roman" pitchFamily="34" charset="-120"/>
+              </a:rPr>
+              <a:t>Ask an elder in your family how people in your area cope with the heat, the dust and the shortage of water during the dry season. Write down two ways.</a:t>
+            </a:r>
+            <a:endParaRPr lang="en-US" sz="4000" dirty="0"/>
+          </a:p>
+        </p:txBody>
+      </p:sp>
+      <p:sp>
+        <p:nvSpPr>
+          <p:cNvPr id="25" name="Slide Number Placeholder 0"/>
+          <p:cNvSpPr>
+            <a:spLocks noGrp="1"/>
+          </p:cNvSpPr>
+          <p:nvPr>
+            <p:ph type="sldNum" sz="quarter" idx="4294967295"/>
+          </p:nvPr>
+        </p:nvSpPr>
+        <p:spPr>
+          <a:xfrm>
+            <a:off x="27432" y="91440"/>
+            <a:ext cx="585216" cy="475488"/>
+          </a:xfrm>
+          <a:prstGeom prst="rect">
+            <a:avLst/>
+          </a:prstGeom>
+          <a:extLst>
+            <a:ext uri="{C572A759-6A51-4108-AA02-DFA0A04FC94B}">
+              <ma14:wrappingTextBoxFlag xmlns:ma14="http://schemas.microsoft.com/office/mac/drawingml/2011/main" val="0"/>
+            </a:ext>
+          </a:extLst>
+        </p:spPr>
+        <p:txBody>
+          <a:bodyPr/>
+          <a:lstStyle>
+            <a:lvl1pPr>
+              <a:defRPr sz="2000">
+                <a:solidFill>
+                  <a:srgbClr val="FFFFFF"/>
+                </a:solidFill>
+                <a:latin typeface="Calibri"/>
+                <a:ea typeface="Calibri"/>
+                <a:cs typeface="Calibri"/>
+              </a:defRPr>
+            </a:lvl1pPr>
+          </a:lstStyle>
+          <a:p>
+            <a:pPr algn="ctr"/>
+            <a:fld id="{F7021451-1387-4CA6-816F-3879F97B5CBC}" type="slidenum">
+              <a:rPr b="1" lang="en-US"/>
+              <a:t>43</a:t>
+            </a:fld>
+            <a:endParaRPr lang="en-US"/>
+          </a:p>
+        </p:txBody>
+      </p:sp>
+    </p:spTree>
+  </p:cSld>
+  <p:clrMapOvr>
+    <a:masterClrMapping/>
+  </p:clrMapOvr>
+</p:sld>
+</file>
+
+<file path=ppt/slides/slide44.xml><?xml version="1.0" encoding="utf-8"?>
+<p:sld xmlns:a="http://schemas.openxmlformats.org/drawingml/2006/main" xmlns:r="http://schemas.openxmlformats.org/officeDocument/2006/relationships" xmlns:p="http://schemas.openxmlformats.org/presentationml/2006/main">
+  <p:cSld name="Slide 44">
+    <p:spTree>
+      <p:nvGrpSpPr>
+        <p:cNvPr id="1" name=""/>
+        <p:cNvGrpSpPr/>
+        <p:nvPr/>
+      </p:nvGrpSpPr>
+      <p:grpSpPr>
+        <a:xfrm>
+          <a:off x="0" y="0"/>
+          <a:ext cx="0" cy="0"/>
+          <a:chOff x="0" y="0"/>
+          <a:chExt cx="0" cy="0"/>
+        </a:xfrm>
+      </p:grpSpPr>
+      <p:sp>
+        <p:nvSpPr>
+          <p:cNvPr id="2" name="Text 0"/>
+          <p:cNvSpPr/>
+          <p:nvPr/>
+        </p:nvSpPr>
+        <p:spPr>
+          <a:xfrm>
+            <a:off x="457200" y="713232"/>
+            <a:ext cx="11368735" cy="274320"/>
+          </a:xfrm>
+          <a:prstGeom prst="rect">
+            <a:avLst/>
+          </a:prstGeom>
+          <a:noFill/>
+          <a:ln/>
+        </p:spPr>
+        <p:txBody>
+          <a:bodyPr wrap="square" lIns="0" tIns="0" rIns="0" bIns="0" rtlCol="0" anchor="ctr"/>
+          <a:lstStyle/>
+          <a:p>
+            <a:pPr algn="r" indent="0" marL="0">
+              <a:buNone/>
+            </a:pPr>
+            <a:r>
+              <a:rPr lang="en-US" sz="1400" b="1" dirty="0">
+                <a:solidFill>
+                  <a:srgbClr val="1C3F6E"/>
+                </a:solidFill>
+                <a:latin typeface="Calibri" pitchFamily="34" charset="0"/>
+                <a:ea typeface="Calibri" pitchFamily="34" charset="-122"/>
+                <a:cs typeface="Calibri" pitchFamily="34" charset="-120"/>
+              </a:rPr>
+              <a:t>NEXT LESSON</a:t>
+            </a:r>
+            <a:endParaRPr lang="en-US" sz="1400" dirty="0"/>
+          </a:p>
+        </p:txBody>
+      </p:sp>
+      <p:pic>
+        <p:nvPicPr>
+          <p:cNvPr id="3" name="Image 0" descr="/home/claude/f4/img/minesec_sheet.png">    </p:cNvPr>
+          <p:cNvPicPr>
+            <a:picLocks noChangeAspect="1"/>
+          </p:cNvPicPr>
+          <p:nvPr/>
+        </p:nvPicPr>
+        <p:blipFill>
+          <a:blip r:embed="rId1"/>
+          <a:stretch>
+            <a:fillRect/>
+          </a:stretch>
+        </p:blipFill>
+        <p:spPr>
+          <a:xfrm>
+            <a:off x="0" y="658368"/>
+            <a:ext cx="5120640" cy="5833872"/>
+          </a:xfrm>
+          <a:prstGeom prst="rect">
+            <a:avLst/>
+          </a:prstGeom>
+        </p:spPr>
+      </p:pic>
+      <p:sp>
+        <p:nvSpPr>
+          <p:cNvPr id="4" name="Text 1"/>
+          <p:cNvSpPr/>
+          <p:nvPr/>
+        </p:nvSpPr>
+        <p:spPr>
+          <a:xfrm>
+            <a:off x="5349240" y="1005840"/>
+            <a:ext cx="6522415" cy="731520"/>
+          </a:xfrm>
+          <a:prstGeom prst="rect">
+            <a:avLst/>
+          </a:prstGeom>
+          <a:noFill/>
+          <a:ln/>
+        </p:spPr>
+        <p:txBody>
+          <a:bodyPr wrap="square" lIns="0" tIns="0" rIns="0" bIns="0" rtlCol="0" anchor="ctr">
+            <a:normAutofit/>
+          </a:bodyPr>
+          <a:lstStyle/>
+          <a:p>
+            <a:pPr algn="ctr" indent="0" marL="0">
+              <a:buNone/>
+            </a:pPr>
+            <a:r>
+              <a:rPr lang="en-US" sz="3600" b="1" dirty="0">
+                <a:solidFill>
+                  <a:srgbClr val="990011"/>
+                </a:solidFill>
+                <a:latin typeface="Times New Roman" pitchFamily="34" charset="0"/>
+                <a:ea typeface="Times New Roman" pitchFamily="34" charset="-122"/>
+                <a:cs typeface="Times New Roman" pitchFamily="34" charset="-120"/>
+              </a:rPr>
+              <a:t>Next Lesson</a:t>
+            </a:r>
+            <a:endParaRPr lang="en-US" sz="3600" dirty="0"/>
+          </a:p>
+        </p:txBody>
+      </p:sp>
+      <p:sp>
+        <p:nvSpPr>
+          <p:cNvPr id="5" name="Text 2"/>
+          <p:cNvSpPr/>
+          <p:nvPr/>
+        </p:nvSpPr>
+        <p:spPr>
+          <a:xfrm>
+            <a:off x="5349240" y="1783080"/>
+            <a:ext cx="6522415" cy="4663440"/>
+          </a:xfrm>
+          <a:prstGeom prst="rect">
+            <a:avLst/>
+          </a:prstGeom>
+          <a:noFill/>
+          <a:ln/>
+        </p:spPr>
+        <p:txBody>
+          <a:bodyPr wrap="square" lIns="0" tIns="0" rIns="0" bIns="0" rtlCol="0" anchor="ctr"/>
+          <a:lstStyle/>
+          <a:p>
+            <a:pPr algn="ctr" indent="0" marL="0">
+              <a:spcAft>
+                <a:spcPts val="800"/>
+              </a:spcAft>
+              <a:buNone/>
+            </a:pPr>
+            <a:r>
+              <a:rPr lang="en-US" sz="4000" b="1" dirty="0">
+                <a:solidFill>
+                  <a:srgbClr val="111111"/>
+                </a:solidFill>
+                <a:latin typeface="Times New Roman" pitchFamily="34" charset="0"/>
+                <a:ea typeface="Times New Roman" pitchFamily="34" charset="-122"/>
+                <a:cs typeface="Times New Roman" pitchFamily="34" charset="-120"/>
+              </a:rPr>
+              <a:t>Our next lesson will be on:</a:t>
+            </a:r>
+            <a:endParaRPr lang="en-US" sz="4000" dirty="0"/>
+          </a:p>
+          <a:p>
+            <a:pPr algn="ctr" indent="0" marL="0">
+              <a:spcAft>
+                <a:spcPts val="800"/>
+              </a:spcAft>
+              <a:buNone/>
+            </a:pPr>
+            <a:r>
+              <a:rPr lang="en-US" sz="4000" b="1" dirty="0">
+                <a:solidFill>
+                  <a:srgbClr val="990011"/>
+                </a:solidFill>
+                <a:latin typeface="Times New Roman" pitchFamily="34" charset="0"/>
+                <a:ea typeface="Times New Roman" pitchFamily="34" charset="-122"/>
+                <a:cs typeface="Times New Roman" pitchFamily="34" charset="-120"/>
+              </a:rPr>
+              <a:t>Lesson 29: Man in the Hot Desert Environments</a:t>
+            </a:r>
+            <a:endParaRPr lang="en-US" sz="4000" dirty="0"/>
+          </a:p>
+        </p:txBody>
+      </p:sp>
+      <p:sp>
+        <p:nvSpPr>
+          <p:cNvPr id="25" name="Slide Number Placeholder 0"/>
+          <p:cNvSpPr>
+            <a:spLocks noGrp="1"/>
+          </p:cNvSpPr>
+          <p:nvPr>
+            <p:ph type="sldNum" sz="quarter" idx="4294967295"/>
+          </p:nvPr>
+        </p:nvSpPr>
+        <p:spPr>
+          <a:xfrm>
+            <a:off x="27432" y="91440"/>
+            <a:ext cx="585216" cy="475488"/>
+          </a:xfrm>
+          <a:prstGeom prst="rect">
+            <a:avLst/>
+          </a:prstGeom>
+          <a:extLst>
+            <a:ext uri="{C572A759-6A51-4108-AA02-DFA0A04FC94B}">
+              <ma14:wrappingTextBoxFlag xmlns:ma14="http://schemas.microsoft.com/office/mac/drawingml/2011/main" val="0"/>
+            </a:ext>
+          </a:extLst>
+        </p:spPr>
+        <p:txBody>
+          <a:bodyPr/>
+          <a:lstStyle>
+            <a:lvl1pPr>
+              <a:defRPr sz="2000">
+                <a:solidFill>
+                  <a:srgbClr val="FFFFFF"/>
+                </a:solidFill>
+                <a:latin typeface="Calibri"/>
+                <a:ea typeface="Calibri"/>
+                <a:cs typeface="Calibri"/>
+              </a:defRPr>
+            </a:lvl1pPr>
+          </a:lstStyle>
+          <a:p>
+            <a:pPr algn="ctr"/>
+            <a:fld id="{F7021451-1387-4CA6-816F-3879F97B5CBC}" type="slidenum">
+              <a:rPr b="1" lang="en-US"/>
+              <a:t>44</a:t>
+            </a:fld>
+            <a:endParaRPr lang="en-US"/>
+          </a:p>
+        </p:txBody>
+      </p:sp>
+    </p:spTree>
+  </p:cSld>
+  <p:clrMapOvr>
+    <a:masterClrMapping/>
+  </p:clrMapOvr>
+</p:sld>
+</file>
+
+<file path=ppt/slides/slide45.xml><?xml version="1.0" encoding="utf-8"?>
+<p:sld xmlns:a="http://schemas.openxmlformats.org/drawingml/2006/main" xmlns:r="http://schemas.openxmlformats.org/officeDocument/2006/relationships" xmlns:p="http://schemas.openxmlformats.org/presentationml/2006/main">
+  <p:cSld name="Slide 45">
+    <p:spTree>
+      <p:nvGrpSpPr>
+        <p:cNvPr id="1" name=""/>
+        <p:cNvGrpSpPr/>
+        <p:nvPr/>
+      </p:nvGrpSpPr>
+      <p:grpSpPr>
+        <a:xfrm>
+          <a:off x="0" y="0"/>
+          <a:ext cx="0" cy="0"/>
+          <a:chOff x="0" y="0"/>
+          <a:chExt cx="0" cy="0"/>
+        </a:xfrm>
+      </p:grpSpPr>
+      <p:sp>
+        <p:nvSpPr>
+          <p:cNvPr id="2" name="Text 0"/>
+          <p:cNvSpPr/>
+          <p:nvPr/>
+        </p:nvSpPr>
+        <p:spPr>
+          <a:xfrm>
+            <a:off x="457200" y="713232"/>
+            <a:ext cx="11368735" cy="274320"/>
+          </a:xfrm>
+          <a:prstGeom prst="rect">
+            <a:avLst/>
+          </a:prstGeom>
+          <a:noFill/>
+          <a:ln/>
+        </p:spPr>
+        <p:txBody>
+          <a:bodyPr wrap="square" lIns="0" tIns="0" rIns="0" bIns="0" rtlCol="0" anchor="ctr"/>
+          <a:lstStyle/>
+          <a:p>
+            <a:pPr algn="r" indent="0" marL="0">
+              <a:buNone/>
+            </a:pPr>
+            <a:r>
+              <a:rPr lang="en-US" sz="1400" b="1" dirty="0">
+                <a:solidFill>
+                  <a:srgbClr val="1C3F6E"/>
+                </a:solidFill>
+                <a:latin typeface="Calibri" pitchFamily="34" charset="0"/>
+                <a:ea typeface="Calibri" pitchFamily="34" charset="-122"/>
+                <a:cs typeface="Calibri" pitchFamily="34" charset="-120"/>
+              </a:rPr>
               <a:t>BILINGUAL GAME</a:t>
             </a:r>
             <a:endParaRPr lang="en-US" sz="1400" dirty="0"/>
@@ -15124,7 +16130,7 @@
       </p:sp>
       <p:graphicFrame>
         <p:nvGraphicFramePr>
-          <p:cNvPr id="43" name="Table 0"/>
+          <p:cNvPr id="46" name="Table 0"/>
           <p:cNvGraphicFramePr>
             <a:graphicFrameLocks noGrp="1"/>
           </p:cNvGraphicFramePr>
@@ -16436,7 +17442,7 @@
             <a:pPr algn="ctr"/>
             <a:fld id="{F7021451-1387-4CA6-816F-3879F97B5CBC}" type="slidenum">
               <a:rPr b="1" lang="en-US"/>
-              <a:t>42</a:t>
+              <a:t>45</a:t>
             </a:fld>
             <a:endParaRPr lang="en-US"/>
           </a:p>
@@ -16450,9 +17456,9 @@
 </p:sld>
 </file>
 
-<file path=ppt/slides/slide43.xml><?xml version="1.0" encoding="utf-8"?>
+<file path=ppt/slides/slide46.xml><?xml version="1.0" encoding="utf-8"?>
 <p:sld xmlns:a="http://schemas.openxmlformats.org/drawingml/2006/main" xmlns:r="http://schemas.openxmlformats.org/officeDocument/2006/relationships" xmlns:p="http://schemas.openxmlformats.org/presentationml/2006/main">
-  <p:cSld name="Slide 43">
+  <p:cSld name="Slide 46">
     <p:spTree>
       <p:nvGrpSpPr>
         <p:cNvPr id="1" name=""/>
@@ -16547,7 +17553,7 @@
       </p:sp>
       <p:graphicFrame>
         <p:nvGraphicFramePr>
-          <p:cNvPr id="44" name="Table 0"/>
+          <p:cNvPr id="47" name="Table 0"/>
           <p:cNvGraphicFramePr>
             <a:graphicFrameLocks noGrp="1"/>
           </p:cNvGraphicFramePr>
@@ -17169,7 +18175,7 @@
             <a:pPr algn="ctr"/>
             <a:fld id="{F7021451-1387-4CA6-816F-3879F97B5CBC}" type="slidenum">
               <a:rPr b="1" lang="en-US"/>
-              <a:t>43</a:t>
+              <a:t>46</a:t>
             </a:fld>
             <a:endParaRPr lang="en-US"/>
           </a:p>
@@ -17183,9 +18189,9 @@
 </p:sld>
 </file>
 
-<file path=ppt/slides/slide44.xml><?xml version="1.0" encoding="utf-8"?>
+<file path=ppt/slides/slide47.xml><?xml version="1.0" encoding="utf-8"?>
 <p:sld xmlns:a="http://schemas.openxmlformats.org/drawingml/2006/main" xmlns:r="http://schemas.openxmlformats.org/officeDocument/2006/relationships" xmlns:p="http://schemas.openxmlformats.org/presentationml/2006/main">
-  <p:cSld name="Slide 44">
+  <p:cSld name="Slide 47">
     <p:spTree>
       <p:nvGrpSpPr>
         <p:cNvPr id="1" name=""/>
@@ -17280,7 +18286,7 @@
       </p:sp>
       <p:graphicFrame>
         <p:nvGraphicFramePr>
-          <p:cNvPr id="45" name="Table 0"/>
+          <p:cNvPr id="48" name="Table 0"/>
           <p:cNvGraphicFramePr>
             <a:graphicFrameLocks noGrp="1"/>
           </p:cNvGraphicFramePr>
@@ -17390,7 +18396,7 @@
                           <a:ea typeface="Calibri" pitchFamily="34" charset="-122"/>
                           <a:cs typeface="Calibri" pitchFamily="34" charset="-120"/>
                         </a:rPr>
-                        <a:t>DEFINITIONS; Causes of Wind Deposition; Depositional Features.</a:t>
+                        <a:t>DEFINITIONS; Depositional Features of Wind Action; Dunes.</a:t>
                       </a:r>
                       <a:endParaRPr lang="en-US" sz="1600" dirty="0">
                         <a:latin typeface="Calibri" charset="0"/>
@@ -18040,7 +19046,7 @@
             <a:pPr algn="ctr"/>
             <a:fld id="{F7021451-1387-4CA6-816F-3879F97B5CBC}" type="slidenum">
               <a:rPr b="1" lang="en-US"/>
-              <a:t>44</a:t>
+              <a:t>47</a:t>
             </a:fld>
             <a:endParaRPr lang="en-US"/>
           </a:p>
@@ -18054,9 +19060,9 @@
 </p:sld>
 </file>
 
-<file path=ppt/slides/slide45.xml><?xml version="1.0" encoding="utf-8"?>
+<file path=ppt/slides/slide48.xml><?xml version="1.0" encoding="utf-8"?>
 <p:sld xmlns:a="http://schemas.openxmlformats.org/drawingml/2006/main" xmlns:r="http://schemas.openxmlformats.org/officeDocument/2006/relationships" xmlns:p="http://schemas.openxmlformats.org/presentationml/2006/main">
-  <p:cSld name="Slide 45">
+  <p:cSld name="Slide 48">
     <p:spTree>
       <p:nvGrpSpPr>
         <p:cNvPr id="1" name=""/>
@@ -18254,7 +19260,7 @@
                 <a:ea typeface="Calibri" pitchFamily="34" charset="-122"/>
                 <a:cs typeface="Calibri" pitchFamily="34" charset="-120"/>
               </a:rPr>
-              <a:t>Without the projector (Activity 1): draw a dune: a gentle slope and a steep slope.</a:t>
+              <a:t>Without the projector (Activity 1): draw a dune with an arrow for the wind.</a:t>
             </a:r>
             <a:endParaRPr lang="en-US" sz="2000" dirty="0"/>
           </a:p>
@@ -18275,7 +19281,7 @@
                 <a:ea typeface="Calibri" pitchFamily="34" charset="-122"/>
                 <a:cs typeface="Calibri" pitchFamily="34" charset="-120"/>
               </a:rPr>
-              <a:t>Without the projector (Activity 2): draw a crescent with two horns.</a:t>
+              <a:t>Without the projector (Activity 2): draw a crescent on the board.</a:t>
             </a:r>
             <a:endParaRPr lang="en-US" sz="2000" dirty="0"/>
           </a:p>
@@ -18296,7 +19302,7 @@
                 <a:ea typeface="Calibri" pitchFamily="34" charset="-122"/>
                 <a:cs typeface="Calibri" pitchFamily="34" charset="-120"/>
               </a:rPr>
-              <a:t>Without the projector (Activity 3): draw long parallel lines of sand.</a:t>
+              <a:t>Without the projector (Activity 3): draw long lines of sand.</a:t>
             </a:r>
             <a:endParaRPr lang="en-US" sz="2000" dirty="0"/>
           </a:p>
@@ -18344,7 +19350,7 @@
             <a:pPr algn="ctr"/>
             <a:fld id="{F7021451-1387-4CA6-816F-3879F97B5CBC}" type="slidenum">
               <a:rPr b="1" lang="en-US"/>
-              <a:t>45</a:t>
+              <a:t>48</a:t>
             </a:fld>
             <a:endParaRPr lang="en-US"/>
           </a:p>
@@ -18358,9 +19364,9 @@
 </p:sld>
 </file>
 
-<file path=ppt/slides/slide46.xml><?xml version="1.0" encoding="utf-8"?>
+<file path=ppt/slides/slide49.xml><?xml version="1.0" encoding="utf-8"?>
 <p:sld xmlns:a="http://schemas.openxmlformats.org/drawingml/2006/main" xmlns:r="http://schemas.openxmlformats.org/officeDocument/2006/relationships" xmlns:p="http://schemas.openxmlformats.org/presentationml/2006/main">
-  <p:cSld name="Slide 46">
+  <p:cSld name="Slide 49">
     <p:spTree>
       <p:nvGrpSpPr>
         <p:cNvPr id="1" name=""/>
@@ -18627,7 +19633,7 @@
             <a:pPr algn="ctr"/>
             <a:fld id="{F7021451-1387-4CA6-816F-3879F97B5CBC}" type="slidenum">
               <a:rPr b="1" lang="en-US"/>
-              <a:t>46</a:t>
+              <a:t>49</a:t>
             </a:fld>
             <a:endParaRPr lang="en-US"/>
           </a:p>

--- a/lecons/F3/32_FORM4_LESSON28_Depositional_Features_Wind.pptx
+++ b/lecons/F3/32_FORM4_LESSON28_Depositional_Features_Wind.pptx
@@ -3454,7 +3454,7 @@
           <a:p>
             <a:r>
               <a:rPr lang="en-US" dirty="0"/>
-              <a:t>Before we start the new lesson, let us correct the homework I gave you at the end of Lesson 27: Semi-Arid and Desert Landscapes. The question was: After the next windy day, look around your compound. Find a place where sand or dust has piled up, for example behind a wall, a stone or a bush, and write down why you think it collected there. Take out your exercise books.</a:t>
+              <a:t>Before we start the new lesson, let us correct the homework I gave you at the end of Lesson 27: Semi-Arid and Desert Landscapes. The question was: Name the two types of sand dunes. Take out your exercise books.</a:t>
             </a:r>
             <a:endParaRPr lang="en-US" dirty="0"/>
           </a:p>
@@ -3806,7 +3806,7 @@
           <a:p>
             <a:r>
               <a:rPr lang="en-US" dirty="0"/>
-              <a:t>For your homework: Ask an elder in your family how people in your area cope with the heat, the dust and the shortage of water during the dry season. Write down two ways. We shall correct it at the beginning of our next lesson.</a:t>
+              <a:t>For your homework: Give two resources of hot deserts. We shall correct it at the beginning of our next lesson.</a:t>
             </a:r>
             <a:endParaRPr lang="en-US" dirty="0"/>
           </a:p>
@@ -4422,7 +4422,7 @@
           <a:p>
             <a:r>
               <a:rPr lang="en-US" dirty="0"/>
-              <a:t>Here is a good answer. Sand piles up behind a wall, a stone or a bush because the obstacle slows down the wind, so the wind drops the sand it was carrying. Compare it with your own answer and correct your work in red.</a:t>
+              <a:t>Here is a good answer. Barchans and seif dunes. Compare it with your own answer and correct your work in red.</a:t>
             </a:r>
             <a:endParaRPr lang="en-US" dirty="0"/>
           </a:p>
@@ -14686,7 +14686,7 @@
         <p:spPr>
           <a:xfrm>
             <a:off x="0" y="658368"/>
-            <a:ext cx="2468880" cy="5833872"/>
+            <a:ext cx="5120640" cy="5833872"/>
           </a:xfrm>
           <a:prstGeom prst="rect">
             <a:avLst/>
@@ -14701,8 +14701,8 @@
         </p:nvSpPr>
         <p:spPr>
           <a:xfrm>
-            <a:off x="2697480" y="1005840"/>
-            <a:ext cx="9174175" cy="731520"/>
+            <a:off x="5349240" y="1005840"/>
+            <a:ext cx="6522415" cy="731520"/>
           </a:xfrm>
           <a:prstGeom prst="rect">
             <a:avLst/>
@@ -14742,8 +14742,8 @@
         </p:nvSpPr>
         <p:spPr>
           <a:xfrm>
-            <a:off x="2697480" y="1783080"/>
-            <a:ext cx="9174175" cy="4663440"/>
+            <a:off x="5349240" y="1783080"/>
+            <a:ext cx="6522415" cy="4663440"/>
           </a:xfrm>
           <a:prstGeom prst="rect">
             <a:avLst/>
@@ -14790,7 +14790,7 @@
                 <a:ea typeface="Times New Roman" pitchFamily="34" charset="-122"/>
                 <a:cs typeface="Times New Roman" pitchFamily="34" charset="-120"/>
               </a:rPr>
-              <a:t>After the next windy day, look around your compound. Find a place where sand or dust has piled up, for example behind a wall, a stone or a bush, and write down why you think it collected there.</a:t>
+              <a:t>Name the two types of sand dunes.</a:t>
             </a:r>
             <a:endParaRPr lang="en-US" sz="4000" dirty="0"/>
           </a:p>
@@ -15732,7 +15732,7 @@
                 <a:ea typeface="Times New Roman" pitchFamily="34" charset="-122"/>
                 <a:cs typeface="Times New Roman" pitchFamily="34" charset="-120"/>
               </a:rPr>
-              <a:t>Ask an elder in your family how people in your area cope with the heat, the dust and the shortage of water during the dry season. Write down two ways.</a:t>
+              <a:t>Give two resources of hot deserts.</a:t>
             </a:r>
             <a:endParaRPr lang="en-US" sz="4000" dirty="0"/>
           </a:p>
@@ -18672,7 +18672,7 @@
                           <a:ea typeface="Calibri" pitchFamily="34" charset="-122"/>
                           <a:cs typeface="Calibri" pitchFamily="34" charset="-120"/>
                         </a:rPr>
-                        <a:t>Ask an elder in your family how people in your area cope with the heat, the dust and the shortage of water during the dry season. Write down two ways.</a:t>
+                        <a:t>Give two resources of hot deserts.</a:t>
                       </a:r>
                       <a:endParaRPr lang="en-US" sz="1600" dirty="0">
                         <a:latin typeface="Calibri" charset="0"/>
@@ -19804,7 +19804,7 @@
                 <a:ea typeface="Times New Roman" pitchFamily="34" charset="-122"/>
                 <a:cs typeface="Times New Roman" pitchFamily="34" charset="-120"/>
               </a:rPr>
-              <a:t>Sand piles up behind a wall, a stone or a bush because the obstacle slows down the wind, so the wind drops the sand it was carrying.</a:t>
+              <a:t>Barchans and seif dunes.</a:t>
             </a:r>
             <a:endParaRPr lang="en-US" sz="4000" dirty="0"/>
           </a:p>

--- a/lecons/F3/32_FORM4_LESSON28_Depositional_Features_Wind.pptx
+++ b/lecons/F3/32_FORM4_LESSON28_Depositional_Features_Wind.pptx
@@ -2750,7 +2750,7 @@
           <a:p>
             <a:r>
               <a:rPr lang="en-US" dirty="0"/>
-              <a:t>Let us copy Depositional Features of Wind Action. Wind deposition takes place and forms features as follows. On this slide we have Causes of deposition. Write each point on a new line, with the key term first, and explain it in your own words when we revise. When you finish, we go to the next slide.</a:t>
+              <a:t>Let us copy Causes of Deposition. The wind deposits its load for the following reasons. On this slide we have Fall in wind speed and Obstacles. Write each point on a new line, with the key term first, and explain it in your own words when we revise. When you finish, we go to the next slide.</a:t>
             </a:r>
             <a:endParaRPr lang="en-US" dirty="0"/>
           </a:p>
@@ -2838,7 +2838,7 @@
           <a:p>
             <a:r>
               <a:rPr lang="en-US" dirty="0"/>
-              <a:t>We continue with Depositional Features of Wind Action. On this slide we have Sand sheets and ripples. Write each point on a new line, with the key term first, and explain it in your own words when we revise.</a:t>
+              <a:t>We continue with Causes of Deposition. On this slide we have Wet sand. Write each point on a new line, with the key term first, and explain it in your own words when we revise.</a:t>
             </a:r>
             <a:endParaRPr lang="en-US" dirty="0"/>
           </a:p>
@@ -2926,7 +2926,7 @@
           <a:p>
             <a:r>
               <a:rPr lang="en-US" dirty="0"/>
-              <a:t>Copy the point on Sand dunes on the left, then draw the diagram on the right: how a dune moves. Give it a title and label it clearly.</a:t>
+              <a:t>Let us copy Features of Deposition. Wind deposition forms the following features. Copy the point on Sand dunes on the left, then draw the diagram on the right: how a dune moves. Give it a title and label it clearly.</a:t>
             </a:r>
             <a:endParaRPr lang="en-US" dirty="0"/>
           </a:p>
@@ -3014,7 +3014,7 @@
           <a:p>
             <a:r>
               <a:rPr lang="en-US" dirty="0"/>
-              <a:t>We continue with Depositional Features of Wind Action. On this slide we have Loess. Write each point on a new line, with the key term first, and explain it in your own words when we revise.</a:t>
+              <a:t>We continue with Features of Deposition. On this slide we have Sand sheets, Ripples and Loess. Write each point on a new line, with the key term first, and explain it in your own words when we revise.</a:t>
             </a:r>
             <a:endParaRPr lang="en-US" dirty="0"/>
           </a:p>
@@ -12675,7 +12675,7 @@
         <p:spPr>
           <a:xfrm>
             <a:off x="0" y="658368"/>
-            <a:ext cx="3840480" cy="5833872"/>
+            <a:ext cx="1463040" cy="5833872"/>
           </a:xfrm>
           <a:prstGeom prst="rect">
             <a:avLst/>
@@ -12690,8 +12690,8 @@
         </p:nvSpPr>
         <p:spPr>
           <a:xfrm>
-            <a:off x="4069080" y="1005840"/>
-            <a:ext cx="7802575" cy="731520"/>
+            <a:off x="1691640" y="1005840"/>
+            <a:ext cx="10180015" cy="731520"/>
           </a:xfrm>
           <a:prstGeom prst="rect">
             <a:avLst/>
@@ -12731,8 +12731,47 @@
         </p:nvSpPr>
         <p:spPr>
           <a:xfrm>
-            <a:off x="4069080" y="1783080"/>
-            <a:ext cx="7802575" cy="4663440"/>
+            <a:off x="1691640" y="1737360"/>
+            <a:ext cx="10180015" cy="457200"/>
+          </a:xfrm>
+          <a:prstGeom prst="rect">
+            <a:avLst/>
+          </a:prstGeom>
+          <a:noFill/>
+          <a:ln/>
+        </p:spPr>
+        <p:txBody>
+          <a:bodyPr wrap="square" lIns="0" tIns="0" rIns="0" bIns="0" rtlCol="0" anchor="ctr"/>
+          <a:lstStyle/>
+          <a:p>
+            <a:pPr algn="l" indent="0" marL="0">
+              <a:buNone/>
+            </a:pPr>
+            <a:r>
+              <a:rPr lang="en-US" sz="3200" b="1" dirty="0">
+                <a:solidFill>
+                  <a:srgbClr val="990011"/>
+                </a:solidFill>
+                <a:latin typeface="Times New Roman" pitchFamily="34" charset="0"/>
+                <a:ea typeface="Times New Roman" pitchFamily="34" charset="-122"/>
+                <a:cs typeface="Times New Roman" pitchFamily="34" charset="-120"/>
+              </a:rPr>
+              <a:t>A) Causes of Deposition</a:t>
+            </a:r>
+            <a:endParaRPr lang="en-US" sz="3200" dirty="0"/>
+          </a:p>
+        </p:txBody>
+      </p:sp>
+      <p:sp>
+        <p:nvSpPr>
+          <p:cNvPr id="6" name="Text 3"/>
+          <p:cNvSpPr/>
+          <p:nvPr/>
+        </p:nvSpPr>
+        <p:spPr>
+          <a:xfrm>
+            <a:off x="1691640" y="2240280"/>
+            <a:ext cx="10180015" cy="4206240"/>
           </a:xfrm>
           <a:prstGeom prst="rect">
             <a:avLst/>
@@ -12759,7 +12798,7 @@
                 <a:ea typeface="Times New Roman" pitchFamily="34" charset="-122"/>
                 <a:cs typeface="Times New Roman" pitchFamily="34" charset="-120"/>
               </a:rPr>
-              <a:t>Wind deposition takes place and forms features as follows:</a:t>
+              <a:t>The wind deposits its load for the following reasons:</a:t>
             </a:r>
             <a:endParaRPr lang="en-US" sz="4000" dirty="0"/>
           </a:p>
@@ -12779,7 +12818,7 @@
                 <a:ea typeface="Times New Roman" pitchFamily="34" charset="-122"/>
                 <a:cs typeface="Times New Roman" pitchFamily="34" charset="-120"/>
               </a:rPr>
-              <a:t>Causes of deposition: </a:t>
+              <a:t>Fall in wind speed: </a:t>
             </a:r>
             <a:pPr algn="l" indent="0" marL="0">
               <a:spcAft>
@@ -12796,7 +12835,44 @@
                 <a:ea typeface="Times New Roman" pitchFamily="34" charset="-122"/>
                 <a:cs typeface="Times New Roman" pitchFamily="34" charset="-120"/>
               </a:rPr>
-              <a:t>The wind drops sand when it slows down, meets an obstacle such as a rock or a bush, or when the sand becomes wet.</a:t>
+              <a:t>The wind slows down and can no longer carry the sand.</a:t>
+            </a:r>
+            <a:endParaRPr lang="en-US" sz="4000" dirty="0"/>
+          </a:p>
+          <a:p>
+            <a:pPr algn="l" indent="0" marL="0">
+              <a:spcAft>
+                <a:spcPts val="800"/>
+              </a:spcAft>
+              <a:buNone/>
+            </a:pPr>
+            <a:r>
+              <a:rPr lang="en-US" sz="4000" b="1" dirty="0">
+                <a:solidFill>
+                  <a:srgbClr val="111111"/>
+                </a:solidFill>
+                <a:latin typeface="Times New Roman" pitchFamily="34" charset="0"/>
+                <a:ea typeface="Times New Roman" pitchFamily="34" charset="-122"/>
+                <a:cs typeface="Times New Roman" pitchFamily="34" charset="-120"/>
+              </a:rPr>
+              <a:t>Obstacles: </a:t>
+            </a:r>
+            <a:pPr algn="l" indent="0" marL="0">
+              <a:spcAft>
+                <a:spcPts val="800"/>
+              </a:spcAft>
+              <a:buNone/>
+            </a:pPr>
+            <a:r>
+              <a:rPr lang="en-US" sz="4000" dirty="0">
+                <a:solidFill>
+                  <a:srgbClr val="111111"/>
+                </a:solidFill>
+                <a:latin typeface="Times New Roman" pitchFamily="34" charset="0"/>
+                <a:ea typeface="Times New Roman" pitchFamily="34" charset="-122"/>
+                <a:cs typeface="Times New Roman" pitchFamily="34" charset="-120"/>
+              </a:rPr>
+              <a:t>A rock, a bush or a wall stops the wind, and the sand piles up behind it.</a:t>
             </a:r>
             <a:endParaRPr lang="en-US" sz="4000" dirty="0"/>
           </a:p>
@@ -12973,7 +13049,7 @@
                 <a:ea typeface="Times New Roman" pitchFamily="34" charset="-122"/>
                 <a:cs typeface="Times New Roman" pitchFamily="34" charset="-120"/>
               </a:rPr>
-              <a:t>1. Depositional Features of Wind Action (continued)</a:t>
+              <a:t>1. Depositional Features of Wind Action</a:t>
             </a:r>
             <a:endParaRPr lang="en-US" sz="3600" dirty="0"/>
           </a:p>
@@ -12987,8 +13063,47 @@
         </p:nvSpPr>
         <p:spPr>
           <a:xfrm>
-            <a:off x="5349240" y="1783080"/>
-            <a:ext cx="6522415" cy="4663440"/>
+            <a:off x="5349240" y="1737360"/>
+            <a:ext cx="6522415" cy="457200"/>
+          </a:xfrm>
+          <a:prstGeom prst="rect">
+            <a:avLst/>
+          </a:prstGeom>
+          <a:noFill/>
+          <a:ln/>
+        </p:spPr>
+        <p:txBody>
+          <a:bodyPr wrap="square" lIns="0" tIns="0" rIns="0" bIns="0" rtlCol="0" anchor="ctr"/>
+          <a:lstStyle/>
+          <a:p>
+            <a:pPr algn="l" indent="0" marL="0">
+              <a:buNone/>
+            </a:pPr>
+            <a:r>
+              <a:rPr lang="en-US" sz="2900" b="1" dirty="0">
+                <a:solidFill>
+                  <a:srgbClr val="990011"/>
+                </a:solidFill>
+                <a:latin typeface="Times New Roman" pitchFamily="34" charset="0"/>
+                <a:ea typeface="Times New Roman" pitchFamily="34" charset="-122"/>
+                <a:cs typeface="Times New Roman" pitchFamily="34" charset="-120"/>
+              </a:rPr>
+              <a:t>A) Causes of Deposition (continued)</a:t>
+            </a:r>
+            <a:endParaRPr lang="en-US" sz="2900" dirty="0"/>
+          </a:p>
+        </p:txBody>
+      </p:sp>
+      <p:sp>
+        <p:nvSpPr>
+          <p:cNvPr id="6" name="Text 3"/>
+          <p:cNvSpPr/>
+          <p:nvPr/>
+        </p:nvSpPr>
+        <p:spPr>
+          <a:xfrm>
+            <a:off x="5349240" y="2240280"/>
+            <a:ext cx="6522415" cy="4206240"/>
           </a:xfrm>
           <a:prstGeom prst="rect">
             <a:avLst/>
@@ -13015,7 +13130,7 @@
                 <a:ea typeface="Times New Roman" pitchFamily="34" charset="-122"/>
                 <a:cs typeface="Times New Roman" pitchFamily="34" charset="-120"/>
               </a:rPr>
-              <a:t>Sand sheets and ripples: </a:t>
+              <a:t>Wet sand: </a:t>
             </a:r>
             <a:pPr algn="l" indent="0" marL="0">
               <a:spcAft>
@@ -13032,7 +13147,7 @@
                 <a:ea typeface="Times New Roman" pitchFamily="34" charset="-122"/>
                 <a:cs typeface="Times New Roman" pitchFamily="34" charset="-120"/>
               </a:rPr>
-              <a:t>Wide, flat spreads of sand are marked with small waves called ripples.</a:t>
+              <a:t>Damp sand sticks together and the wind cannot lift it.</a:t>
             </a:r>
             <a:endParaRPr lang="en-US" sz="4000" dirty="0"/>
           </a:p>
@@ -13199,8 +13314,49 @@
         </p:nvSpPr>
         <p:spPr>
           <a:xfrm>
-            <a:off x="365760" y="1783080"/>
-            <a:ext cx="4846320" cy="4617720"/>
+            <a:off x="365760" y="1737360"/>
+            <a:ext cx="5120640" cy="457200"/>
+          </a:xfrm>
+          <a:prstGeom prst="rect">
+            <a:avLst/>
+          </a:prstGeom>
+          <a:noFill/>
+          <a:ln/>
+        </p:spPr>
+        <p:txBody>
+          <a:bodyPr wrap="square" lIns="0" tIns="0" rIns="0" bIns="0" rtlCol="0" anchor="ctr">
+            <a:normAutofit/>
+          </a:bodyPr>
+          <a:lstStyle/>
+          <a:p>
+            <a:pPr algn="l" indent="0" marL="0">
+              <a:buNone/>
+            </a:pPr>
+            <a:r>
+              <a:rPr lang="en-US" sz="3000" b="1" dirty="0">
+                <a:solidFill>
+                  <a:srgbClr val="990011"/>
+                </a:solidFill>
+                <a:latin typeface="Times New Roman" pitchFamily="34" charset="0"/>
+                <a:ea typeface="Times New Roman" pitchFamily="34" charset="-122"/>
+                <a:cs typeface="Times New Roman" pitchFamily="34" charset="-120"/>
+              </a:rPr>
+              <a:t>B) Features of Deposition</a:t>
+            </a:r>
+            <a:endParaRPr lang="en-US" sz="3000" dirty="0"/>
+          </a:p>
+        </p:txBody>
+      </p:sp>
+      <p:sp>
+        <p:nvSpPr>
+          <p:cNvPr id="5" name="Text 3"/>
+          <p:cNvSpPr/>
+          <p:nvPr/>
+        </p:nvSpPr>
+        <p:spPr>
+          <a:xfrm>
+            <a:off x="365760" y="2240280"/>
+            <a:ext cx="4846320" cy="4160520"/>
           </a:xfrm>
           <a:prstGeom prst="rect">
             <a:avLst/>
@@ -13219,7 +13375,7 @@
               <a:buNone/>
             </a:pPr>
             <a:r>
-              <a:rPr lang="en-US" sz="3600" b="1" dirty="0">
+              <a:rPr lang="en-US" sz="3600" i="1" dirty="0">
                 <a:solidFill>
                   <a:srgbClr val="111111"/>
                 </a:solidFill>
@@ -13227,8 +13383,11 @@
                 <a:ea typeface="Times New Roman" pitchFamily="34" charset="-122"/>
                 <a:cs typeface="Times New Roman" pitchFamily="34" charset="-120"/>
               </a:rPr>
-              <a:t>Sand dunes: </a:t>
-            </a:r>
+              <a:t>Wind deposition forms the following features:</a:t>
+            </a:r>
+            <a:endParaRPr lang="en-US" sz="3600" dirty="0"/>
+          </a:p>
+          <a:p>
             <a:pPr algn="l" indent="0" marL="0">
               <a:spcAft>
                 <a:spcPts val="800"/>
@@ -13236,7 +13395,7 @@
               <a:buNone/>
             </a:pPr>
             <a:r>
-              <a:rPr lang="en-US" sz="3600" dirty="0">
+              <a:rPr lang="en-US" sz="3600" b="1" dirty="0">
                 <a:solidFill>
                   <a:srgbClr val="111111"/>
                 </a:solidFill>
@@ -13244,7 +13403,24 @@
                 <a:ea typeface="Times New Roman" pitchFamily="34" charset="-122"/>
                 <a:cs typeface="Times New Roman" pitchFamily="34" charset="-120"/>
               </a:rPr>
-              <a:t>Hills of sand with a gentle windward slope and a steep slip face that slowly move in the direction of the wind.</a:t>
+              <a:t>Sand dunes: </a:t>
+            </a:r>
+            <a:pPr algn="l" indent="0" marL="0">
+              <a:spcAft>
+                <a:spcPts val="800"/>
+              </a:spcAft>
+              <a:buNone/>
+            </a:pPr>
+            <a:r>
+              <a:rPr lang="en-US" sz="3600" dirty="0">
+                <a:solidFill>
+                  <a:srgbClr val="111111"/>
+                </a:solidFill>
+                <a:latin typeface="Times New Roman" pitchFamily="34" charset="0"/>
+                <a:ea typeface="Times New Roman" pitchFamily="34" charset="-122"/>
+                <a:cs typeface="Times New Roman" pitchFamily="34" charset="-120"/>
+              </a:rPr>
+              <a:t>They are hills of sand with a gentle windward slope and a steep slip face.</a:t>
             </a:r>
             <a:endParaRPr lang="en-US" sz="3600" dirty="0"/>
           </a:p>
@@ -13252,7 +13428,7 @@
       </p:sp>
       <p:pic>
         <p:nvPicPr>
-          <p:cNvPr id="5" name="Image 0" descr="/home/claude/f4/img/v2/dune_move_last.png">    </p:cNvPr>
+          <p:cNvPr id="6" name="Image 0" descr="/home/claude/f4/img/v2/dune_move_last.png">    </p:cNvPr>
           <p:cNvPicPr>
             <a:picLocks noChangeAspect="1"/>
           </p:cNvPicPr>
@@ -13276,7 +13452,7 @@
       </p:pic>
       <p:sp>
         <p:nvSpPr>
-          <p:cNvPr id="6" name="Text 3"/>
+          <p:cNvPr id="7" name="Text 4"/>
           <p:cNvSpPr/>
           <p:nvPr/>
         </p:nvSpPr>
@@ -13442,7 +13618,7 @@
         <p:spPr>
           <a:xfrm>
             <a:off x="0" y="658368"/>
-            <a:ext cx="5120640" cy="5833872"/>
+            <a:ext cx="1463040" cy="5833872"/>
           </a:xfrm>
           <a:prstGeom prst="rect">
             <a:avLst/>
@@ -13457,8 +13633,8 @@
         </p:nvSpPr>
         <p:spPr>
           <a:xfrm>
-            <a:off x="5349240" y="1005840"/>
-            <a:ext cx="6522415" cy="731520"/>
+            <a:off x="1691640" y="1005840"/>
+            <a:ext cx="10180015" cy="731520"/>
           </a:xfrm>
           <a:prstGeom prst="rect">
             <a:avLst/>
@@ -13498,8 +13674,8 @@
         </p:nvSpPr>
         <p:spPr>
           <a:xfrm>
-            <a:off x="5349240" y="1783080"/>
-            <a:ext cx="6522415" cy="4663440"/>
+            <a:off x="1691640" y="1737360"/>
+            <a:ext cx="10180015" cy="457200"/>
           </a:xfrm>
           <a:prstGeom prst="rect">
             <a:avLst/>
@@ -13508,8 +13684,121 @@
           <a:ln/>
         </p:spPr>
         <p:txBody>
+          <a:bodyPr wrap="square" lIns="0" tIns="0" rIns="0" bIns="0" rtlCol="0" anchor="ctr"/>
+          <a:lstStyle/>
+          <a:p>
+            <a:pPr algn="l" indent="0" marL="0">
+              <a:buNone/>
+            </a:pPr>
+            <a:r>
+              <a:rPr lang="en-US" sz="3200" b="1" dirty="0">
+                <a:solidFill>
+                  <a:srgbClr val="990011"/>
+                </a:solidFill>
+                <a:latin typeface="Times New Roman" pitchFamily="34" charset="0"/>
+                <a:ea typeface="Times New Roman" pitchFamily="34" charset="-122"/>
+                <a:cs typeface="Times New Roman" pitchFamily="34" charset="-120"/>
+              </a:rPr>
+              <a:t>B) Features of Deposition</a:t>
+            </a:r>
+            <a:endParaRPr lang="en-US" sz="3200" dirty="0"/>
+          </a:p>
+        </p:txBody>
+      </p:sp>
+      <p:sp>
+        <p:nvSpPr>
+          <p:cNvPr id="6" name="Text 3"/>
+          <p:cNvSpPr/>
+          <p:nvPr/>
+        </p:nvSpPr>
+        <p:spPr>
+          <a:xfrm>
+            <a:off x="1691640" y="2240280"/>
+            <a:ext cx="10180015" cy="4206240"/>
+          </a:xfrm>
+          <a:prstGeom prst="rect">
+            <a:avLst/>
+          </a:prstGeom>
+          <a:noFill/>
+          <a:ln/>
+        </p:spPr>
+        <p:txBody>
           <a:bodyPr wrap="square" lIns="0" tIns="0" rIns="0" bIns="0" rtlCol="0" anchor="t"/>
           <a:lstStyle/>
+          <a:p>
+            <a:pPr algn="l" indent="0" marL="0">
+              <a:spcAft>
+                <a:spcPts val="800"/>
+              </a:spcAft>
+              <a:buNone/>
+            </a:pPr>
+            <a:r>
+              <a:rPr lang="en-US" sz="4000" b="1" dirty="0">
+                <a:solidFill>
+                  <a:srgbClr val="111111"/>
+                </a:solidFill>
+                <a:latin typeface="Times New Roman" pitchFamily="34" charset="0"/>
+                <a:ea typeface="Times New Roman" pitchFamily="34" charset="-122"/>
+                <a:cs typeface="Times New Roman" pitchFamily="34" charset="-120"/>
+              </a:rPr>
+              <a:t>Sand sheets: </a:t>
+            </a:r>
+            <a:pPr algn="l" indent="0" marL="0">
+              <a:spcAft>
+                <a:spcPts val="800"/>
+              </a:spcAft>
+              <a:buNone/>
+            </a:pPr>
+            <a:r>
+              <a:rPr lang="en-US" sz="4000" dirty="0">
+                <a:solidFill>
+                  <a:srgbClr val="111111"/>
+                </a:solidFill>
+                <a:latin typeface="Times New Roman" pitchFamily="34" charset="0"/>
+                <a:ea typeface="Times New Roman" pitchFamily="34" charset="-122"/>
+                <a:cs typeface="Times New Roman" pitchFamily="34" charset="-120"/>
+              </a:rPr>
+              <a:t>They are wide, flat spreads of sand.</a:t>
+            </a:r>
+            <a:endParaRPr lang="en-US" sz="4000" dirty="0"/>
+          </a:p>
+          <a:p>
+            <a:pPr algn="l" indent="0" marL="0">
+              <a:spcAft>
+                <a:spcPts val="800"/>
+              </a:spcAft>
+              <a:buNone/>
+            </a:pPr>
+            <a:r>
+              <a:rPr lang="en-US" sz="4000" b="1" dirty="0">
+                <a:solidFill>
+                  <a:srgbClr val="111111"/>
+                </a:solidFill>
+                <a:latin typeface="Times New Roman" pitchFamily="34" charset="0"/>
+                <a:ea typeface="Times New Roman" pitchFamily="34" charset="-122"/>
+                <a:cs typeface="Times New Roman" pitchFamily="34" charset="-120"/>
+              </a:rPr>
+              <a:t>Ripples: </a:t>
+            </a:r>
+            <a:pPr algn="l" indent="0" marL="0">
+              <a:spcAft>
+                <a:spcPts val="800"/>
+              </a:spcAft>
+              <a:buNone/>
+            </a:pPr>
+            <a:r>
+              <a:rPr lang="en-US" sz="4000" dirty="0">
+                <a:solidFill>
+                  <a:srgbClr val="111111"/>
+                </a:solidFill>
+                <a:latin typeface="Times New Roman" pitchFamily="34" charset="0"/>
+                <a:ea typeface="Times New Roman" pitchFamily="34" charset="-122"/>
+                <a:cs typeface="Times New Roman" pitchFamily="34" charset="-120"/>
+              </a:rPr>
+              <a:t>They are small waves of sand on the surface of sand sheets and dunes.</a:t>
+            </a:r>
+            <a:endParaRPr lang="en-US" sz="4000" dirty="0"/>
+          </a:p>
           <a:p>
             <a:pPr algn="l" indent="0" marL="0">
               <a:spcAft>
@@ -18396,7 +18685,7 @@
                           <a:ea typeface="Calibri" pitchFamily="34" charset="-122"/>
                           <a:cs typeface="Calibri" pitchFamily="34" charset="-120"/>
                         </a:rPr>
-                        <a:t>DEFINITIONS; Depositional Features of Wind Action; Dunes.</a:t>
+                        <a:t>DEFINITIONS; Causes of Deposition; Features of Deposition; Dunes.</a:t>
                       </a:r>
                       <a:endParaRPr lang="en-US" sz="1600" dirty="0">
                         <a:latin typeface="Calibri" charset="0"/>
